--- a/docs/html/传统节日/中国传统节日.pptx
+++ b/docs/html/传统节日/中国传统节日.pptx
@@ -7,26 +7,38 @@
   <p:sldIdLst>
     <p:sldId id="256" r:id="rId3"/>
     <p:sldId id="260" r:id="rId4"/>
-    <p:sldId id="257" r:id="rId5"/>
-    <p:sldId id="258" r:id="rId6"/>
-    <p:sldId id="259" r:id="rId7"/>
-    <p:sldId id="261" r:id="rId8"/>
-    <p:sldId id="263" r:id="rId9"/>
-    <p:sldId id="265" r:id="rId10"/>
-    <p:sldId id="266" r:id="rId11"/>
-    <p:sldId id="267" r:id="rId12"/>
-    <p:sldId id="269" r:id="rId13"/>
-    <p:sldId id="270" r:id="rId14"/>
-    <p:sldId id="272" r:id="rId15"/>
-    <p:sldId id="274" r:id="rId16"/>
-    <p:sldId id="276" r:id="rId17"/>
-    <p:sldId id="277" r:id="rId18"/>
-    <p:sldId id="279" r:id="rId19"/>
-    <p:sldId id="281" r:id="rId20"/>
-    <p:sldId id="283" r:id="rId21"/>
+    <p:sldId id="292" r:id="rId5"/>
+    <p:sldId id="257" r:id="rId6"/>
+    <p:sldId id="258" r:id="rId7"/>
+    <p:sldId id="284" r:id="rId8"/>
+    <p:sldId id="259" r:id="rId9"/>
+    <p:sldId id="261" r:id="rId10"/>
+    <p:sldId id="285" r:id="rId11"/>
+    <p:sldId id="263" r:id="rId12"/>
+    <p:sldId id="265" r:id="rId13"/>
+    <p:sldId id="286" r:id="rId14"/>
+    <p:sldId id="266" r:id="rId15"/>
+    <p:sldId id="267" r:id="rId16"/>
+    <p:sldId id="287" r:id="rId17"/>
+    <p:sldId id="269" r:id="rId18"/>
+    <p:sldId id="270" r:id="rId19"/>
+    <p:sldId id="288" r:id="rId20"/>
+    <p:sldId id="272" r:id="rId21"/>
+    <p:sldId id="274" r:id="rId22"/>
+    <p:sldId id="289" r:id="rId23"/>
+    <p:sldId id="276" r:id="rId24"/>
+    <p:sldId id="277" r:id="rId25"/>
+    <p:sldId id="290" r:id="rId26"/>
+    <p:sldId id="279" r:id="rId27"/>
+    <p:sldId id="281" r:id="rId28"/>
+    <p:sldId id="291" r:id="rId29"/>
+    <p:sldId id="283" r:id="rId30"/>
   </p:sldIdLst>
   <p:sldSz cx="12192000" cy="6858000"/>
   <p:notesSz cx="6858000" cy="9144000"/>
+  <p:custDataLst>
+    <p:tags r:id="rId34"/>
+  </p:custDataLst>
   <p:defaultTextStyle>
     <a:defPPr>
       <a:defRPr lang="zh-CN"/>
@@ -3156,6 +3168,1336 @@
 <file path=ppt/slides/slide10.xml><?xml version="1.0" encoding="utf-8"?>
 <p:sld xmlns:a="http://schemas.openxmlformats.org/drawingml/2006/main" xmlns:r="http://schemas.openxmlformats.org/officeDocument/2006/relationships" xmlns:p="http://schemas.openxmlformats.org/presentationml/2006/main">
   <p:cSld>
+    <p:bg>
+      <p:bgPr>
+        <a:blipFill>
+          <a:blip r:embed="rId1"/>
+          <a:stretch>
+            <a:fillRect/>
+          </a:stretch>
+        </a:blipFill>
+        <a:effectLst/>
+      </p:bgPr>
+    </p:bg>
+    <p:spTree>
+      <p:nvGrpSpPr>
+        <p:cNvPr id="1" name=""/>
+        <p:cNvGrpSpPr/>
+        <p:nvPr/>
+      </p:nvGrpSpPr>
+      <p:grpSpPr/>
+      <p:pic>
+        <p:nvPicPr>
+          <p:cNvPr id="102" name="图片 101"/>
+          <p:cNvPicPr/>
+          <p:nvPr/>
+        </p:nvPicPr>
+        <p:blipFill>
+          <a:blip r:embed="rId2"/>
+          <a:srcRect r="3002"/>
+          <a:stretch>
+            <a:fillRect/>
+          </a:stretch>
+        </p:blipFill>
+        <p:spPr>
+          <a:xfrm>
+            <a:off x="2924175" y="528955"/>
+            <a:ext cx="6343650" cy="5800090"/>
+          </a:xfrm>
+          <a:prstGeom prst="rect">
+            <a:avLst/>
+          </a:prstGeom>
+          <a:noFill/>
+          <a:ln w="9525">
+            <a:noFill/>
+          </a:ln>
+        </p:spPr>
+      </p:pic>
+      <p:sp>
+        <p:nvSpPr>
+          <p:cNvPr id="2" name="文本框 1"/>
+          <p:cNvSpPr txBox="1"/>
+          <p:nvPr/>
+        </p:nvSpPr>
+        <p:spPr>
+          <a:xfrm>
+            <a:off x="8183880" y="4695190"/>
+            <a:ext cx="3908425" cy="1198880"/>
+          </a:xfrm>
+          <a:prstGeom prst="rect">
+            <a:avLst/>
+          </a:prstGeom>
+          <a:noFill/>
+        </p:spPr>
+        <p:txBody>
+          <a:bodyPr wrap="square" rtlCol="0">
+            <a:spAutoFit/>
+          </a:bodyPr>
+          <a:p>
+            <a:r>
+              <a:rPr lang="en-US" altLang="zh-CN" sz="7200">
+                <a:latin typeface="楷体" panose="02010609060101010101" charset="-122"/>
+                <a:ea typeface="楷体" panose="02010609060101010101" charset="-122"/>
+                <a:cs typeface="楷体" panose="02010609060101010101" charset="-122"/>
+              </a:rPr>
+              <a:t>3.</a:t>
+            </a:r>
+            <a:r>
+              <a:rPr lang="zh-CN" altLang="en-US" sz="7200">
+                <a:latin typeface="楷体" panose="02010609060101010101" charset="-122"/>
+                <a:ea typeface="楷体" panose="02010609060101010101" charset="-122"/>
+                <a:cs typeface="楷体" panose="02010609060101010101" charset="-122"/>
+              </a:rPr>
+              <a:t>寒食节</a:t>
+            </a:r>
+            <a:endParaRPr lang="zh-CN" altLang="en-US" sz="7200">
+              <a:latin typeface="楷体" panose="02010609060101010101" charset="-122"/>
+              <a:ea typeface="楷体" panose="02010609060101010101" charset="-122"/>
+              <a:cs typeface="楷体" panose="02010609060101010101" charset="-122"/>
+            </a:endParaRPr>
+          </a:p>
+        </p:txBody>
+      </p:sp>
+    </p:spTree>
+    <p:custDataLst>
+      <p:tags r:id="rId3"/>
+    </p:custDataLst>
+  </p:cSld>
+  <p:clrMapOvr>
+    <a:masterClrMapping/>
+  </p:clrMapOvr>
+  <mc:AlternateContent xmlns:mc="http://schemas.openxmlformats.org/markup-compatibility/2006" xmlns:p159="http://schemas.microsoft.com/office/powerpoint/2015/09/main">
+    <mc:Choice Requires="p159">
+      <p:transition xmlns:p14="http://schemas.microsoft.com/office/powerpoint/2010/main" spd="slow" p14:dur="2000">
+        <p159:morph option="byObject"/>
+      </p:transition>
+    </mc:Choice>
+    <mc:Fallback>
+      <p:transition spd="slow">
+        <p:fade/>
+      </p:transition>
+    </mc:Fallback>
+  </mc:AlternateContent>
+  <p:timing>
+    <p:tnLst>
+      <p:par>
+        <p:cTn id="1" dur="indefinite" restart="never" nodeType="tmRoot">
+          <p:childTnLst>
+            <p:seq concurrent="1" nextAc="seek">
+              <p:cTn id="2" dur="indefinite" nodeType="mainSeq">
+                <p:childTnLst>
+                  <p:par>
+                    <p:cTn id="3" fill="hold">
+                      <p:stCondLst>
+                        <p:cond delay="indefinite"/>
+                      </p:stCondLst>
+                      <p:childTnLst>
+                        <p:par>
+                          <p:cTn id="4" fill="hold">
+                            <p:stCondLst>
+                              <p:cond delay="0"/>
+                            </p:stCondLst>
+                            <p:childTnLst>
+                              <p:par>
+                                <p:cTn id="5" presetID="27" presetClass="entr" presetSubtype="0" fill="hold" grpId="0" nodeType="clickEffect">
+                                  <p:stCondLst>
+                                    <p:cond delay="0"/>
+                                  </p:stCondLst>
+                                  <p:iterate type="lt">
+                                    <p:tmPct val="50000"/>
+                                  </p:iterate>
+                                  <p:childTnLst>
+                                    <p:set>
+                                      <p:cBhvr>
+                                        <p:cTn id="6" dur="1" fill="hold">
+                                          <p:stCondLst>
+                                            <p:cond delay="0"/>
+                                          </p:stCondLst>
+                                        </p:cTn>
+                                        <p:tgtEl>
+                                          <p:spTgt spid="2"/>
+                                        </p:tgtEl>
+                                        <p:attrNameLst>
+                                          <p:attrName>style.visibility</p:attrName>
+                                        </p:attrNameLst>
+                                      </p:cBhvr>
+                                      <p:to>
+                                        <p:strVal val="visible"/>
+                                      </p:to>
+                                    </p:set>
+                                    <p:anim calcmode="discrete" valueType="clr">
+                                      <p:cBhvr override="childStyle">
+                                        <p:cTn id="7" dur="80"/>
+                                        <p:tgtEl>
+                                          <p:spTgt spid="2"/>
+                                        </p:tgtEl>
+                                        <p:attrNameLst>
+                                          <p:attrName>style.color</p:attrName>
+                                        </p:attrNameLst>
+                                      </p:cBhvr>
+                                      <p:tavLst>
+                                        <p:tav tm="0">
+                                          <p:val>
+                                            <p:clrVal>
+                                              <a:schemeClr val="accent2"/>
+                                            </p:clrVal>
+                                          </p:val>
+                                        </p:tav>
+                                        <p:tav tm="50000">
+                                          <p:val>
+                                            <p:clrVal>
+                                              <a:schemeClr val="hlink"/>
+                                            </p:clrVal>
+                                          </p:val>
+                                        </p:tav>
+                                      </p:tavLst>
+                                    </p:anim>
+                                    <p:anim calcmode="discrete" valueType="clr">
+                                      <p:cBhvr>
+                                        <p:cTn id="8" dur="80"/>
+                                        <p:tgtEl>
+                                          <p:spTgt spid="2"/>
+                                        </p:tgtEl>
+                                        <p:attrNameLst>
+                                          <p:attrName>fillcolor</p:attrName>
+                                        </p:attrNameLst>
+                                      </p:cBhvr>
+                                      <p:tavLst>
+                                        <p:tav tm="0">
+                                          <p:val>
+                                            <p:clrVal>
+                                              <a:schemeClr val="accent2"/>
+                                            </p:clrVal>
+                                          </p:val>
+                                        </p:tav>
+                                        <p:tav tm="50000">
+                                          <p:val>
+                                            <p:clrVal>
+                                              <a:schemeClr val="hlink"/>
+                                            </p:clrVal>
+                                          </p:val>
+                                        </p:tav>
+                                      </p:tavLst>
+                                    </p:anim>
+                                    <p:set>
+                                      <p:cBhvr>
+                                        <p:cTn id="9" dur="80"/>
+                                        <p:tgtEl>
+                                          <p:spTgt spid="2"/>
+                                        </p:tgtEl>
+                                        <p:attrNameLst>
+                                          <p:attrName>fill.type</p:attrName>
+                                        </p:attrNameLst>
+                                      </p:cBhvr>
+                                      <p:to>
+                                        <p:strVal val="solid"/>
+                                      </p:to>
+                                    </p:set>
+                                  </p:childTnLst>
+                                </p:cTn>
+                              </p:par>
+                            </p:childTnLst>
+                          </p:cTn>
+                        </p:par>
+                      </p:childTnLst>
+                    </p:cTn>
+                  </p:par>
+                </p:childTnLst>
+              </p:cTn>
+              <p:prevCondLst>
+                <p:cond evt="onPrev" delay="0">
+                  <p:tgtEl>
+                    <p:sldTgt/>
+                  </p:tgtEl>
+                </p:cond>
+              </p:prevCondLst>
+              <p:nextCondLst>
+                <p:cond evt="onNext" delay="0">
+                  <p:tgtEl>
+                    <p:sldTgt/>
+                  </p:tgtEl>
+                </p:cond>
+              </p:nextCondLst>
+            </p:seq>
+          </p:childTnLst>
+        </p:cTn>
+      </p:par>
+    </p:tnLst>
+    <p:bldLst>
+      <p:bldP spid="2" grpId="0"/>
+      <p:bldP spid="2" grpId="1"/>
+    </p:bldLst>
+  </p:timing>
+</p:sld>
+</file>
+
+<file path=ppt/slides/slide11.xml><?xml version="1.0" encoding="utf-8"?>
+<p:sld xmlns:a="http://schemas.openxmlformats.org/drawingml/2006/main" xmlns:r="http://schemas.openxmlformats.org/officeDocument/2006/relationships" xmlns:p="http://schemas.openxmlformats.org/presentationml/2006/main">
+  <p:cSld>
+    <p:spTree>
+      <p:nvGrpSpPr>
+        <p:cNvPr id="1" name=""/>
+        <p:cNvGrpSpPr/>
+        <p:nvPr/>
+      </p:nvGrpSpPr>
+      <p:grpSpPr/>
+      <p:pic>
+        <p:nvPicPr>
+          <p:cNvPr id="5" name="图片 4"/>
+          <p:cNvPicPr/>
+          <p:nvPr/>
+        </p:nvPicPr>
+        <p:blipFill>
+          <a:blip r:embed="rId1"/>
+          <a:srcRect r="3002"/>
+          <a:stretch>
+            <a:fillRect/>
+          </a:stretch>
+        </p:blipFill>
+        <p:spPr>
+          <a:xfrm>
+            <a:off x="7598410" y="2657475"/>
+            <a:ext cx="4593590" cy="4200525"/>
+          </a:xfrm>
+          <a:prstGeom prst="rect">
+            <a:avLst/>
+          </a:prstGeom>
+          <a:noFill/>
+          <a:ln w="9525">
+            <a:noFill/>
+          </a:ln>
+        </p:spPr>
+      </p:pic>
+      <p:sp>
+        <p:nvSpPr>
+          <p:cNvPr id="2" name="文本框 1"/>
+          <p:cNvSpPr txBox="1"/>
+          <p:nvPr/>
+        </p:nvSpPr>
+        <p:spPr>
+          <a:xfrm>
+            <a:off x="635" y="0"/>
+            <a:ext cx="9388475" cy="6554470"/>
+          </a:xfrm>
+          <a:prstGeom prst="rect">
+            <a:avLst/>
+          </a:prstGeom>
+          <a:noFill/>
+        </p:spPr>
+        <p:txBody>
+          <a:bodyPr wrap="square" rtlCol="0" anchor="t">
+            <a:spAutoFit/>
+          </a:bodyPr>
+          <a:p>
+            <a:pPr>
+              <a:lnSpc>
+                <a:spcPct val="100000"/>
+              </a:lnSpc>
+            </a:pPr>
+            <a:r>
+              <a:rPr lang="zh-CN" altLang="en-US" sz="2000">
+                <a:latin typeface="楷体" panose="02010609060101010101" charset="-122"/>
+                <a:ea typeface="楷体" panose="02010609060101010101" charset="-122"/>
+                <a:cs typeface="楷体" panose="02010609060101010101" charset="-122"/>
+              </a:rPr>
+              <a:t>相传春秋战国时代，晋献公的妃子骊姬为了让自己的儿子奚齐继位，就设毒计谋害太子申生，申生被逼自杀。申生的弟弟重耳，为了躲避祸害，流亡出走。在流亡期间，重耳受尽了屈辱。原来跟着他一道出奔的臣子，大多陆陆续续地各奔出路去了。只剩下少数几个忠心耿耿的人，一直追随着他。其中一人叫介子推。有一次，重耳饿晕了过去。介子推为了救重耳，从自己腿上割下了一块肉，用火烤熟了就送给重耳吃。十九年后，重耳回国做了君主，就是著名春秋五霸之一晋文公。</a:t>
+            </a:r>
+            <a:endParaRPr lang="zh-CN" altLang="en-US" sz="2000">
+              <a:latin typeface="楷体" panose="02010609060101010101" charset="-122"/>
+              <a:ea typeface="楷体" panose="02010609060101010101" charset="-122"/>
+              <a:cs typeface="楷体" panose="02010609060101010101" charset="-122"/>
+            </a:endParaRPr>
+          </a:p>
+          <a:p>
+            <a:pPr>
+              <a:lnSpc>
+                <a:spcPct val="100000"/>
+              </a:lnSpc>
+            </a:pPr>
+            <a:endParaRPr lang="zh-CN" altLang="en-US" sz="2000">
+              <a:latin typeface="楷体" panose="02010609060101010101" charset="-122"/>
+              <a:ea typeface="楷体" panose="02010609060101010101" charset="-122"/>
+              <a:cs typeface="楷体" panose="02010609060101010101" charset="-122"/>
+            </a:endParaRPr>
+          </a:p>
+          <a:p>
+            <a:pPr>
+              <a:lnSpc>
+                <a:spcPct val="100000"/>
+              </a:lnSpc>
+            </a:pPr>
+            <a:r>
+              <a:rPr lang="zh-CN" altLang="en-US" sz="2000">
+                <a:latin typeface="楷体" panose="02010609060101010101" charset="-122"/>
+                <a:ea typeface="楷体" panose="02010609060101010101" charset="-122"/>
+                <a:cs typeface="楷体" panose="02010609060101010101" charset="-122"/>
+              </a:rPr>
+              <a:t>晋文公执政后，对那些和他同甘共苦的臣子大加封赏，唯独忘了介子推。有人在晋文公面前为介子推叫屈。晋文公猛然忆起旧事，心中有愧，马上差人去请介子推上朝受赏封官。可是，差人去了几趟，介子推不来。晋文公只好亲去请。可是，当晋文公来到介子推家时，只见大门紧闭。介子推不愿见他，已经背着老母躲进了绵山(今山西介休县东南)。晋文公便让他的御林军上绵山搜索，没有找到。于是，有人出了个主意说，不如放火烧山，三面点火，留下一方，大火起时介子推会自己走</a:t>
+            </a:r>
+            <a:endParaRPr lang="zh-CN" altLang="en-US" sz="2000">
+              <a:latin typeface="楷体" panose="02010609060101010101" charset="-122"/>
+              <a:ea typeface="楷体" panose="02010609060101010101" charset="-122"/>
+              <a:cs typeface="楷体" panose="02010609060101010101" charset="-122"/>
+            </a:endParaRPr>
+          </a:p>
+          <a:p>
+            <a:pPr>
+              <a:lnSpc>
+                <a:spcPct val="100000"/>
+              </a:lnSpc>
+            </a:pPr>
+            <a:r>
+              <a:rPr lang="zh-CN" altLang="en-US" sz="2000">
+                <a:latin typeface="楷体" panose="02010609060101010101" charset="-122"/>
+                <a:ea typeface="楷体" panose="02010609060101010101" charset="-122"/>
+                <a:cs typeface="楷体" panose="02010609060101010101" charset="-122"/>
+              </a:rPr>
+              <a:t>出来的。晋文公乃下令举火烧山，孰料大火烧了三天三夜，大火熄灭后，终究不</a:t>
+            </a:r>
+            <a:endParaRPr lang="zh-CN" altLang="en-US" sz="2000">
+              <a:latin typeface="楷体" panose="02010609060101010101" charset="-122"/>
+              <a:ea typeface="楷体" panose="02010609060101010101" charset="-122"/>
+              <a:cs typeface="楷体" panose="02010609060101010101" charset="-122"/>
+            </a:endParaRPr>
+          </a:p>
+          <a:p>
+            <a:pPr>
+              <a:lnSpc>
+                <a:spcPct val="100000"/>
+              </a:lnSpc>
+            </a:pPr>
+            <a:r>
+              <a:rPr lang="zh-CN" altLang="en-US" sz="2000">
+                <a:latin typeface="楷体" panose="02010609060101010101" charset="-122"/>
+                <a:ea typeface="楷体" panose="02010609060101010101" charset="-122"/>
+                <a:cs typeface="楷体" panose="02010609060101010101" charset="-122"/>
+              </a:rPr>
+              <a:t>见介子推出来。上山一看，介子推母子俩抱着一棵烧焦的大柳树已经死了。晋</a:t>
+            </a:r>
+            <a:endParaRPr lang="zh-CN" altLang="en-US" sz="2000">
+              <a:latin typeface="楷体" panose="02010609060101010101" charset="-122"/>
+              <a:ea typeface="楷体" panose="02010609060101010101" charset="-122"/>
+              <a:cs typeface="楷体" panose="02010609060101010101" charset="-122"/>
+            </a:endParaRPr>
+          </a:p>
+          <a:p>
+            <a:pPr>
+              <a:lnSpc>
+                <a:spcPct val="100000"/>
+              </a:lnSpc>
+            </a:pPr>
+            <a:r>
+              <a:rPr lang="zh-CN" altLang="en-US" sz="2000">
+                <a:latin typeface="楷体" panose="02010609060101010101" charset="-122"/>
+                <a:ea typeface="楷体" panose="02010609060101010101" charset="-122"/>
+                <a:cs typeface="楷体" panose="02010609060101010101" charset="-122"/>
+              </a:rPr>
+              <a:t>文公望着介子推的尸体哭拜一阵，然后安葬遗体。</a:t>
+            </a:r>
+            <a:endParaRPr lang="zh-CN" altLang="en-US" sz="2000">
+              <a:latin typeface="楷体" panose="02010609060101010101" charset="-122"/>
+              <a:ea typeface="楷体" panose="02010609060101010101" charset="-122"/>
+              <a:cs typeface="楷体" panose="02010609060101010101" charset="-122"/>
+            </a:endParaRPr>
+          </a:p>
+          <a:p>
+            <a:pPr>
+              <a:lnSpc>
+                <a:spcPct val="100000"/>
+              </a:lnSpc>
+            </a:pPr>
+            <a:endParaRPr lang="zh-CN" altLang="en-US" sz="2000">
+              <a:latin typeface="楷体" panose="02010609060101010101" charset="-122"/>
+              <a:ea typeface="楷体" panose="02010609060101010101" charset="-122"/>
+              <a:cs typeface="楷体" panose="02010609060101010101" charset="-122"/>
+            </a:endParaRPr>
+          </a:p>
+          <a:p>
+            <a:pPr>
+              <a:lnSpc>
+                <a:spcPct val="100000"/>
+              </a:lnSpc>
+            </a:pPr>
+            <a:r>
+              <a:rPr lang="zh-CN" altLang="en-US" sz="2000">
+                <a:latin typeface="楷体" panose="02010609060101010101" charset="-122"/>
+                <a:ea typeface="楷体" panose="02010609060101010101" charset="-122"/>
+                <a:cs typeface="楷体" panose="02010609060101010101" charset="-122"/>
+              </a:rPr>
+              <a:t>为了纪念介子推，晋文公下令把绵山改为“介山”，在山上建立祠堂，并把放火</a:t>
+            </a:r>
+            <a:endParaRPr lang="zh-CN" altLang="en-US" sz="2000">
+              <a:latin typeface="楷体" panose="02010609060101010101" charset="-122"/>
+              <a:ea typeface="楷体" panose="02010609060101010101" charset="-122"/>
+              <a:cs typeface="楷体" panose="02010609060101010101" charset="-122"/>
+            </a:endParaRPr>
+          </a:p>
+          <a:p>
+            <a:pPr>
+              <a:lnSpc>
+                <a:spcPct val="100000"/>
+              </a:lnSpc>
+            </a:pPr>
+            <a:r>
+              <a:rPr lang="zh-CN" altLang="en-US" sz="2000">
+                <a:latin typeface="楷体" panose="02010609060101010101" charset="-122"/>
+                <a:ea typeface="楷体" panose="02010609060101010101" charset="-122"/>
+                <a:cs typeface="楷体" panose="02010609060101010101" charset="-122"/>
+              </a:rPr>
+              <a:t>烧山的这一天定为寒食节，晓谕全国，每年这天禁忌烟火，只吃寒食。 走时，他伐了一段烧焦的柳木，到宫中做了双木屐，每天望着它叹道：“悲哉足下。”“足下”是古人下级对上级或同辈之间相互尊敬的称呼，据说就是来源于此。</a:t>
+            </a:r>
+            <a:endParaRPr lang="zh-CN" altLang="en-US" sz="2000">
+              <a:latin typeface="楷体" panose="02010609060101010101" charset="-122"/>
+              <a:ea typeface="楷体" panose="02010609060101010101" charset="-122"/>
+              <a:cs typeface="楷体" panose="02010609060101010101" charset="-122"/>
+            </a:endParaRPr>
+          </a:p>
+        </p:txBody>
+      </p:sp>
+      <p:sp>
+        <p:nvSpPr>
+          <p:cNvPr id="7" name="文本框 6"/>
+          <p:cNvSpPr txBox="1"/>
+          <p:nvPr/>
+        </p:nvSpPr>
+        <p:spPr>
+          <a:xfrm>
+            <a:off x="9958070" y="958850"/>
+            <a:ext cx="1810385" cy="645160"/>
+          </a:xfrm>
+          <a:prstGeom prst="rect">
+            <a:avLst/>
+          </a:prstGeom>
+          <a:noFill/>
+        </p:spPr>
+        <p:txBody>
+          <a:bodyPr wrap="square" rtlCol="0">
+            <a:spAutoFit/>
+          </a:bodyPr>
+          <a:p>
+            <a:r>
+              <a:rPr lang="zh-CN" altLang="en-US" sz="3600">
+                <a:latin typeface="楷体" panose="02010609060101010101" charset="-122"/>
+                <a:ea typeface="楷体" panose="02010609060101010101" charset="-122"/>
+              </a:rPr>
+              <a:t>寒食</a:t>
+            </a:r>
+            <a:r>
+              <a:rPr lang="zh-CN" altLang="en-US" sz="3600">
+                <a:latin typeface="楷体" panose="02010609060101010101" charset="-122"/>
+                <a:ea typeface="楷体" panose="02010609060101010101" charset="-122"/>
+              </a:rPr>
+              <a:t>节</a:t>
+            </a:r>
+            <a:endParaRPr lang="zh-CN" altLang="en-US" sz="3600">
+              <a:latin typeface="楷体" panose="02010609060101010101" charset="-122"/>
+              <a:ea typeface="楷体" panose="02010609060101010101" charset="-122"/>
+            </a:endParaRPr>
+          </a:p>
+        </p:txBody>
+      </p:sp>
+    </p:spTree>
+    <p:custDataLst>
+      <p:tags r:id="rId2"/>
+    </p:custDataLst>
+  </p:cSld>
+  <p:clrMapOvr>
+    <a:masterClrMapping/>
+  </p:clrMapOvr>
+  <mc:AlternateContent xmlns:mc="http://schemas.openxmlformats.org/markup-compatibility/2006" xmlns:p159="http://schemas.microsoft.com/office/powerpoint/2015/09/main">
+    <mc:Choice Requires="p159">
+      <p:transition xmlns:p14="http://schemas.microsoft.com/office/powerpoint/2010/main" spd="slow" p14:dur="2000">
+        <p159:morph option="byObject"/>
+      </p:transition>
+    </mc:Choice>
+    <mc:Fallback>
+      <p:transition spd="slow">
+        <p:fade/>
+      </p:transition>
+    </mc:Fallback>
+  </mc:AlternateContent>
+  <p:timing>
+    <p:tnLst>
+      <p:par>
+        <p:cTn id="1" dur="indefinite" restart="never" nodeType="tmRoot">
+          <p:childTnLst>
+            <p:seq concurrent="1" nextAc="seek">
+              <p:cTn id="2" dur="indefinite" nodeType="mainSeq">
+                <p:childTnLst>
+                  <p:par>
+                    <p:cTn id="3" fill="hold">
+                      <p:stCondLst>
+                        <p:cond delay="indefinite"/>
+                      </p:stCondLst>
+                      <p:childTnLst>
+                        <p:par>
+                          <p:cTn id="4" fill="hold">
+                            <p:stCondLst>
+                              <p:cond delay="0"/>
+                            </p:stCondLst>
+                            <p:childTnLst>
+                              <p:par>
+                                <p:cTn id="5" presetID="27" presetClass="entr" presetSubtype="0" fill="hold" grpId="0" nodeType="clickEffect">
+                                  <p:stCondLst>
+                                    <p:cond delay="0"/>
+                                  </p:stCondLst>
+                                  <p:iterate type="lt">
+                                    <p:tmPct val="50000"/>
+                                  </p:iterate>
+                                  <p:childTnLst>
+                                    <p:set>
+                                      <p:cBhvr>
+                                        <p:cTn id="6" dur="1" fill="hold">
+                                          <p:stCondLst>
+                                            <p:cond delay="0"/>
+                                          </p:stCondLst>
+                                        </p:cTn>
+                                        <p:tgtEl>
+                                          <p:spTgt spid="7"/>
+                                        </p:tgtEl>
+                                        <p:attrNameLst>
+                                          <p:attrName>style.visibility</p:attrName>
+                                        </p:attrNameLst>
+                                      </p:cBhvr>
+                                      <p:to>
+                                        <p:strVal val="visible"/>
+                                      </p:to>
+                                    </p:set>
+                                    <p:anim calcmode="discrete" valueType="clr">
+                                      <p:cBhvr override="childStyle">
+                                        <p:cTn id="7" dur="80"/>
+                                        <p:tgtEl>
+                                          <p:spTgt spid="7"/>
+                                        </p:tgtEl>
+                                        <p:attrNameLst>
+                                          <p:attrName>style.color</p:attrName>
+                                        </p:attrNameLst>
+                                      </p:cBhvr>
+                                      <p:tavLst>
+                                        <p:tav tm="0">
+                                          <p:val>
+                                            <p:clrVal>
+                                              <a:schemeClr val="accent2"/>
+                                            </p:clrVal>
+                                          </p:val>
+                                        </p:tav>
+                                        <p:tav tm="50000">
+                                          <p:val>
+                                            <p:clrVal>
+                                              <a:schemeClr val="hlink"/>
+                                            </p:clrVal>
+                                          </p:val>
+                                        </p:tav>
+                                      </p:tavLst>
+                                    </p:anim>
+                                    <p:anim calcmode="discrete" valueType="clr">
+                                      <p:cBhvr>
+                                        <p:cTn id="8" dur="80"/>
+                                        <p:tgtEl>
+                                          <p:spTgt spid="7"/>
+                                        </p:tgtEl>
+                                        <p:attrNameLst>
+                                          <p:attrName>fillcolor</p:attrName>
+                                        </p:attrNameLst>
+                                      </p:cBhvr>
+                                      <p:tavLst>
+                                        <p:tav tm="0">
+                                          <p:val>
+                                            <p:clrVal>
+                                              <a:schemeClr val="accent2"/>
+                                            </p:clrVal>
+                                          </p:val>
+                                        </p:tav>
+                                        <p:tav tm="50000">
+                                          <p:val>
+                                            <p:clrVal>
+                                              <a:schemeClr val="hlink"/>
+                                            </p:clrVal>
+                                          </p:val>
+                                        </p:tav>
+                                      </p:tavLst>
+                                    </p:anim>
+                                    <p:set>
+                                      <p:cBhvr>
+                                        <p:cTn id="9" dur="80"/>
+                                        <p:tgtEl>
+                                          <p:spTgt spid="7"/>
+                                        </p:tgtEl>
+                                        <p:attrNameLst>
+                                          <p:attrName>fill.type</p:attrName>
+                                        </p:attrNameLst>
+                                      </p:cBhvr>
+                                      <p:to>
+                                        <p:strVal val="solid"/>
+                                      </p:to>
+                                    </p:set>
+                                  </p:childTnLst>
+                                </p:cTn>
+                              </p:par>
+                            </p:childTnLst>
+                          </p:cTn>
+                        </p:par>
+                      </p:childTnLst>
+                    </p:cTn>
+                  </p:par>
+                </p:childTnLst>
+              </p:cTn>
+              <p:prevCondLst>
+                <p:cond evt="onPrev" delay="0">
+                  <p:tgtEl>
+                    <p:sldTgt/>
+                  </p:tgtEl>
+                </p:cond>
+              </p:prevCondLst>
+              <p:nextCondLst>
+                <p:cond evt="onNext" delay="0">
+                  <p:tgtEl>
+                    <p:sldTgt/>
+                  </p:tgtEl>
+                </p:cond>
+              </p:nextCondLst>
+            </p:seq>
+          </p:childTnLst>
+        </p:cTn>
+      </p:par>
+    </p:tnLst>
+    <p:bldLst>
+      <p:bldP spid="7" grpId="0"/>
+      <p:bldP spid="7" grpId="1"/>
+    </p:bldLst>
+  </p:timing>
+</p:sld>
+</file>
+
+<file path=ppt/slides/slide12.xml><?xml version="1.0" encoding="utf-8"?>
+<p:sld xmlns:a="http://schemas.openxmlformats.org/drawingml/2006/main" xmlns:r="http://schemas.openxmlformats.org/officeDocument/2006/relationships" xmlns:p="http://schemas.openxmlformats.org/presentationml/2006/main">
+  <p:cSld>
+    <p:spTree>
+      <p:nvGrpSpPr>
+        <p:cNvPr id="1" name=""/>
+        <p:cNvGrpSpPr/>
+        <p:nvPr/>
+      </p:nvGrpSpPr>
+      <p:grpSpPr/>
+      <p:pic>
+        <p:nvPicPr>
+          <p:cNvPr id="4" name="图片 3"/>
+          <p:cNvPicPr/>
+          <p:nvPr>
+            <p:custDataLst>
+              <p:tags r:id="rId1"/>
+            </p:custDataLst>
+          </p:nvPr>
+        </p:nvPicPr>
+        <p:blipFill>
+          <a:blip r:embed="rId2"/>
+          <a:srcRect r="3002"/>
+          <a:stretch>
+            <a:fillRect/>
+          </a:stretch>
+        </p:blipFill>
+        <p:spPr>
+          <a:xfrm>
+            <a:off x="7117715" y="2369820"/>
+            <a:ext cx="4593590" cy="4200525"/>
+          </a:xfrm>
+          <a:prstGeom prst="rect">
+            <a:avLst/>
+          </a:prstGeom>
+          <a:noFill/>
+          <a:ln w="9525">
+            <a:noFill/>
+          </a:ln>
+        </p:spPr>
+      </p:pic>
+      <p:sp>
+        <p:nvSpPr>
+          <p:cNvPr id="5" name="文本框 4"/>
+          <p:cNvSpPr txBox="1"/>
+          <p:nvPr/>
+        </p:nvSpPr>
+        <p:spPr>
+          <a:xfrm>
+            <a:off x="770255" y="758190"/>
+            <a:ext cx="6096000" cy="1753235"/>
+          </a:xfrm>
+          <a:prstGeom prst="rect">
+            <a:avLst/>
+          </a:prstGeom>
+          <a:noFill/>
+        </p:spPr>
+        <p:txBody>
+          <a:bodyPr wrap="square" rtlCol="0" anchor="t">
+            <a:spAutoFit/>
+          </a:bodyPr>
+          <a:p>
+            <a:pPr algn="ctr"/>
+            <a:r>
+              <a:rPr lang="zh-CN" altLang="en-US">
+                <a:latin typeface="楷体" panose="02010609060101010101" charset="-122"/>
+                <a:ea typeface="楷体" panose="02010609060101010101" charset="-122"/>
+                <a:cs typeface="楷体" panose="02010609060101010101" charset="-122"/>
+              </a:rPr>
+              <a:t>《寒食野望吟》</a:t>
+            </a:r>
+            <a:endParaRPr lang="zh-CN" altLang="en-US">
+              <a:latin typeface="楷体" panose="02010609060101010101" charset="-122"/>
+              <a:ea typeface="楷体" panose="02010609060101010101" charset="-122"/>
+              <a:cs typeface="楷体" panose="02010609060101010101" charset="-122"/>
+            </a:endParaRPr>
+          </a:p>
+          <a:p>
+            <a:pPr algn="ctr"/>
+            <a:r>
+              <a:rPr lang="zh-CN" altLang="en-US">
+                <a:latin typeface="楷体" panose="02010609060101010101" charset="-122"/>
+                <a:ea typeface="楷体" panose="02010609060101010101" charset="-122"/>
+                <a:cs typeface="楷体" panose="02010609060101010101" charset="-122"/>
+              </a:rPr>
+              <a:t>唐·白居易</a:t>
+            </a:r>
+            <a:endParaRPr lang="zh-CN" altLang="en-US">
+              <a:latin typeface="楷体" panose="02010609060101010101" charset="-122"/>
+              <a:ea typeface="楷体" panose="02010609060101010101" charset="-122"/>
+              <a:cs typeface="楷体" panose="02010609060101010101" charset="-122"/>
+            </a:endParaRPr>
+          </a:p>
+          <a:p>
+            <a:pPr algn="ctr"/>
+            <a:r>
+              <a:rPr lang="zh-CN" altLang="en-US">
+                <a:latin typeface="楷体" panose="02010609060101010101" charset="-122"/>
+                <a:ea typeface="楷体" panose="02010609060101010101" charset="-122"/>
+                <a:cs typeface="楷体" panose="02010609060101010101" charset="-122"/>
+              </a:rPr>
+              <a:t>乌啼鹊噪昏乔木，清明寒食谁家哭。</a:t>
+            </a:r>
+            <a:endParaRPr lang="zh-CN" altLang="en-US">
+              <a:latin typeface="楷体" panose="02010609060101010101" charset="-122"/>
+              <a:ea typeface="楷体" panose="02010609060101010101" charset="-122"/>
+              <a:cs typeface="楷体" panose="02010609060101010101" charset="-122"/>
+            </a:endParaRPr>
+          </a:p>
+          <a:p>
+            <a:pPr algn="ctr"/>
+            <a:r>
+              <a:rPr lang="zh-CN" altLang="en-US">
+                <a:latin typeface="楷体" panose="02010609060101010101" charset="-122"/>
+                <a:ea typeface="楷体" panose="02010609060101010101" charset="-122"/>
+                <a:cs typeface="楷体" panose="02010609060101010101" charset="-122"/>
+              </a:rPr>
+              <a:t>风吹旷野纸钱飞，古墓垒垒春草绿。</a:t>
+            </a:r>
+            <a:endParaRPr lang="zh-CN" altLang="en-US">
+              <a:latin typeface="楷体" panose="02010609060101010101" charset="-122"/>
+              <a:ea typeface="楷体" panose="02010609060101010101" charset="-122"/>
+              <a:cs typeface="楷体" panose="02010609060101010101" charset="-122"/>
+            </a:endParaRPr>
+          </a:p>
+          <a:p>
+            <a:pPr algn="ctr"/>
+            <a:r>
+              <a:rPr lang="zh-CN" altLang="en-US">
+                <a:latin typeface="楷体" panose="02010609060101010101" charset="-122"/>
+                <a:ea typeface="楷体" panose="02010609060101010101" charset="-122"/>
+                <a:cs typeface="楷体" panose="02010609060101010101" charset="-122"/>
+              </a:rPr>
+              <a:t>棠梨花映白杨树，尽是死生别离处。</a:t>
+            </a:r>
+            <a:endParaRPr lang="zh-CN" altLang="en-US">
+              <a:latin typeface="楷体" panose="02010609060101010101" charset="-122"/>
+              <a:ea typeface="楷体" panose="02010609060101010101" charset="-122"/>
+              <a:cs typeface="楷体" panose="02010609060101010101" charset="-122"/>
+            </a:endParaRPr>
+          </a:p>
+          <a:p>
+            <a:pPr algn="ctr"/>
+            <a:r>
+              <a:rPr lang="zh-CN" altLang="en-US">
+                <a:latin typeface="楷体" panose="02010609060101010101" charset="-122"/>
+                <a:ea typeface="楷体" panose="02010609060101010101" charset="-122"/>
+                <a:cs typeface="楷体" panose="02010609060101010101" charset="-122"/>
+              </a:rPr>
+              <a:t>冥冥重泉哭不闻，萧萧暮雨人归去。</a:t>
+            </a:r>
+            <a:endParaRPr lang="zh-CN" altLang="en-US">
+              <a:latin typeface="楷体" panose="02010609060101010101" charset="-122"/>
+              <a:ea typeface="楷体" panose="02010609060101010101" charset="-122"/>
+              <a:cs typeface="楷体" panose="02010609060101010101" charset="-122"/>
+            </a:endParaRPr>
+          </a:p>
+        </p:txBody>
+      </p:sp>
+    </p:spTree>
+    <p:custDataLst>
+      <p:tags r:id="rId3"/>
+    </p:custDataLst>
+  </p:cSld>
+  <p:clrMapOvr>
+    <a:masterClrMapping/>
+  </p:clrMapOvr>
+  <mc:AlternateContent xmlns:mc="http://schemas.openxmlformats.org/markup-compatibility/2006" xmlns:p159="http://schemas.microsoft.com/office/powerpoint/2015/09/main">
+    <mc:Choice Requires="p159">
+      <p:transition xmlns:p14="http://schemas.microsoft.com/office/powerpoint/2010/main" spd="slow" p14:dur="2000">
+        <p159:morph option="byObject"/>
+      </p:transition>
+    </mc:Choice>
+    <mc:Fallback>
+      <p:transition spd="slow">
+        <p:fade/>
+      </p:transition>
+    </mc:Fallback>
+  </mc:AlternateContent>
+  <p:timing>
+    <p:tnLst>
+      <p:par>
+        <p:cTn id="1" dur="indefinite" restart="never" nodeType="tmRoot">
+          <p:childTnLst>
+            <p:seq concurrent="1" nextAc="seek">
+              <p:cTn id="2" dur="indefinite" nodeType="mainSeq">
+                <p:childTnLst>
+                  <p:par>
+                    <p:cTn id="3" fill="hold">
+                      <p:stCondLst>
+                        <p:cond delay="indefinite"/>
+                      </p:stCondLst>
+                      <p:childTnLst>
+                        <p:par>
+                          <p:cTn id="4" fill="hold">
+                            <p:stCondLst>
+                              <p:cond delay="0"/>
+                            </p:stCondLst>
+                            <p:childTnLst>
+                              <p:par>
+                                <p:cTn id="5" presetID="4" presetClass="entr" presetSubtype="16" fill="hold" nodeType="clickEffect">
+                                  <p:stCondLst>
+                                    <p:cond delay="0"/>
+                                  </p:stCondLst>
+                                  <p:childTnLst>
+                                    <p:set>
+                                      <p:cBhvr>
+                                        <p:cTn id="6" dur="1000" fill="hold">
+                                          <p:stCondLst>
+                                            <p:cond delay="0"/>
+                                          </p:stCondLst>
+                                        </p:cTn>
+                                        <p:tgtEl>
+                                          <p:spTgt spid="4"/>
+                                        </p:tgtEl>
+                                        <p:attrNameLst>
+                                          <p:attrName>style.visibility</p:attrName>
+                                        </p:attrNameLst>
+                                      </p:cBhvr>
+                                      <p:to>
+                                        <p:strVal val="visible"/>
+                                      </p:to>
+                                    </p:set>
+                                    <p:animEffect transition="in" filter="box(in)">
+                                      <p:cBhvr>
+                                        <p:cTn id="7" dur="1000"/>
+                                        <p:tgtEl>
+                                          <p:spTgt spid="4"/>
+                                        </p:tgtEl>
+                                      </p:cBhvr>
+                                    </p:animEffect>
+                                  </p:childTnLst>
+                                </p:cTn>
+                              </p:par>
+                            </p:childTnLst>
+                          </p:cTn>
+                        </p:par>
+                      </p:childTnLst>
+                    </p:cTn>
+                  </p:par>
+                  <p:par>
+                    <p:cTn id="8" fill="hold">
+                      <p:stCondLst>
+                        <p:cond delay="indefinite"/>
+                      </p:stCondLst>
+                      <p:childTnLst>
+                        <p:par>
+                          <p:cTn id="9" fill="hold">
+                            <p:stCondLst>
+                              <p:cond delay="0"/>
+                            </p:stCondLst>
+                            <p:childTnLst>
+                              <p:par>
+                                <p:cTn id="10" presetID="2" presetClass="entr" presetSubtype="4" fill="hold" grpId="0" nodeType="clickEffect">
+                                  <p:stCondLst>
+                                    <p:cond delay="0"/>
+                                  </p:stCondLst>
+                                  <p:childTnLst>
+                                    <p:set>
+                                      <p:cBhvr>
+                                        <p:cTn id="11" dur="1" fill="hold">
+                                          <p:stCondLst>
+                                            <p:cond delay="0"/>
+                                          </p:stCondLst>
+                                        </p:cTn>
+                                        <p:tgtEl>
+                                          <p:spTgt spid="5"/>
+                                        </p:tgtEl>
+                                        <p:attrNameLst>
+                                          <p:attrName>style.visibility</p:attrName>
+                                        </p:attrNameLst>
+                                      </p:cBhvr>
+                                      <p:to>
+                                        <p:strVal val="visible"/>
+                                      </p:to>
+                                    </p:set>
+                                    <p:anim calcmode="lin" valueType="num">
+                                      <p:cBhvr additive="base">
+                                        <p:cTn id="12" dur="500" fill="hold"/>
+                                        <p:tgtEl>
+                                          <p:spTgt spid="5"/>
+                                        </p:tgtEl>
+                                        <p:attrNameLst>
+                                          <p:attrName>ppt_x</p:attrName>
+                                        </p:attrNameLst>
+                                      </p:cBhvr>
+                                      <p:tavLst>
+                                        <p:tav tm="0">
+                                          <p:val>
+                                            <p:strVal val="#ppt_x"/>
+                                          </p:val>
+                                        </p:tav>
+                                        <p:tav tm="100000">
+                                          <p:val>
+                                            <p:strVal val="#ppt_x"/>
+                                          </p:val>
+                                        </p:tav>
+                                      </p:tavLst>
+                                    </p:anim>
+                                    <p:anim calcmode="lin" valueType="num">
+                                      <p:cBhvr additive="base">
+                                        <p:cTn id="13" dur="500" fill="hold"/>
+                                        <p:tgtEl>
+                                          <p:spTgt spid="5"/>
+                                        </p:tgtEl>
+                                        <p:attrNameLst>
+                                          <p:attrName>ppt_y</p:attrName>
+                                        </p:attrNameLst>
+                                      </p:cBhvr>
+                                      <p:tavLst>
+                                        <p:tav tm="0">
+                                          <p:val>
+                                            <p:strVal val="1+#ppt_h/2"/>
+                                          </p:val>
+                                        </p:tav>
+                                        <p:tav tm="100000">
+                                          <p:val>
+                                            <p:strVal val="#ppt_y"/>
+                                          </p:val>
+                                        </p:tav>
+                                      </p:tavLst>
+                                    </p:anim>
+                                  </p:childTnLst>
+                                </p:cTn>
+                              </p:par>
+                            </p:childTnLst>
+                          </p:cTn>
+                        </p:par>
+                      </p:childTnLst>
+                    </p:cTn>
+                  </p:par>
+                </p:childTnLst>
+              </p:cTn>
+              <p:prevCondLst>
+                <p:cond evt="onPrev" delay="0">
+                  <p:tgtEl>
+                    <p:sldTgt/>
+                  </p:tgtEl>
+                </p:cond>
+              </p:prevCondLst>
+              <p:nextCondLst>
+                <p:cond evt="onNext" delay="0">
+                  <p:tgtEl>
+                    <p:sldTgt/>
+                  </p:tgtEl>
+                </p:cond>
+              </p:nextCondLst>
+            </p:seq>
+          </p:childTnLst>
+        </p:cTn>
+      </p:par>
+    </p:tnLst>
+    <p:bldLst>
+      <p:bldP spid="5" grpId="0"/>
+      <p:bldP spid="5" grpId="1"/>
+    </p:bldLst>
+  </p:timing>
+</p:sld>
+</file>
+
+<file path=ppt/slides/slide13.xml><?xml version="1.0" encoding="utf-8"?>
+<p:sld xmlns:a="http://schemas.openxmlformats.org/drawingml/2006/main" xmlns:r="http://schemas.openxmlformats.org/officeDocument/2006/relationships" xmlns:p="http://schemas.openxmlformats.org/presentationml/2006/main">
+  <p:cSld>
+    <p:bg>
+      <p:bgPr>
+        <a:blipFill>
+          <a:blip r:embed="rId1"/>
+          <a:stretch>
+            <a:fillRect/>
+          </a:stretch>
+        </a:blipFill>
+        <a:effectLst/>
+      </p:bgPr>
+    </p:bg>
+    <p:spTree>
+      <p:nvGrpSpPr>
+        <p:cNvPr id="1" name=""/>
+        <p:cNvGrpSpPr/>
+        <p:nvPr/>
+      </p:nvGrpSpPr>
+      <p:grpSpPr/>
+      <p:pic>
+        <p:nvPicPr>
+          <p:cNvPr id="102" name="图片 101"/>
+          <p:cNvPicPr/>
+          <p:nvPr/>
+        </p:nvPicPr>
+        <p:blipFill>
+          <a:blip r:embed="rId2"/>
+          <a:srcRect r="3002"/>
+          <a:stretch>
+            <a:fillRect/>
+          </a:stretch>
+        </p:blipFill>
+        <p:spPr>
+          <a:xfrm>
+            <a:off x="2924175" y="528955"/>
+            <a:ext cx="6343650" cy="5800090"/>
+          </a:xfrm>
+          <a:prstGeom prst="rect">
+            <a:avLst/>
+          </a:prstGeom>
+          <a:noFill/>
+          <a:ln w="9525">
+            <a:noFill/>
+          </a:ln>
+        </p:spPr>
+      </p:pic>
+      <p:sp>
+        <p:nvSpPr>
+          <p:cNvPr id="2" name="文本框 1"/>
+          <p:cNvSpPr txBox="1"/>
+          <p:nvPr/>
+        </p:nvSpPr>
+        <p:spPr>
+          <a:xfrm>
+            <a:off x="8183880" y="4695190"/>
+            <a:ext cx="3908425" cy="1198880"/>
+          </a:xfrm>
+          <a:prstGeom prst="rect">
+            <a:avLst/>
+          </a:prstGeom>
+          <a:noFill/>
+        </p:spPr>
+        <p:txBody>
+          <a:bodyPr wrap="square" rtlCol="0">
+            <a:spAutoFit/>
+          </a:bodyPr>
+          <a:p>
+            <a:r>
+              <a:rPr lang="en-US" altLang="zh-CN" sz="7200">
+                <a:latin typeface="楷体" panose="02010609060101010101" charset="-122"/>
+                <a:ea typeface="楷体" panose="02010609060101010101" charset="-122"/>
+                <a:cs typeface="楷体" panose="02010609060101010101" charset="-122"/>
+              </a:rPr>
+              <a:t>4.</a:t>
+            </a:r>
+            <a:r>
+              <a:rPr lang="zh-CN" altLang="en-US" sz="7200">
+                <a:latin typeface="楷体" panose="02010609060101010101" charset="-122"/>
+                <a:ea typeface="楷体" panose="02010609060101010101" charset="-122"/>
+                <a:cs typeface="楷体" panose="02010609060101010101" charset="-122"/>
+              </a:rPr>
+              <a:t>清明节</a:t>
+            </a:r>
+            <a:endParaRPr lang="zh-CN" altLang="en-US" sz="7200">
+              <a:latin typeface="楷体" panose="02010609060101010101" charset="-122"/>
+              <a:ea typeface="楷体" panose="02010609060101010101" charset="-122"/>
+              <a:cs typeface="楷体" panose="02010609060101010101" charset="-122"/>
+            </a:endParaRPr>
+          </a:p>
+        </p:txBody>
+      </p:sp>
+    </p:spTree>
+    <p:custDataLst>
+      <p:tags r:id="rId3"/>
+    </p:custDataLst>
+  </p:cSld>
+  <p:clrMapOvr>
+    <a:masterClrMapping/>
+  </p:clrMapOvr>
+  <mc:AlternateContent xmlns:mc="http://schemas.openxmlformats.org/markup-compatibility/2006" xmlns:p159="http://schemas.microsoft.com/office/powerpoint/2015/09/main">
+    <mc:Choice Requires="p159">
+      <p:transition xmlns:p14="http://schemas.microsoft.com/office/powerpoint/2010/main" spd="slow" p14:dur="2000">
+        <p159:morph option="byObject"/>
+      </p:transition>
+    </mc:Choice>
+    <mc:Fallback>
+      <p:transition spd="slow">
+        <p:fade/>
+      </p:transition>
+    </mc:Fallback>
+  </mc:AlternateContent>
+  <p:timing>
+    <p:tnLst>
+      <p:par>
+        <p:cTn id="1" dur="indefinite" restart="never" nodeType="tmRoot">
+          <p:childTnLst>
+            <p:seq concurrent="1" nextAc="seek">
+              <p:cTn id="2" dur="indefinite" nodeType="mainSeq">
+                <p:childTnLst>
+                  <p:par>
+                    <p:cTn id="3" fill="hold">
+                      <p:stCondLst>
+                        <p:cond delay="indefinite"/>
+                      </p:stCondLst>
+                      <p:childTnLst>
+                        <p:par>
+                          <p:cTn id="4" fill="hold">
+                            <p:stCondLst>
+                              <p:cond delay="0"/>
+                            </p:stCondLst>
+                            <p:childTnLst>
+                              <p:par>
+                                <p:cTn id="5" presetID="27" presetClass="entr" presetSubtype="0" fill="hold" grpId="0" nodeType="clickEffect">
+                                  <p:stCondLst>
+                                    <p:cond delay="0"/>
+                                  </p:stCondLst>
+                                  <p:iterate type="lt">
+                                    <p:tmPct val="50000"/>
+                                  </p:iterate>
+                                  <p:childTnLst>
+                                    <p:set>
+                                      <p:cBhvr>
+                                        <p:cTn id="6" dur="1" fill="hold">
+                                          <p:stCondLst>
+                                            <p:cond delay="0"/>
+                                          </p:stCondLst>
+                                        </p:cTn>
+                                        <p:tgtEl>
+                                          <p:spTgt spid="2"/>
+                                        </p:tgtEl>
+                                        <p:attrNameLst>
+                                          <p:attrName>style.visibility</p:attrName>
+                                        </p:attrNameLst>
+                                      </p:cBhvr>
+                                      <p:to>
+                                        <p:strVal val="visible"/>
+                                      </p:to>
+                                    </p:set>
+                                    <p:anim calcmode="discrete" valueType="clr">
+                                      <p:cBhvr override="childStyle">
+                                        <p:cTn id="7" dur="80"/>
+                                        <p:tgtEl>
+                                          <p:spTgt spid="2"/>
+                                        </p:tgtEl>
+                                        <p:attrNameLst>
+                                          <p:attrName>style.color</p:attrName>
+                                        </p:attrNameLst>
+                                      </p:cBhvr>
+                                      <p:tavLst>
+                                        <p:tav tm="0">
+                                          <p:val>
+                                            <p:clrVal>
+                                              <a:schemeClr val="accent2"/>
+                                            </p:clrVal>
+                                          </p:val>
+                                        </p:tav>
+                                        <p:tav tm="50000">
+                                          <p:val>
+                                            <p:clrVal>
+                                              <a:schemeClr val="hlink"/>
+                                            </p:clrVal>
+                                          </p:val>
+                                        </p:tav>
+                                      </p:tavLst>
+                                    </p:anim>
+                                    <p:anim calcmode="discrete" valueType="clr">
+                                      <p:cBhvr>
+                                        <p:cTn id="8" dur="80"/>
+                                        <p:tgtEl>
+                                          <p:spTgt spid="2"/>
+                                        </p:tgtEl>
+                                        <p:attrNameLst>
+                                          <p:attrName>fillcolor</p:attrName>
+                                        </p:attrNameLst>
+                                      </p:cBhvr>
+                                      <p:tavLst>
+                                        <p:tav tm="0">
+                                          <p:val>
+                                            <p:clrVal>
+                                              <a:schemeClr val="accent2"/>
+                                            </p:clrVal>
+                                          </p:val>
+                                        </p:tav>
+                                        <p:tav tm="50000">
+                                          <p:val>
+                                            <p:clrVal>
+                                              <a:schemeClr val="hlink"/>
+                                            </p:clrVal>
+                                          </p:val>
+                                        </p:tav>
+                                      </p:tavLst>
+                                    </p:anim>
+                                    <p:set>
+                                      <p:cBhvr>
+                                        <p:cTn id="9" dur="80"/>
+                                        <p:tgtEl>
+                                          <p:spTgt spid="2"/>
+                                        </p:tgtEl>
+                                        <p:attrNameLst>
+                                          <p:attrName>fill.type</p:attrName>
+                                        </p:attrNameLst>
+                                      </p:cBhvr>
+                                      <p:to>
+                                        <p:strVal val="solid"/>
+                                      </p:to>
+                                    </p:set>
+                                  </p:childTnLst>
+                                </p:cTn>
+                              </p:par>
+                            </p:childTnLst>
+                          </p:cTn>
+                        </p:par>
+                      </p:childTnLst>
+                    </p:cTn>
+                  </p:par>
+                </p:childTnLst>
+              </p:cTn>
+              <p:prevCondLst>
+                <p:cond evt="onPrev" delay="0">
+                  <p:tgtEl>
+                    <p:sldTgt/>
+                  </p:tgtEl>
+                </p:cond>
+              </p:prevCondLst>
+              <p:nextCondLst>
+                <p:cond evt="onNext" delay="0">
+                  <p:tgtEl>
+                    <p:sldTgt/>
+                  </p:tgtEl>
+                </p:cond>
+              </p:nextCondLst>
+            </p:seq>
+          </p:childTnLst>
+        </p:cTn>
+      </p:par>
+    </p:tnLst>
+    <p:bldLst>
+      <p:bldP spid="2" grpId="0"/>
+      <p:bldP spid="2" grpId="1"/>
+    </p:bldLst>
+  </p:timing>
+</p:sld>
+</file>
+
+<file path=ppt/slides/slide14.xml><?xml version="1.0" encoding="utf-8"?>
+<p:sld xmlns:a="http://schemas.openxmlformats.org/drawingml/2006/main" xmlns:r="http://schemas.openxmlformats.org/officeDocument/2006/relationships" xmlns:p="http://schemas.openxmlformats.org/presentationml/2006/main">
+  <p:cSld>
     <p:spTree>
       <p:nvGrpSpPr>
         <p:cNvPr id="1" name=""/>
@@ -3275,6 +4617,18 @@
   <p:clrMapOvr>
     <a:masterClrMapping/>
   </p:clrMapOvr>
+  <mc:AlternateContent xmlns:mc="http://schemas.openxmlformats.org/markup-compatibility/2006" xmlns:p159="http://schemas.microsoft.com/office/powerpoint/2015/09/main">
+    <mc:Choice Requires="p159">
+      <p:transition xmlns:p14="http://schemas.microsoft.com/office/powerpoint/2010/main" spd="slow" p14:dur="2000">
+        <p159:morph option="byObject"/>
+      </p:transition>
+    </mc:Choice>
+    <mc:Fallback>
+      <p:transition spd="slow">
+        <p:fade/>
+      </p:transition>
+    </mc:Fallback>
+  </mc:AlternateContent>
   <p:timing>
     <p:tnLst>
       <p:par>
@@ -3483,7 +4837,335 @@
 </p:sld>
 </file>
 
-<file path=ppt/slides/slide11.xml><?xml version="1.0" encoding="utf-8"?>
+<file path=ppt/slides/slide15.xml><?xml version="1.0" encoding="utf-8"?>
+<p:sld xmlns:a="http://schemas.openxmlformats.org/drawingml/2006/main" xmlns:r="http://schemas.openxmlformats.org/officeDocument/2006/relationships" xmlns:p="http://schemas.openxmlformats.org/presentationml/2006/main">
+  <p:cSld>
+    <p:spTree>
+      <p:nvGrpSpPr>
+        <p:cNvPr id="1" name=""/>
+        <p:cNvGrpSpPr/>
+        <p:nvPr/>
+      </p:nvGrpSpPr>
+      <p:grpSpPr/>
+      <p:pic>
+        <p:nvPicPr>
+          <p:cNvPr id="4" name="图片 3"/>
+          <p:cNvPicPr/>
+          <p:nvPr>
+            <p:custDataLst>
+              <p:tags r:id="rId1"/>
+            </p:custDataLst>
+          </p:nvPr>
+        </p:nvPicPr>
+        <p:blipFill>
+          <a:blip r:embed="rId2"/>
+          <a:srcRect r="3002"/>
+          <a:stretch>
+            <a:fillRect/>
+          </a:stretch>
+        </p:blipFill>
+        <p:spPr>
+          <a:xfrm>
+            <a:off x="232410" y="966470"/>
+            <a:ext cx="4593590" cy="4200525"/>
+          </a:xfrm>
+          <a:prstGeom prst="rect">
+            <a:avLst/>
+          </a:prstGeom>
+          <a:noFill/>
+          <a:ln w="9525">
+            <a:noFill/>
+          </a:ln>
+        </p:spPr>
+      </p:pic>
+      <p:sp>
+        <p:nvSpPr>
+          <p:cNvPr id="5" name="文本框 4"/>
+          <p:cNvSpPr txBox="1"/>
+          <p:nvPr/>
+        </p:nvSpPr>
+        <p:spPr>
+          <a:xfrm>
+            <a:off x="5749290" y="3544570"/>
+            <a:ext cx="6096000" cy="1198880"/>
+          </a:xfrm>
+          <a:prstGeom prst="rect">
+            <a:avLst/>
+          </a:prstGeom>
+          <a:noFill/>
+        </p:spPr>
+        <p:txBody>
+          <a:bodyPr wrap="square" rtlCol="0" anchor="t">
+            <a:spAutoFit/>
+          </a:bodyPr>
+          <a:p>
+            <a:pPr algn="ctr"/>
+            <a:r>
+              <a:rPr lang="zh-CN" altLang="en-US">
+                <a:latin typeface="楷体" panose="02010609060101010101" charset="-122"/>
+                <a:ea typeface="楷体" panose="02010609060101010101" charset="-122"/>
+                <a:cs typeface="楷体" panose="02010609060101010101" charset="-122"/>
+              </a:rPr>
+              <a:t>清明</a:t>
+            </a:r>
+            <a:endParaRPr lang="zh-CN" altLang="en-US">
+              <a:latin typeface="楷体" panose="02010609060101010101" charset="-122"/>
+              <a:ea typeface="楷体" panose="02010609060101010101" charset="-122"/>
+              <a:cs typeface="楷体" panose="02010609060101010101" charset="-122"/>
+            </a:endParaRPr>
+          </a:p>
+          <a:p>
+            <a:pPr algn="ctr"/>
+            <a:r>
+              <a:rPr lang="zh-CN" altLang="en-US">
+                <a:latin typeface="楷体" panose="02010609060101010101" charset="-122"/>
+                <a:ea typeface="楷体" panose="02010609060101010101" charset="-122"/>
+                <a:cs typeface="楷体" panose="02010609060101010101" charset="-122"/>
+              </a:rPr>
+              <a:t>唐·杜牧</a:t>
+            </a:r>
+            <a:endParaRPr lang="zh-CN" altLang="en-US">
+              <a:latin typeface="楷体" panose="02010609060101010101" charset="-122"/>
+              <a:ea typeface="楷体" panose="02010609060101010101" charset="-122"/>
+              <a:cs typeface="楷体" panose="02010609060101010101" charset="-122"/>
+            </a:endParaRPr>
+          </a:p>
+          <a:p>
+            <a:pPr algn="ctr"/>
+            <a:r>
+              <a:rPr lang="zh-CN" altLang="en-US">
+                <a:latin typeface="楷体" panose="02010609060101010101" charset="-122"/>
+                <a:ea typeface="楷体" panose="02010609060101010101" charset="-122"/>
+                <a:cs typeface="楷体" panose="02010609060101010101" charset="-122"/>
+              </a:rPr>
+              <a:t>清明时节雨纷纷，路上行人欲断魂。</a:t>
+            </a:r>
+            <a:endParaRPr lang="zh-CN" altLang="en-US">
+              <a:latin typeface="楷体" panose="02010609060101010101" charset="-122"/>
+              <a:ea typeface="楷体" panose="02010609060101010101" charset="-122"/>
+              <a:cs typeface="楷体" panose="02010609060101010101" charset="-122"/>
+            </a:endParaRPr>
+          </a:p>
+          <a:p>
+            <a:pPr algn="ctr"/>
+            <a:r>
+              <a:rPr lang="zh-CN" altLang="en-US">
+                <a:latin typeface="楷体" panose="02010609060101010101" charset="-122"/>
+                <a:ea typeface="楷体" panose="02010609060101010101" charset="-122"/>
+                <a:cs typeface="楷体" panose="02010609060101010101" charset="-122"/>
+              </a:rPr>
+              <a:t>借问酒家何处有? 牧童遥指杏花村。</a:t>
+            </a:r>
+            <a:endParaRPr lang="zh-CN" altLang="en-US">
+              <a:latin typeface="楷体" panose="02010609060101010101" charset="-122"/>
+              <a:ea typeface="楷体" panose="02010609060101010101" charset="-122"/>
+              <a:cs typeface="楷体" panose="02010609060101010101" charset="-122"/>
+            </a:endParaRPr>
+          </a:p>
+        </p:txBody>
+      </p:sp>
+    </p:spTree>
+    <p:custDataLst>
+      <p:tags r:id="rId3"/>
+    </p:custDataLst>
+  </p:cSld>
+  <p:clrMapOvr>
+    <a:masterClrMapping/>
+  </p:clrMapOvr>
+  <mc:AlternateContent xmlns:mc="http://schemas.openxmlformats.org/markup-compatibility/2006" xmlns:p159="http://schemas.microsoft.com/office/powerpoint/2015/09/main">
+    <mc:Choice Requires="p159">
+      <p:transition xmlns:p14="http://schemas.microsoft.com/office/powerpoint/2010/main" spd="slow" p14:dur="2000">
+        <p159:morph option="byObject"/>
+      </p:transition>
+    </mc:Choice>
+    <mc:Fallback>
+      <p:transition spd="slow">
+        <p:fade/>
+      </p:transition>
+    </mc:Fallback>
+  </mc:AlternateContent>
+  <p:timing>
+    <p:tnLst>
+      <p:par>
+        <p:cTn id="1" dur="indefinite" restart="never" nodeType="tmRoot">
+          <p:childTnLst>
+            <p:seq concurrent="1" nextAc="seek">
+              <p:cTn id="2" dur="indefinite" nodeType="mainSeq">
+                <p:childTnLst>
+                  <p:par>
+                    <p:cTn id="3" fill="hold">
+                      <p:stCondLst>
+                        <p:cond delay="indefinite"/>
+                      </p:stCondLst>
+                      <p:childTnLst>
+                        <p:par>
+                          <p:cTn id="4" fill="hold">
+                            <p:stCondLst>
+                              <p:cond delay="0"/>
+                            </p:stCondLst>
+                            <p:childTnLst>
+                              <p:par>
+                                <p:cTn id="5" presetID="4" presetClass="entr" presetSubtype="16" fill="hold" nodeType="clickEffect">
+                                  <p:stCondLst>
+                                    <p:cond delay="0"/>
+                                  </p:stCondLst>
+                                  <p:childTnLst>
+                                    <p:set>
+                                      <p:cBhvr>
+                                        <p:cTn id="6" dur="1000" fill="hold">
+                                          <p:stCondLst>
+                                            <p:cond delay="0"/>
+                                          </p:stCondLst>
+                                        </p:cTn>
+                                        <p:tgtEl>
+                                          <p:spTgt spid="4"/>
+                                        </p:tgtEl>
+                                        <p:attrNameLst>
+                                          <p:attrName>style.visibility</p:attrName>
+                                        </p:attrNameLst>
+                                      </p:cBhvr>
+                                      <p:to>
+                                        <p:strVal val="visible"/>
+                                      </p:to>
+                                    </p:set>
+                                    <p:animEffect transition="in" filter="box(in)">
+                                      <p:cBhvr>
+                                        <p:cTn id="7" dur="1000"/>
+                                        <p:tgtEl>
+                                          <p:spTgt spid="4"/>
+                                        </p:tgtEl>
+                                      </p:cBhvr>
+                                    </p:animEffect>
+                                  </p:childTnLst>
+                                </p:cTn>
+                              </p:par>
+                            </p:childTnLst>
+                          </p:cTn>
+                        </p:par>
+                      </p:childTnLst>
+                    </p:cTn>
+                  </p:par>
+                  <p:par>
+                    <p:cTn id="8" fill="hold">
+                      <p:stCondLst>
+                        <p:cond delay="indefinite"/>
+                      </p:stCondLst>
+                      <p:childTnLst>
+                        <p:par>
+                          <p:cTn id="9" fill="hold">
+                            <p:stCondLst>
+                              <p:cond delay="0"/>
+                            </p:stCondLst>
+                            <p:childTnLst>
+                              <p:par>
+                                <p:cTn id="10" presetID="2" presetClass="entr" presetSubtype="4" fill="hold" grpId="0" nodeType="clickEffect">
+                                  <p:stCondLst>
+                                    <p:cond delay="0"/>
+                                  </p:stCondLst>
+                                  <p:childTnLst>
+                                    <p:set>
+                                      <p:cBhvr>
+                                        <p:cTn id="11" dur="1" fill="hold">
+                                          <p:stCondLst>
+                                            <p:cond delay="0"/>
+                                          </p:stCondLst>
+                                        </p:cTn>
+                                        <p:tgtEl>
+                                          <p:spTgt spid="5"/>
+                                        </p:tgtEl>
+                                        <p:attrNameLst>
+                                          <p:attrName>style.visibility</p:attrName>
+                                        </p:attrNameLst>
+                                      </p:cBhvr>
+                                      <p:to>
+                                        <p:strVal val="visible"/>
+                                      </p:to>
+                                    </p:set>
+                                    <p:anim calcmode="lin" valueType="num">
+                                      <p:cBhvr additive="base">
+                                        <p:cTn id="12" dur="500" fill="hold"/>
+                                        <p:tgtEl>
+                                          <p:spTgt spid="5"/>
+                                        </p:tgtEl>
+                                        <p:attrNameLst>
+                                          <p:attrName>ppt_x</p:attrName>
+                                        </p:attrNameLst>
+                                      </p:cBhvr>
+                                      <p:tavLst>
+                                        <p:tav tm="0">
+                                          <p:val>
+                                            <p:strVal val="#ppt_x"/>
+                                          </p:val>
+                                        </p:tav>
+                                        <p:tav tm="100000">
+                                          <p:val>
+                                            <p:strVal val="#ppt_x"/>
+                                          </p:val>
+                                        </p:tav>
+                                      </p:tavLst>
+                                    </p:anim>
+                                    <p:anim calcmode="lin" valueType="num">
+                                      <p:cBhvr additive="base">
+                                        <p:cTn id="13" dur="500" fill="hold"/>
+                                        <p:tgtEl>
+                                          <p:spTgt spid="5"/>
+                                        </p:tgtEl>
+                                        <p:attrNameLst>
+                                          <p:attrName>ppt_y</p:attrName>
+                                        </p:attrNameLst>
+                                      </p:cBhvr>
+                                      <p:tavLst>
+                                        <p:tav tm="0">
+                                          <p:val>
+                                            <p:strVal val="1+#ppt_h/2"/>
+                                          </p:val>
+                                        </p:tav>
+                                        <p:tav tm="100000">
+                                          <p:val>
+                                            <p:strVal val="#ppt_y"/>
+                                          </p:val>
+                                        </p:tav>
+                                      </p:tavLst>
+                                    </p:anim>
+                                  </p:childTnLst>
+                                </p:cTn>
+                              </p:par>
+                            </p:childTnLst>
+                          </p:cTn>
+                        </p:par>
+                      </p:childTnLst>
+                    </p:cTn>
+                  </p:par>
+                </p:childTnLst>
+              </p:cTn>
+              <p:prevCondLst>
+                <p:cond evt="onPrev" delay="0">
+                  <p:tgtEl>
+                    <p:sldTgt/>
+                  </p:tgtEl>
+                </p:cond>
+              </p:prevCondLst>
+              <p:nextCondLst>
+                <p:cond evt="onNext" delay="0">
+                  <p:tgtEl>
+                    <p:sldTgt/>
+                  </p:tgtEl>
+                </p:cond>
+              </p:nextCondLst>
+            </p:seq>
+          </p:childTnLst>
+        </p:cTn>
+      </p:par>
+    </p:tnLst>
+    <p:bldLst>
+      <p:bldP spid="5" grpId="0"/>
+      <p:bldP spid="5" grpId="1"/>
+    </p:bldLst>
+  </p:timing>
+</p:sld>
+</file>
+
+<file path=ppt/slides/slide16.xml><?xml version="1.0" encoding="utf-8"?>
 <p:sld xmlns:a="http://schemas.openxmlformats.org/drawingml/2006/main" xmlns:r="http://schemas.openxmlformats.org/officeDocument/2006/relationships" xmlns:p="http://schemas.openxmlformats.org/presentationml/2006/main">
   <p:cSld>
     <p:bg>
@@ -3511,7 +5193,7 @@
           <p:nvPr/>
         </p:nvPicPr>
         <p:blipFill>
-          <a:blip r:embed="rId1"/>
+          <a:blip r:embed="rId2"/>
           <a:srcRect r="3002"/>
           <a:stretch>
             <a:fillRect/>
@@ -3578,21 +5260,21 @@
       </p:sp>
     </p:spTree>
     <p:custDataLst>
-      <p:tags r:id="rId2"/>
+      <p:tags r:id="rId3"/>
     </p:custDataLst>
   </p:cSld>
   <p:clrMapOvr>
     <a:masterClrMapping/>
   </p:clrMapOvr>
-  <mc:AlternateContent xmlns:mc="http://schemas.openxmlformats.org/markup-compatibility/2006">
-    <mc:Choice xmlns:p14="http://schemas.microsoft.com/office/powerpoint/2010/main" Requires="p14">
-      <p:transition p14:dur="500">
-        <p:wedge/>
+  <mc:AlternateContent xmlns:mc="http://schemas.openxmlformats.org/markup-compatibility/2006" xmlns:p159="http://schemas.microsoft.com/office/powerpoint/2015/09/main">
+    <mc:Choice Requires="p159">
+      <p:transition xmlns:p14="http://schemas.microsoft.com/office/powerpoint/2010/main" spd="slow" p14:dur="2000">
+        <p159:morph option="byObject"/>
       </p:transition>
     </mc:Choice>
     <mc:Fallback>
-      <p:transition>
-        <p:wedge/>
+      <p:transition spd="slow">
+        <p:fade/>
       </p:transition>
     </mc:Fallback>
   </mc:AlternateContent>
@@ -3749,7 +5431,7 @@
 </p:sld>
 </file>
 
-<file path=ppt/slides/slide12.xml><?xml version="1.0" encoding="utf-8"?>
+<file path=ppt/slides/slide17.xml><?xml version="1.0" encoding="utf-8"?>
 <p:sld xmlns:a="http://schemas.openxmlformats.org/drawingml/2006/main" xmlns:r="http://schemas.openxmlformats.org/officeDocument/2006/relationships" xmlns:p="http://schemas.openxmlformats.org/presentationml/2006/main">
   <p:cSld>
     <p:spTree>
@@ -3871,6 +5553,18 @@
   <p:clrMapOvr>
     <a:masterClrMapping/>
   </p:clrMapOvr>
+  <mc:AlternateContent xmlns:mc="http://schemas.openxmlformats.org/markup-compatibility/2006" xmlns:p159="http://schemas.microsoft.com/office/powerpoint/2015/09/main">
+    <mc:Choice Requires="p159">
+      <p:transition xmlns:p14="http://schemas.microsoft.com/office/powerpoint/2010/main" spd="slow" p14:dur="2000">
+        <p159:morph option="byObject"/>
+      </p:transition>
+    </mc:Choice>
+    <mc:Fallback>
+      <p:transition spd="slow">
+        <p:fade/>
+      </p:transition>
+    </mc:Fallback>
+  </mc:AlternateContent>
   <p:timing>
     <p:tnLst>
       <p:par>
@@ -4079,7 +5773,335 @@
 </p:sld>
 </file>
 
-<file path=ppt/slides/slide13.xml><?xml version="1.0" encoding="utf-8"?>
+<file path=ppt/slides/slide18.xml><?xml version="1.0" encoding="utf-8"?>
+<p:sld xmlns:a="http://schemas.openxmlformats.org/drawingml/2006/main" xmlns:r="http://schemas.openxmlformats.org/officeDocument/2006/relationships" xmlns:p="http://schemas.openxmlformats.org/presentationml/2006/main">
+  <p:cSld>
+    <p:spTree>
+      <p:nvGrpSpPr>
+        <p:cNvPr id="1" name=""/>
+        <p:cNvGrpSpPr/>
+        <p:nvPr/>
+      </p:nvGrpSpPr>
+      <p:grpSpPr/>
+      <p:pic>
+        <p:nvPicPr>
+          <p:cNvPr id="4" name="图片 3"/>
+          <p:cNvPicPr/>
+          <p:nvPr>
+            <p:custDataLst>
+              <p:tags r:id="rId1"/>
+            </p:custDataLst>
+          </p:nvPr>
+        </p:nvPicPr>
+        <p:blipFill>
+          <a:blip r:embed="rId2"/>
+          <a:srcRect r="3002"/>
+          <a:stretch>
+            <a:fillRect/>
+          </a:stretch>
+        </p:blipFill>
+        <p:spPr>
+          <a:xfrm>
+            <a:off x="7078980" y="2447925"/>
+            <a:ext cx="4593590" cy="4200525"/>
+          </a:xfrm>
+          <a:prstGeom prst="rect">
+            <a:avLst/>
+          </a:prstGeom>
+          <a:noFill/>
+          <a:ln w="9525">
+            <a:noFill/>
+          </a:ln>
+        </p:spPr>
+      </p:pic>
+      <p:sp>
+        <p:nvSpPr>
+          <p:cNvPr id="5" name="文本框 4"/>
+          <p:cNvSpPr txBox="1"/>
+          <p:nvPr/>
+        </p:nvSpPr>
+        <p:spPr>
+          <a:xfrm>
+            <a:off x="806450" y="1249045"/>
+            <a:ext cx="6096000" cy="1198880"/>
+          </a:xfrm>
+          <a:prstGeom prst="rect">
+            <a:avLst/>
+          </a:prstGeom>
+          <a:noFill/>
+        </p:spPr>
+        <p:txBody>
+          <a:bodyPr wrap="square" rtlCol="0" anchor="t">
+            <a:spAutoFit/>
+          </a:bodyPr>
+          <a:p>
+            <a:pPr algn="ctr"/>
+            <a:r>
+              <a:rPr lang="zh-CN" altLang="en-US">
+                <a:latin typeface="楷体" panose="02010609060101010101" charset="-122"/>
+                <a:ea typeface="楷体" panose="02010609060101010101" charset="-122"/>
+                <a:cs typeface="楷体" panose="02010609060101010101" charset="-122"/>
+              </a:rPr>
+              <a:t>《端午》</a:t>
+            </a:r>
+            <a:endParaRPr lang="zh-CN" altLang="en-US">
+              <a:latin typeface="楷体" panose="02010609060101010101" charset="-122"/>
+              <a:ea typeface="楷体" panose="02010609060101010101" charset="-122"/>
+              <a:cs typeface="楷体" panose="02010609060101010101" charset="-122"/>
+            </a:endParaRPr>
+          </a:p>
+          <a:p>
+            <a:pPr algn="ctr"/>
+            <a:r>
+              <a:rPr lang="zh-CN" altLang="en-US">
+                <a:latin typeface="楷体" panose="02010609060101010101" charset="-122"/>
+                <a:ea typeface="楷体" panose="02010609060101010101" charset="-122"/>
+                <a:cs typeface="楷体" panose="02010609060101010101" charset="-122"/>
+              </a:rPr>
+              <a:t>　　唐·文秀</a:t>
+            </a:r>
+            <a:endParaRPr lang="zh-CN" altLang="en-US">
+              <a:latin typeface="楷体" panose="02010609060101010101" charset="-122"/>
+              <a:ea typeface="楷体" panose="02010609060101010101" charset="-122"/>
+              <a:cs typeface="楷体" panose="02010609060101010101" charset="-122"/>
+            </a:endParaRPr>
+          </a:p>
+          <a:p>
+            <a:pPr algn="ctr"/>
+            <a:r>
+              <a:rPr lang="zh-CN" altLang="en-US">
+                <a:latin typeface="楷体" panose="02010609060101010101" charset="-122"/>
+                <a:ea typeface="楷体" panose="02010609060101010101" charset="-122"/>
+                <a:cs typeface="楷体" panose="02010609060101010101" charset="-122"/>
+              </a:rPr>
+              <a:t>　　节分端午自谁言，万古传闻为屈原；</a:t>
+            </a:r>
+            <a:endParaRPr lang="zh-CN" altLang="en-US">
+              <a:latin typeface="楷体" panose="02010609060101010101" charset="-122"/>
+              <a:ea typeface="楷体" panose="02010609060101010101" charset="-122"/>
+              <a:cs typeface="楷体" panose="02010609060101010101" charset="-122"/>
+            </a:endParaRPr>
+          </a:p>
+          <a:p>
+            <a:pPr algn="ctr"/>
+            <a:r>
+              <a:rPr lang="zh-CN" altLang="en-US">
+                <a:latin typeface="楷体" panose="02010609060101010101" charset="-122"/>
+                <a:ea typeface="楷体" panose="02010609060101010101" charset="-122"/>
+                <a:cs typeface="楷体" panose="02010609060101010101" charset="-122"/>
+              </a:rPr>
+              <a:t>　　堪笑楚江空渺渺，不能洗得直臣冤。</a:t>
+            </a:r>
+            <a:endParaRPr lang="zh-CN" altLang="en-US">
+              <a:latin typeface="楷体" panose="02010609060101010101" charset="-122"/>
+              <a:ea typeface="楷体" panose="02010609060101010101" charset="-122"/>
+              <a:cs typeface="楷体" panose="02010609060101010101" charset="-122"/>
+            </a:endParaRPr>
+          </a:p>
+        </p:txBody>
+      </p:sp>
+    </p:spTree>
+    <p:custDataLst>
+      <p:tags r:id="rId3"/>
+    </p:custDataLst>
+  </p:cSld>
+  <p:clrMapOvr>
+    <a:masterClrMapping/>
+  </p:clrMapOvr>
+  <mc:AlternateContent xmlns:mc="http://schemas.openxmlformats.org/markup-compatibility/2006" xmlns:p159="http://schemas.microsoft.com/office/powerpoint/2015/09/main">
+    <mc:Choice Requires="p159">
+      <p:transition xmlns:p14="http://schemas.microsoft.com/office/powerpoint/2010/main" spd="slow" p14:dur="2000">
+        <p159:morph option="byObject"/>
+      </p:transition>
+    </mc:Choice>
+    <mc:Fallback>
+      <p:transition spd="slow">
+        <p:fade/>
+      </p:transition>
+    </mc:Fallback>
+  </mc:AlternateContent>
+  <p:timing>
+    <p:tnLst>
+      <p:par>
+        <p:cTn id="1" dur="indefinite" restart="never" nodeType="tmRoot">
+          <p:childTnLst>
+            <p:seq concurrent="1" nextAc="seek">
+              <p:cTn id="2" dur="indefinite" nodeType="mainSeq">
+                <p:childTnLst>
+                  <p:par>
+                    <p:cTn id="3" fill="hold">
+                      <p:stCondLst>
+                        <p:cond delay="indefinite"/>
+                      </p:stCondLst>
+                      <p:childTnLst>
+                        <p:par>
+                          <p:cTn id="4" fill="hold">
+                            <p:stCondLst>
+                              <p:cond delay="0"/>
+                            </p:stCondLst>
+                            <p:childTnLst>
+                              <p:par>
+                                <p:cTn id="5" presetID="4" presetClass="entr" presetSubtype="16" fill="hold" nodeType="clickEffect">
+                                  <p:stCondLst>
+                                    <p:cond delay="0"/>
+                                  </p:stCondLst>
+                                  <p:childTnLst>
+                                    <p:set>
+                                      <p:cBhvr>
+                                        <p:cTn id="6" dur="1000" fill="hold">
+                                          <p:stCondLst>
+                                            <p:cond delay="0"/>
+                                          </p:stCondLst>
+                                        </p:cTn>
+                                        <p:tgtEl>
+                                          <p:spTgt spid="4"/>
+                                        </p:tgtEl>
+                                        <p:attrNameLst>
+                                          <p:attrName>style.visibility</p:attrName>
+                                        </p:attrNameLst>
+                                      </p:cBhvr>
+                                      <p:to>
+                                        <p:strVal val="visible"/>
+                                      </p:to>
+                                    </p:set>
+                                    <p:animEffect transition="in" filter="box(in)">
+                                      <p:cBhvr>
+                                        <p:cTn id="7" dur="1000"/>
+                                        <p:tgtEl>
+                                          <p:spTgt spid="4"/>
+                                        </p:tgtEl>
+                                      </p:cBhvr>
+                                    </p:animEffect>
+                                  </p:childTnLst>
+                                </p:cTn>
+                              </p:par>
+                            </p:childTnLst>
+                          </p:cTn>
+                        </p:par>
+                      </p:childTnLst>
+                    </p:cTn>
+                  </p:par>
+                  <p:par>
+                    <p:cTn id="8" fill="hold">
+                      <p:stCondLst>
+                        <p:cond delay="indefinite"/>
+                      </p:stCondLst>
+                      <p:childTnLst>
+                        <p:par>
+                          <p:cTn id="9" fill="hold">
+                            <p:stCondLst>
+                              <p:cond delay="0"/>
+                            </p:stCondLst>
+                            <p:childTnLst>
+                              <p:par>
+                                <p:cTn id="10" presetID="2" presetClass="entr" presetSubtype="4" fill="hold" grpId="0" nodeType="clickEffect">
+                                  <p:stCondLst>
+                                    <p:cond delay="0"/>
+                                  </p:stCondLst>
+                                  <p:childTnLst>
+                                    <p:set>
+                                      <p:cBhvr>
+                                        <p:cTn id="11" dur="1" fill="hold">
+                                          <p:stCondLst>
+                                            <p:cond delay="0"/>
+                                          </p:stCondLst>
+                                        </p:cTn>
+                                        <p:tgtEl>
+                                          <p:spTgt spid="5"/>
+                                        </p:tgtEl>
+                                        <p:attrNameLst>
+                                          <p:attrName>style.visibility</p:attrName>
+                                        </p:attrNameLst>
+                                      </p:cBhvr>
+                                      <p:to>
+                                        <p:strVal val="visible"/>
+                                      </p:to>
+                                    </p:set>
+                                    <p:anim calcmode="lin" valueType="num">
+                                      <p:cBhvr additive="base">
+                                        <p:cTn id="12" dur="500" fill="hold"/>
+                                        <p:tgtEl>
+                                          <p:spTgt spid="5"/>
+                                        </p:tgtEl>
+                                        <p:attrNameLst>
+                                          <p:attrName>ppt_x</p:attrName>
+                                        </p:attrNameLst>
+                                      </p:cBhvr>
+                                      <p:tavLst>
+                                        <p:tav tm="0">
+                                          <p:val>
+                                            <p:strVal val="#ppt_x"/>
+                                          </p:val>
+                                        </p:tav>
+                                        <p:tav tm="100000">
+                                          <p:val>
+                                            <p:strVal val="#ppt_x"/>
+                                          </p:val>
+                                        </p:tav>
+                                      </p:tavLst>
+                                    </p:anim>
+                                    <p:anim calcmode="lin" valueType="num">
+                                      <p:cBhvr additive="base">
+                                        <p:cTn id="13" dur="500" fill="hold"/>
+                                        <p:tgtEl>
+                                          <p:spTgt spid="5"/>
+                                        </p:tgtEl>
+                                        <p:attrNameLst>
+                                          <p:attrName>ppt_y</p:attrName>
+                                        </p:attrNameLst>
+                                      </p:cBhvr>
+                                      <p:tavLst>
+                                        <p:tav tm="0">
+                                          <p:val>
+                                            <p:strVal val="1+#ppt_h/2"/>
+                                          </p:val>
+                                        </p:tav>
+                                        <p:tav tm="100000">
+                                          <p:val>
+                                            <p:strVal val="#ppt_y"/>
+                                          </p:val>
+                                        </p:tav>
+                                      </p:tavLst>
+                                    </p:anim>
+                                  </p:childTnLst>
+                                </p:cTn>
+                              </p:par>
+                            </p:childTnLst>
+                          </p:cTn>
+                        </p:par>
+                      </p:childTnLst>
+                    </p:cTn>
+                  </p:par>
+                </p:childTnLst>
+              </p:cTn>
+              <p:prevCondLst>
+                <p:cond evt="onPrev" delay="0">
+                  <p:tgtEl>
+                    <p:sldTgt/>
+                  </p:tgtEl>
+                </p:cond>
+              </p:prevCondLst>
+              <p:nextCondLst>
+                <p:cond evt="onNext" delay="0">
+                  <p:tgtEl>
+                    <p:sldTgt/>
+                  </p:tgtEl>
+                </p:cond>
+              </p:nextCondLst>
+            </p:seq>
+          </p:childTnLst>
+        </p:cTn>
+      </p:par>
+    </p:tnLst>
+    <p:bldLst>
+      <p:bldP spid="5" grpId="0"/>
+      <p:bldP spid="5" grpId="1"/>
+    </p:bldLst>
+  </p:timing>
+</p:sld>
+</file>
+
+<file path=ppt/slides/slide19.xml><?xml version="1.0" encoding="utf-8"?>
 <p:sld xmlns:a="http://schemas.openxmlformats.org/drawingml/2006/main" xmlns:r="http://schemas.openxmlformats.org/officeDocument/2006/relationships" xmlns:p="http://schemas.openxmlformats.org/presentationml/2006/main">
   <p:cSld>
     <p:bg>
@@ -4107,7 +6129,7 @@
           <p:nvPr/>
         </p:nvPicPr>
         <p:blipFill>
-          <a:blip r:embed="rId1"/>
+          <a:blip r:embed="rId2"/>
           <a:srcRect r="3002"/>
           <a:stretch>
             <a:fillRect/>
@@ -4174,21 +6196,21 @@
       </p:sp>
     </p:spTree>
     <p:custDataLst>
-      <p:tags r:id="rId2"/>
+      <p:tags r:id="rId3"/>
     </p:custDataLst>
   </p:cSld>
   <p:clrMapOvr>
     <a:masterClrMapping/>
   </p:clrMapOvr>
-  <mc:AlternateContent xmlns:mc="http://schemas.openxmlformats.org/markup-compatibility/2006">
-    <mc:Choice xmlns:p14="http://schemas.microsoft.com/office/powerpoint/2010/main" Requires="p14">
-      <p:transition p14:dur="500">
-        <p:wedge/>
+  <mc:AlternateContent xmlns:mc="http://schemas.openxmlformats.org/markup-compatibility/2006" xmlns:p159="http://schemas.microsoft.com/office/powerpoint/2015/09/main">
+    <mc:Choice Requires="p159">
+      <p:transition xmlns:p14="http://schemas.microsoft.com/office/powerpoint/2010/main" spd="slow" p14:dur="2000">
+        <p159:morph option="byObject"/>
       </p:transition>
     </mc:Choice>
     <mc:Fallback>
-      <p:transition>
-        <p:wedge/>
+      <p:transition spd="slow">
+        <p:fade/>
       </p:transition>
     </mc:Fallback>
   </mc:AlternateContent>
@@ -4345,7 +6367,51 @@
 </p:sld>
 </file>
 
-<file path=ppt/slides/slide14.xml><?xml version="1.0" encoding="utf-8"?>
+<file path=ppt/slides/slide2.xml><?xml version="1.0" encoding="utf-8"?>
+<p:sld xmlns:a="http://schemas.openxmlformats.org/drawingml/2006/main" xmlns:r="http://schemas.openxmlformats.org/officeDocument/2006/relationships" xmlns:p="http://schemas.openxmlformats.org/presentationml/2006/main">
+  <p:cSld>
+    <p:bg>
+      <p:bgPr>
+        <a:blipFill>
+          <a:blip r:embed="rId1"/>
+          <a:stretch>
+            <a:fillRect/>
+          </a:stretch>
+        </a:blipFill>
+        <a:effectLst/>
+      </p:bgPr>
+    </p:bg>
+    <p:spTree>
+      <p:nvGrpSpPr>
+        <p:cNvPr id="1" name=""/>
+        <p:cNvGrpSpPr/>
+        <p:nvPr/>
+      </p:nvGrpSpPr>
+      <p:grpSpPr/>
+    </p:spTree>
+    <p:custDataLst>
+      <p:tags r:id="rId2"/>
+    </p:custDataLst>
+  </p:cSld>
+  <p:clrMapOvr>
+    <a:masterClrMapping/>
+  </p:clrMapOvr>
+  <mc:AlternateContent xmlns:mc="http://schemas.openxmlformats.org/markup-compatibility/2006">
+    <mc:Choice xmlns:p14="http://schemas.microsoft.com/office/powerpoint/2010/main" Requires="p14">
+      <p:transition spd="slow" p14:dur="1000">
+        <p:wipe/>
+      </p:transition>
+    </mc:Choice>
+    <mc:Fallback>
+      <p:transition spd="slow">
+        <p:wipe/>
+      </p:transition>
+    </mc:Fallback>
+  </mc:AlternateContent>
+</p:sld>
+</file>
+
+<file path=ppt/slides/slide20.xml><?xml version="1.0" encoding="utf-8"?>
 <p:sld xmlns:a="http://schemas.openxmlformats.org/drawingml/2006/main" xmlns:r="http://schemas.openxmlformats.org/officeDocument/2006/relationships" xmlns:p="http://schemas.openxmlformats.org/presentationml/2006/main">
   <p:cSld>
     <p:spTree>
@@ -4467,6 +6533,18 @@
   <p:clrMapOvr>
     <a:masterClrMapping/>
   </p:clrMapOvr>
+  <mc:AlternateContent xmlns:mc="http://schemas.openxmlformats.org/markup-compatibility/2006" xmlns:p159="http://schemas.microsoft.com/office/powerpoint/2015/09/main">
+    <mc:Choice Requires="p159">
+      <p:transition xmlns:p14="http://schemas.microsoft.com/office/powerpoint/2010/main" spd="slow" p14:dur="2000">
+        <p159:morph option="byObject"/>
+      </p:transition>
+    </mc:Choice>
+    <mc:Fallback>
+      <p:transition spd="slow">
+        <p:fade/>
+      </p:transition>
+    </mc:Fallback>
+  </mc:AlternateContent>
   <p:timing>
     <p:tnLst>
       <p:par>
@@ -4675,7 +6753,335 @@
 </p:sld>
 </file>
 
-<file path=ppt/slides/slide15.xml><?xml version="1.0" encoding="utf-8"?>
+<file path=ppt/slides/slide21.xml><?xml version="1.0" encoding="utf-8"?>
+<p:sld xmlns:a="http://schemas.openxmlformats.org/drawingml/2006/main" xmlns:r="http://schemas.openxmlformats.org/officeDocument/2006/relationships" xmlns:p="http://schemas.openxmlformats.org/presentationml/2006/main">
+  <p:cSld>
+    <p:spTree>
+      <p:nvGrpSpPr>
+        <p:cNvPr id="1" name=""/>
+        <p:cNvGrpSpPr/>
+        <p:nvPr/>
+      </p:nvGrpSpPr>
+      <p:grpSpPr/>
+      <p:pic>
+        <p:nvPicPr>
+          <p:cNvPr id="4" name="图片 3"/>
+          <p:cNvPicPr/>
+          <p:nvPr>
+            <p:custDataLst>
+              <p:tags r:id="rId1"/>
+            </p:custDataLst>
+          </p:nvPr>
+        </p:nvPicPr>
+        <p:blipFill>
+          <a:blip r:embed="rId2"/>
+          <a:srcRect r="3002"/>
+          <a:stretch>
+            <a:fillRect/>
+          </a:stretch>
+        </p:blipFill>
+        <p:spPr>
+          <a:xfrm>
+            <a:off x="2596515" y="0"/>
+            <a:ext cx="4593590" cy="4200525"/>
+          </a:xfrm>
+          <a:prstGeom prst="rect">
+            <a:avLst/>
+          </a:prstGeom>
+          <a:noFill/>
+          <a:ln w="9525">
+            <a:noFill/>
+          </a:ln>
+        </p:spPr>
+      </p:pic>
+      <p:sp>
+        <p:nvSpPr>
+          <p:cNvPr id="5" name="文本框 4"/>
+          <p:cNvSpPr txBox="1"/>
+          <p:nvPr/>
+        </p:nvSpPr>
+        <p:spPr>
+          <a:xfrm>
+            <a:off x="1639570" y="4760595"/>
+            <a:ext cx="6096000" cy="1198880"/>
+          </a:xfrm>
+          <a:prstGeom prst="rect">
+            <a:avLst/>
+          </a:prstGeom>
+          <a:noFill/>
+        </p:spPr>
+        <p:txBody>
+          <a:bodyPr wrap="square" rtlCol="0" anchor="t">
+            <a:spAutoFit/>
+          </a:bodyPr>
+          <a:p>
+            <a:pPr algn="ctr"/>
+            <a:r>
+              <a:rPr lang="zh-CN" altLang="en-US">
+                <a:latin typeface="楷体" panose="02010609060101010101" charset="-122"/>
+                <a:ea typeface="楷体" panose="02010609060101010101" charset="-122"/>
+                <a:cs typeface="楷体" panose="02010609060101010101" charset="-122"/>
+              </a:rPr>
+              <a:t>《乞巧》</a:t>
+            </a:r>
+            <a:endParaRPr lang="zh-CN" altLang="en-US">
+              <a:latin typeface="楷体" panose="02010609060101010101" charset="-122"/>
+              <a:ea typeface="楷体" panose="02010609060101010101" charset="-122"/>
+              <a:cs typeface="楷体" panose="02010609060101010101" charset="-122"/>
+            </a:endParaRPr>
+          </a:p>
+          <a:p>
+            <a:pPr algn="ctr"/>
+            <a:r>
+              <a:rPr lang="zh-CN" altLang="en-US">
+                <a:latin typeface="楷体" panose="02010609060101010101" charset="-122"/>
+                <a:ea typeface="楷体" panose="02010609060101010101" charset="-122"/>
+                <a:cs typeface="楷体" panose="02010609060101010101" charset="-122"/>
+              </a:rPr>
+              <a:t>唐朝·林杰</a:t>
+            </a:r>
+            <a:endParaRPr lang="zh-CN" altLang="en-US">
+              <a:latin typeface="楷体" panose="02010609060101010101" charset="-122"/>
+              <a:ea typeface="楷体" panose="02010609060101010101" charset="-122"/>
+              <a:cs typeface="楷体" panose="02010609060101010101" charset="-122"/>
+            </a:endParaRPr>
+          </a:p>
+          <a:p>
+            <a:pPr algn="ctr"/>
+            <a:r>
+              <a:rPr lang="zh-CN" altLang="en-US">
+                <a:latin typeface="楷体" panose="02010609060101010101" charset="-122"/>
+                <a:ea typeface="楷体" panose="02010609060101010101" charset="-122"/>
+                <a:cs typeface="楷体" panose="02010609060101010101" charset="-122"/>
+              </a:rPr>
+              <a:t>七夕今宵看碧霄，牵牛织女渡河桥。</a:t>
+            </a:r>
+            <a:endParaRPr lang="zh-CN" altLang="en-US">
+              <a:latin typeface="楷体" panose="02010609060101010101" charset="-122"/>
+              <a:ea typeface="楷体" panose="02010609060101010101" charset="-122"/>
+              <a:cs typeface="楷体" panose="02010609060101010101" charset="-122"/>
+            </a:endParaRPr>
+          </a:p>
+          <a:p>
+            <a:pPr algn="ctr"/>
+            <a:r>
+              <a:rPr lang="zh-CN" altLang="en-US">
+                <a:latin typeface="楷体" panose="02010609060101010101" charset="-122"/>
+                <a:ea typeface="楷体" panose="02010609060101010101" charset="-122"/>
+                <a:cs typeface="楷体" panose="02010609060101010101" charset="-122"/>
+              </a:rPr>
+              <a:t>家家乞巧望秋月，穿尽红丝几万条。</a:t>
+            </a:r>
+            <a:endParaRPr lang="zh-CN" altLang="en-US">
+              <a:latin typeface="楷体" panose="02010609060101010101" charset="-122"/>
+              <a:ea typeface="楷体" panose="02010609060101010101" charset="-122"/>
+              <a:cs typeface="楷体" panose="02010609060101010101" charset="-122"/>
+            </a:endParaRPr>
+          </a:p>
+        </p:txBody>
+      </p:sp>
+    </p:spTree>
+    <p:custDataLst>
+      <p:tags r:id="rId3"/>
+    </p:custDataLst>
+  </p:cSld>
+  <p:clrMapOvr>
+    <a:masterClrMapping/>
+  </p:clrMapOvr>
+  <mc:AlternateContent xmlns:mc="http://schemas.openxmlformats.org/markup-compatibility/2006" xmlns:p159="http://schemas.microsoft.com/office/powerpoint/2015/09/main">
+    <mc:Choice Requires="p159">
+      <p:transition xmlns:p14="http://schemas.microsoft.com/office/powerpoint/2010/main" spd="slow" p14:dur="2000">
+        <p159:morph option="byObject"/>
+      </p:transition>
+    </mc:Choice>
+    <mc:Fallback>
+      <p:transition spd="slow">
+        <p:fade/>
+      </p:transition>
+    </mc:Fallback>
+  </mc:AlternateContent>
+  <p:timing>
+    <p:tnLst>
+      <p:par>
+        <p:cTn id="1" dur="indefinite" restart="never" nodeType="tmRoot">
+          <p:childTnLst>
+            <p:seq concurrent="1" nextAc="seek">
+              <p:cTn id="2" dur="indefinite" nodeType="mainSeq">
+                <p:childTnLst>
+                  <p:par>
+                    <p:cTn id="3" fill="hold">
+                      <p:stCondLst>
+                        <p:cond delay="indefinite"/>
+                      </p:stCondLst>
+                      <p:childTnLst>
+                        <p:par>
+                          <p:cTn id="4" fill="hold">
+                            <p:stCondLst>
+                              <p:cond delay="0"/>
+                            </p:stCondLst>
+                            <p:childTnLst>
+                              <p:par>
+                                <p:cTn id="5" presetID="4" presetClass="entr" presetSubtype="16" fill="hold" nodeType="clickEffect">
+                                  <p:stCondLst>
+                                    <p:cond delay="0"/>
+                                  </p:stCondLst>
+                                  <p:childTnLst>
+                                    <p:set>
+                                      <p:cBhvr>
+                                        <p:cTn id="6" dur="1000" fill="hold">
+                                          <p:stCondLst>
+                                            <p:cond delay="0"/>
+                                          </p:stCondLst>
+                                        </p:cTn>
+                                        <p:tgtEl>
+                                          <p:spTgt spid="4"/>
+                                        </p:tgtEl>
+                                        <p:attrNameLst>
+                                          <p:attrName>style.visibility</p:attrName>
+                                        </p:attrNameLst>
+                                      </p:cBhvr>
+                                      <p:to>
+                                        <p:strVal val="visible"/>
+                                      </p:to>
+                                    </p:set>
+                                    <p:animEffect transition="in" filter="box(in)">
+                                      <p:cBhvr>
+                                        <p:cTn id="7" dur="1000"/>
+                                        <p:tgtEl>
+                                          <p:spTgt spid="4"/>
+                                        </p:tgtEl>
+                                      </p:cBhvr>
+                                    </p:animEffect>
+                                  </p:childTnLst>
+                                </p:cTn>
+                              </p:par>
+                            </p:childTnLst>
+                          </p:cTn>
+                        </p:par>
+                      </p:childTnLst>
+                    </p:cTn>
+                  </p:par>
+                  <p:par>
+                    <p:cTn id="8" fill="hold">
+                      <p:stCondLst>
+                        <p:cond delay="indefinite"/>
+                      </p:stCondLst>
+                      <p:childTnLst>
+                        <p:par>
+                          <p:cTn id="9" fill="hold">
+                            <p:stCondLst>
+                              <p:cond delay="0"/>
+                            </p:stCondLst>
+                            <p:childTnLst>
+                              <p:par>
+                                <p:cTn id="10" presetID="2" presetClass="entr" presetSubtype="4" fill="hold" grpId="0" nodeType="clickEffect">
+                                  <p:stCondLst>
+                                    <p:cond delay="0"/>
+                                  </p:stCondLst>
+                                  <p:childTnLst>
+                                    <p:set>
+                                      <p:cBhvr>
+                                        <p:cTn id="11" dur="1" fill="hold">
+                                          <p:stCondLst>
+                                            <p:cond delay="0"/>
+                                          </p:stCondLst>
+                                        </p:cTn>
+                                        <p:tgtEl>
+                                          <p:spTgt spid="5"/>
+                                        </p:tgtEl>
+                                        <p:attrNameLst>
+                                          <p:attrName>style.visibility</p:attrName>
+                                        </p:attrNameLst>
+                                      </p:cBhvr>
+                                      <p:to>
+                                        <p:strVal val="visible"/>
+                                      </p:to>
+                                    </p:set>
+                                    <p:anim calcmode="lin" valueType="num">
+                                      <p:cBhvr additive="base">
+                                        <p:cTn id="12" dur="500" fill="hold"/>
+                                        <p:tgtEl>
+                                          <p:spTgt spid="5"/>
+                                        </p:tgtEl>
+                                        <p:attrNameLst>
+                                          <p:attrName>ppt_x</p:attrName>
+                                        </p:attrNameLst>
+                                      </p:cBhvr>
+                                      <p:tavLst>
+                                        <p:tav tm="0">
+                                          <p:val>
+                                            <p:strVal val="#ppt_x"/>
+                                          </p:val>
+                                        </p:tav>
+                                        <p:tav tm="100000">
+                                          <p:val>
+                                            <p:strVal val="#ppt_x"/>
+                                          </p:val>
+                                        </p:tav>
+                                      </p:tavLst>
+                                    </p:anim>
+                                    <p:anim calcmode="lin" valueType="num">
+                                      <p:cBhvr additive="base">
+                                        <p:cTn id="13" dur="500" fill="hold"/>
+                                        <p:tgtEl>
+                                          <p:spTgt spid="5"/>
+                                        </p:tgtEl>
+                                        <p:attrNameLst>
+                                          <p:attrName>ppt_y</p:attrName>
+                                        </p:attrNameLst>
+                                      </p:cBhvr>
+                                      <p:tavLst>
+                                        <p:tav tm="0">
+                                          <p:val>
+                                            <p:strVal val="1+#ppt_h/2"/>
+                                          </p:val>
+                                        </p:tav>
+                                        <p:tav tm="100000">
+                                          <p:val>
+                                            <p:strVal val="#ppt_y"/>
+                                          </p:val>
+                                        </p:tav>
+                                      </p:tavLst>
+                                    </p:anim>
+                                  </p:childTnLst>
+                                </p:cTn>
+                              </p:par>
+                            </p:childTnLst>
+                          </p:cTn>
+                        </p:par>
+                      </p:childTnLst>
+                    </p:cTn>
+                  </p:par>
+                </p:childTnLst>
+              </p:cTn>
+              <p:prevCondLst>
+                <p:cond evt="onPrev" delay="0">
+                  <p:tgtEl>
+                    <p:sldTgt/>
+                  </p:tgtEl>
+                </p:cond>
+              </p:prevCondLst>
+              <p:nextCondLst>
+                <p:cond evt="onNext" delay="0">
+                  <p:tgtEl>
+                    <p:sldTgt/>
+                  </p:tgtEl>
+                </p:cond>
+              </p:nextCondLst>
+            </p:seq>
+          </p:childTnLst>
+        </p:cTn>
+      </p:par>
+    </p:tnLst>
+    <p:bldLst>
+      <p:bldP spid="5" grpId="0"/>
+      <p:bldP spid="5" grpId="1"/>
+    </p:bldLst>
+  </p:timing>
+</p:sld>
+</file>
+
+<file path=ppt/slides/slide22.xml><?xml version="1.0" encoding="utf-8"?>
 <p:sld xmlns:a="http://schemas.openxmlformats.org/drawingml/2006/main" xmlns:r="http://schemas.openxmlformats.org/officeDocument/2006/relationships" xmlns:p="http://schemas.openxmlformats.org/presentationml/2006/main">
   <p:cSld>
     <p:bg>
@@ -4703,7 +7109,7 @@
           <p:nvPr/>
         </p:nvPicPr>
         <p:blipFill>
-          <a:blip r:embed="rId1"/>
+          <a:blip r:embed="rId2"/>
           <a:srcRect r="3002"/>
           <a:stretch>
             <a:fillRect/>
@@ -4770,21 +7176,21 @@
       </p:sp>
     </p:spTree>
     <p:custDataLst>
-      <p:tags r:id="rId2"/>
+      <p:tags r:id="rId3"/>
     </p:custDataLst>
   </p:cSld>
   <p:clrMapOvr>
     <a:masterClrMapping/>
   </p:clrMapOvr>
-  <mc:AlternateContent xmlns:mc="http://schemas.openxmlformats.org/markup-compatibility/2006">
-    <mc:Choice xmlns:p14="http://schemas.microsoft.com/office/powerpoint/2010/main" Requires="p14">
-      <p:transition p14:dur="500">
-        <p:wedge/>
+  <mc:AlternateContent xmlns:mc="http://schemas.openxmlformats.org/markup-compatibility/2006" xmlns:p159="http://schemas.microsoft.com/office/powerpoint/2015/09/main">
+    <mc:Choice Requires="p159">
+      <p:transition xmlns:p14="http://schemas.microsoft.com/office/powerpoint/2010/main" spd="slow" p14:dur="2000">
+        <p159:morph option="byObject"/>
       </p:transition>
     </mc:Choice>
     <mc:Fallback>
-      <p:transition>
-        <p:wedge/>
+      <p:transition spd="slow">
+        <p:fade/>
       </p:transition>
     </mc:Fallback>
   </mc:AlternateContent>
@@ -4941,7 +7347,7 @@
 </p:sld>
 </file>
 
-<file path=ppt/slides/slide16.xml><?xml version="1.0" encoding="utf-8"?>
+<file path=ppt/slides/slide23.xml><?xml version="1.0" encoding="utf-8"?>
 <p:sld xmlns:a="http://schemas.openxmlformats.org/drawingml/2006/main" xmlns:r="http://schemas.openxmlformats.org/officeDocument/2006/relationships" xmlns:p="http://schemas.openxmlformats.org/presentationml/2006/main">
   <p:cSld>
     <p:spTree>
@@ -5063,6 +7469,18 @@
   <p:clrMapOvr>
     <a:masterClrMapping/>
   </p:clrMapOvr>
+  <mc:AlternateContent xmlns:mc="http://schemas.openxmlformats.org/markup-compatibility/2006" xmlns:p159="http://schemas.microsoft.com/office/powerpoint/2015/09/main">
+    <mc:Choice Requires="p159">
+      <p:transition xmlns:p14="http://schemas.microsoft.com/office/powerpoint/2010/main" spd="slow" p14:dur="2000">
+        <p159:morph option="byObject"/>
+      </p:transition>
+    </mc:Choice>
+    <mc:Fallback>
+      <p:transition spd="slow">
+        <p:fade/>
+      </p:transition>
+    </mc:Fallback>
+  </mc:AlternateContent>
   <p:timing>
     <p:tnLst>
       <p:par>
@@ -5271,7 +7689,351 @@
 </p:sld>
 </file>
 
-<file path=ppt/slides/slide17.xml><?xml version="1.0" encoding="utf-8"?>
+<file path=ppt/slides/slide24.xml><?xml version="1.0" encoding="utf-8"?>
+<p:sld xmlns:a="http://schemas.openxmlformats.org/drawingml/2006/main" xmlns:r="http://schemas.openxmlformats.org/officeDocument/2006/relationships" xmlns:p="http://schemas.openxmlformats.org/presentationml/2006/main">
+  <p:cSld>
+    <p:spTree>
+      <p:nvGrpSpPr>
+        <p:cNvPr id="1" name=""/>
+        <p:cNvGrpSpPr/>
+        <p:nvPr/>
+      </p:nvGrpSpPr>
+      <p:grpSpPr/>
+      <p:pic>
+        <p:nvPicPr>
+          <p:cNvPr id="4" name="图片 3"/>
+          <p:cNvPicPr/>
+          <p:nvPr>
+            <p:custDataLst>
+              <p:tags r:id="rId1"/>
+            </p:custDataLst>
+          </p:nvPr>
+        </p:nvPicPr>
+        <p:blipFill>
+          <a:blip r:embed="rId2"/>
+          <a:srcRect r="3002"/>
+          <a:stretch>
+            <a:fillRect/>
+          </a:stretch>
+        </p:blipFill>
+        <p:spPr>
+          <a:xfrm>
+            <a:off x="7049770" y="2178685"/>
+            <a:ext cx="4593590" cy="4200525"/>
+          </a:xfrm>
+          <a:prstGeom prst="rect">
+            <a:avLst/>
+          </a:prstGeom>
+          <a:noFill/>
+          <a:ln w="9525">
+            <a:noFill/>
+          </a:ln>
+        </p:spPr>
+      </p:pic>
+      <p:sp>
+        <p:nvSpPr>
+          <p:cNvPr id="5" name="文本框 4"/>
+          <p:cNvSpPr txBox="1"/>
+          <p:nvPr/>
+        </p:nvSpPr>
+        <p:spPr>
+          <a:xfrm>
+            <a:off x="1463040" y="1562735"/>
+            <a:ext cx="6096000" cy="1198880"/>
+          </a:xfrm>
+          <a:prstGeom prst="rect">
+            <a:avLst/>
+          </a:prstGeom>
+          <a:noFill/>
+        </p:spPr>
+        <p:txBody>
+          <a:bodyPr wrap="square" rtlCol="0" anchor="t">
+            <a:spAutoFit/>
+          </a:bodyPr>
+          <a:p>
+            <a:pPr algn="ctr"/>
+            <a:r>
+              <a:rPr lang="zh-CN" altLang="en-US">
+                <a:latin typeface="楷体" panose="02010609060101010101" charset="-122"/>
+                <a:ea typeface="楷体" panose="02010609060101010101" charset="-122"/>
+                <a:cs typeface="楷体" panose="02010609060101010101" charset="-122"/>
+              </a:rPr>
+              <a:t>《嫦娥》</a:t>
+            </a:r>
+            <a:endParaRPr lang="zh-CN" altLang="en-US">
+              <a:latin typeface="楷体" panose="02010609060101010101" charset="-122"/>
+              <a:ea typeface="楷体" panose="02010609060101010101" charset="-122"/>
+              <a:cs typeface="楷体" panose="02010609060101010101" charset="-122"/>
+            </a:endParaRPr>
+          </a:p>
+          <a:p>
+            <a:pPr algn="ctr"/>
+            <a:r>
+              <a:rPr lang="zh-CN" altLang="en-US">
+                <a:latin typeface="楷体" panose="02010609060101010101" charset="-122"/>
+                <a:ea typeface="楷体" panose="02010609060101010101" charset="-122"/>
+                <a:cs typeface="楷体" panose="02010609060101010101" charset="-122"/>
+              </a:rPr>
+              <a:t>唐</a:t>
+            </a:r>
+            <a:r>
+              <a:rPr lang="en-US" altLang="zh-CN">
+                <a:latin typeface="楷体" panose="02010609060101010101" charset="-122"/>
+                <a:ea typeface="楷体" panose="02010609060101010101" charset="-122"/>
+                <a:cs typeface="楷体" panose="02010609060101010101" charset="-122"/>
+              </a:rPr>
+              <a:t>·</a:t>
+            </a:r>
+            <a:r>
+              <a:rPr lang="zh-CN" altLang="en-US">
+                <a:latin typeface="楷体" panose="02010609060101010101" charset="-122"/>
+                <a:ea typeface="楷体" panose="02010609060101010101" charset="-122"/>
+                <a:cs typeface="楷体" panose="02010609060101010101" charset="-122"/>
+              </a:rPr>
+              <a:t>李商隐</a:t>
+            </a:r>
+            <a:endParaRPr lang="zh-CN" altLang="en-US">
+              <a:latin typeface="楷体" panose="02010609060101010101" charset="-122"/>
+              <a:ea typeface="楷体" panose="02010609060101010101" charset="-122"/>
+              <a:cs typeface="楷体" panose="02010609060101010101" charset="-122"/>
+            </a:endParaRPr>
+          </a:p>
+          <a:p>
+            <a:pPr algn="ctr"/>
+            <a:r>
+              <a:rPr lang="zh-CN" altLang="en-US">
+                <a:latin typeface="楷体" panose="02010609060101010101" charset="-122"/>
+                <a:ea typeface="楷体" panose="02010609060101010101" charset="-122"/>
+                <a:cs typeface="楷体" panose="02010609060101010101" charset="-122"/>
+              </a:rPr>
+              <a:t>云母屏风烛影深，长河渐落晓星沉。</a:t>
+            </a:r>
+            <a:endParaRPr lang="zh-CN" altLang="en-US">
+              <a:latin typeface="楷体" panose="02010609060101010101" charset="-122"/>
+              <a:ea typeface="楷体" panose="02010609060101010101" charset="-122"/>
+              <a:cs typeface="楷体" panose="02010609060101010101" charset="-122"/>
+            </a:endParaRPr>
+          </a:p>
+          <a:p>
+            <a:pPr algn="ctr"/>
+            <a:r>
+              <a:rPr lang="zh-CN" altLang="en-US">
+                <a:latin typeface="楷体" panose="02010609060101010101" charset="-122"/>
+                <a:ea typeface="楷体" panose="02010609060101010101" charset="-122"/>
+                <a:cs typeface="楷体" panose="02010609060101010101" charset="-122"/>
+              </a:rPr>
+              <a:t>嫦娥应悔偷灵药，碧海青天夜夜心。</a:t>
+            </a:r>
+            <a:endParaRPr lang="zh-CN" altLang="en-US">
+              <a:latin typeface="楷体" panose="02010609060101010101" charset="-122"/>
+              <a:ea typeface="楷体" panose="02010609060101010101" charset="-122"/>
+              <a:cs typeface="楷体" panose="02010609060101010101" charset="-122"/>
+            </a:endParaRPr>
+          </a:p>
+        </p:txBody>
+      </p:sp>
+    </p:spTree>
+    <p:custDataLst>
+      <p:tags r:id="rId3"/>
+    </p:custDataLst>
+  </p:cSld>
+  <p:clrMapOvr>
+    <a:masterClrMapping/>
+  </p:clrMapOvr>
+  <mc:AlternateContent xmlns:mc="http://schemas.openxmlformats.org/markup-compatibility/2006" xmlns:p159="http://schemas.microsoft.com/office/powerpoint/2015/09/main">
+    <mc:Choice Requires="p159">
+      <p:transition xmlns:p14="http://schemas.microsoft.com/office/powerpoint/2010/main" spd="slow" p14:dur="2000">
+        <p159:morph option="byObject"/>
+      </p:transition>
+    </mc:Choice>
+    <mc:Fallback>
+      <p:transition spd="slow">
+        <p:fade/>
+      </p:transition>
+    </mc:Fallback>
+  </mc:AlternateContent>
+  <p:timing>
+    <p:tnLst>
+      <p:par>
+        <p:cTn id="1" dur="indefinite" restart="never" nodeType="tmRoot">
+          <p:childTnLst>
+            <p:seq concurrent="1" nextAc="seek">
+              <p:cTn id="2" dur="indefinite" nodeType="mainSeq">
+                <p:childTnLst>
+                  <p:par>
+                    <p:cTn id="3" fill="hold">
+                      <p:stCondLst>
+                        <p:cond delay="indefinite"/>
+                      </p:stCondLst>
+                      <p:childTnLst>
+                        <p:par>
+                          <p:cTn id="4" fill="hold">
+                            <p:stCondLst>
+                              <p:cond delay="0"/>
+                            </p:stCondLst>
+                            <p:childTnLst>
+                              <p:par>
+                                <p:cTn id="5" presetID="4" presetClass="entr" presetSubtype="16" fill="hold" nodeType="clickEffect">
+                                  <p:stCondLst>
+                                    <p:cond delay="0"/>
+                                  </p:stCondLst>
+                                  <p:childTnLst>
+                                    <p:set>
+                                      <p:cBhvr>
+                                        <p:cTn id="6" dur="1000" fill="hold">
+                                          <p:stCondLst>
+                                            <p:cond delay="0"/>
+                                          </p:stCondLst>
+                                        </p:cTn>
+                                        <p:tgtEl>
+                                          <p:spTgt spid="4"/>
+                                        </p:tgtEl>
+                                        <p:attrNameLst>
+                                          <p:attrName>style.visibility</p:attrName>
+                                        </p:attrNameLst>
+                                      </p:cBhvr>
+                                      <p:to>
+                                        <p:strVal val="visible"/>
+                                      </p:to>
+                                    </p:set>
+                                    <p:animEffect transition="in" filter="box(in)">
+                                      <p:cBhvr>
+                                        <p:cTn id="7" dur="1000"/>
+                                        <p:tgtEl>
+                                          <p:spTgt spid="4"/>
+                                        </p:tgtEl>
+                                      </p:cBhvr>
+                                    </p:animEffect>
+                                  </p:childTnLst>
+                                </p:cTn>
+                              </p:par>
+                            </p:childTnLst>
+                          </p:cTn>
+                        </p:par>
+                      </p:childTnLst>
+                    </p:cTn>
+                  </p:par>
+                  <p:par>
+                    <p:cTn id="8" fill="hold">
+                      <p:stCondLst>
+                        <p:cond delay="indefinite"/>
+                      </p:stCondLst>
+                      <p:childTnLst>
+                        <p:par>
+                          <p:cTn id="9" fill="hold">
+                            <p:stCondLst>
+                              <p:cond delay="0"/>
+                            </p:stCondLst>
+                            <p:childTnLst>
+                              <p:par>
+                                <p:cTn id="10" presetID="2" presetClass="entr" presetSubtype="4" fill="hold" grpId="0" nodeType="clickEffect">
+                                  <p:stCondLst>
+                                    <p:cond delay="0"/>
+                                  </p:stCondLst>
+                                  <p:childTnLst>
+                                    <p:set>
+                                      <p:cBhvr>
+                                        <p:cTn id="11" dur="1" fill="hold">
+                                          <p:stCondLst>
+                                            <p:cond delay="0"/>
+                                          </p:stCondLst>
+                                        </p:cTn>
+                                        <p:tgtEl>
+                                          <p:spTgt spid="5"/>
+                                        </p:tgtEl>
+                                        <p:attrNameLst>
+                                          <p:attrName>style.visibility</p:attrName>
+                                        </p:attrNameLst>
+                                      </p:cBhvr>
+                                      <p:to>
+                                        <p:strVal val="visible"/>
+                                      </p:to>
+                                    </p:set>
+                                    <p:anim calcmode="lin" valueType="num">
+                                      <p:cBhvr additive="base">
+                                        <p:cTn id="12" dur="500" fill="hold"/>
+                                        <p:tgtEl>
+                                          <p:spTgt spid="5"/>
+                                        </p:tgtEl>
+                                        <p:attrNameLst>
+                                          <p:attrName>ppt_x</p:attrName>
+                                        </p:attrNameLst>
+                                      </p:cBhvr>
+                                      <p:tavLst>
+                                        <p:tav tm="0">
+                                          <p:val>
+                                            <p:strVal val="#ppt_x"/>
+                                          </p:val>
+                                        </p:tav>
+                                        <p:tav tm="100000">
+                                          <p:val>
+                                            <p:strVal val="#ppt_x"/>
+                                          </p:val>
+                                        </p:tav>
+                                      </p:tavLst>
+                                    </p:anim>
+                                    <p:anim calcmode="lin" valueType="num">
+                                      <p:cBhvr additive="base">
+                                        <p:cTn id="13" dur="500" fill="hold"/>
+                                        <p:tgtEl>
+                                          <p:spTgt spid="5"/>
+                                        </p:tgtEl>
+                                        <p:attrNameLst>
+                                          <p:attrName>ppt_y</p:attrName>
+                                        </p:attrNameLst>
+                                      </p:cBhvr>
+                                      <p:tavLst>
+                                        <p:tav tm="0">
+                                          <p:val>
+                                            <p:strVal val="1+#ppt_h/2"/>
+                                          </p:val>
+                                        </p:tav>
+                                        <p:tav tm="100000">
+                                          <p:val>
+                                            <p:strVal val="#ppt_y"/>
+                                          </p:val>
+                                        </p:tav>
+                                      </p:tavLst>
+                                    </p:anim>
+                                  </p:childTnLst>
+                                </p:cTn>
+                              </p:par>
+                            </p:childTnLst>
+                          </p:cTn>
+                        </p:par>
+                      </p:childTnLst>
+                    </p:cTn>
+                  </p:par>
+                </p:childTnLst>
+              </p:cTn>
+              <p:prevCondLst>
+                <p:cond evt="onPrev" delay="0">
+                  <p:tgtEl>
+                    <p:sldTgt/>
+                  </p:tgtEl>
+                </p:cond>
+              </p:prevCondLst>
+              <p:nextCondLst>
+                <p:cond evt="onNext" delay="0">
+                  <p:tgtEl>
+                    <p:sldTgt/>
+                  </p:tgtEl>
+                </p:cond>
+              </p:nextCondLst>
+            </p:seq>
+          </p:childTnLst>
+        </p:cTn>
+      </p:par>
+    </p:tnLst>
+    <p:bldLst>
+      <p:bldP spid="5" grpId="0"/>
+      <p:bldP spid="5" grpId="1"/>
+    </p:bldLst>
+  </p:timing>
+</p:sld>
+</file>
+
+<file path=ppt/slides/slide25.xml><?xml version="1.0" encoding="utf-8"?>
 <p:sld xmlns:a="http://schemas.openxmlformats.org/drawingml/2006/main" xmlns:r="http://schemas.openxmlformats.org/officeDocument/2006/relationships" xmlns:p="http://schemas.openxmlformats.org/presentationml/2006/main">
   <p:cSld>
     <p:bg>
@@ -5299,7 +8061,7 @@
           <p:nvPr/>
         </p:nvPicPr>
         <p:blipFill>
-          <a:blip r:embed="rId1"/>
+          <a:blip r:embed="rId2"/>
           <a:srcRect r="3002"/>
           <a:stretch>
             <a:fillRect/>
@@ -5366,21 +8128,21 @@
       </p:sp>
     </p:spTree>
     <p:custDataLst>
-      <p:tags r:id="rId2"/>
+      <p:tags r:id="rId3"/>
     </p:custDataLst>
   </p:cSld>
   <p:clrMapOvr>
     <a:masterClrMapping/>
   </p:clrMapOvr>
-  <mc:AlternateContent xmlns:mc="http://schemas.openxmlformats.org/markup-compatibility/2006">
-    <mc:Choice xmlns:p14="http://schemas.microsoft.com/office/powerpoint/2010/main" Requires="p14">
-      <p:transition p14:dur="500">
-        <p:wedge/>
+  <mc:AlternateContent xmlns:mc="http://schemas.openxmlformats.org/markup-compatibility/2006" xmlns:p159="http://schemas.microsoft.com/office/powerpoint/2015/09/main">
+    <mc:Choice Requires="p159">
+      <p:transition xmlns:p14="http://schemas.microsoft.com/office/powerpoint/2010/main" spd="slow" p14:dur="2000">
+        <p159:morph option="byObject"/>
       </p:transition>
     </mc:Choice>
     <mc:Fallback>
-      <p:transition>
-        <p:wedge/>
+      <p:transition spd="slow">
+        <p:fade/>
       </p:transition>
     </mc:Fallback>
   </mc:AlternateContent>
@@ -5537,7 +8299,7 @@
 </p:sld>
 </file>
 
-<file path=ppt/slides/slide18.xml><?xml version="1.0" encoding="utf-8"?>
+<file path=ppt/slides/slide26.xml><?xml version="1.0" encoding="utf-8"?>
 <p:sld xmlns:a="http://schemas.openxmlformats.org/drawingml/2006/main" xmlns:r="http://schemas.openxmlformats.org/officeDocument/2006/relationships" xmlns:p="http://schemas.openxmlformats.org/presentationml/2006/main">
   <p:cSld>
     <p:spTree>
@@ -5699,6 +8461,18 @@
   <p:clrMapOvr>
     <a:masterClrMapping/>
   </p:clrMapOvr>
+  <mc:AlternateContent xmlns:mc="http://schemas.openxmlformats.org/markup-compatibility/2006" xmlns:p159="http://schemas.microsoft.com/office/powerpoint/2015/09/main">
+    <mc:Choice Requires="p159">
+      <p:transition xmlns:p14="http://schemas.microsoft.com/office/powerpoint/2010/main" spd="slow" p14:dur="2000">
+        <p159:morph option="byObject"/>
+      </p:transition>
+    </mc:Choice>
+    <mc:Fallback>
+      <p:transition spd="slow">
+        <p:fade/>
+      </p:transition>
+    </mc:Fallback>
+  </mc:AlternateContent>
   <p:timing>
     <p:tnLst>
       <p:par>
@@ -5907,7 +8681,335 @@
 </p:sld>
 </file>
 
-<file path=ppt/slides/slide19.xml><?xml version="1.0" encoding="utf-8"?>
+<file path=ppt/slides/slide27.xml><?xml version="1.0" encoding="utf-8"?>
+<p:sld xmlns:a="http://schemas.openxmlformats.org/drawingml/2006/main" xmlns:r="http://schemas.openxmlformats.org/officeDocument/2006/relationships" xmlns:p="http://schemas.openxmlformats.org/presentationml/2006/main">
+  <p:cSld>
+    <p:spTree>
+      <p:nvGrpSpPr>
+        <p:cNvPr id="1" name=""/>
+        <p:cNvGrpSpPr/>
+        <p:nvPr/>
+      </p:nvGrpSpPr>
+      <p:grpSpPr/>
+      <p:pic>
+        <p:nvPicPr>
+          <p:cNvPr id="4" name="图片 3"/>
+          <p:cNvPicPr/>
+          <p:nvPr>
+            <p:custDataLst>
+              <p:tags r:id="rId1"/>
+            </p:custDataLst>
+          </p:nvPr>
+        </p:nvPicPr>
+        <p:blipFill>
+          <a:blip r:embed="rId2"/>
+          <a:srcRect r="3002"/>
+          <a:stretch>
+            <a:fillRect/>
+          </a:stretch>
+        </p:blipFill>
+        <p:spPr>
+          <a:xfrm>
+            <a:off x="7049770" y="2178685"/>
+            <a:ext cx="4593590" cy="4200525"/>
+          </a:xfrm>
+          <a:prstGeom prst="rect">
+            <a:avLst/>
+          </a:prstGeom>
+          <a:noFill/>
+          <a:ln w="9525">
+            <a:noFill/>
+          </a:ln>
+        </p:spPr>
+      </p:pic>
+      <p:sp>
+        <p:nvSpPr>
+          <p:cNvPr id="5" name="文本框 4"/>
+          <p:cNvSpPr txBox="1"/>
+          <p:nvPr/>
+        </p:nvSpPr>
+        <p:spPr>
+          <a:xfrm>
+            <a:off x="1463040" y="1562735"/>
+            <a:ext cx="6096000" cy="1198880"/>
+          </a:xfrm>
+          <a:prstGeom prst="rect">
+            <a:avLst/>
+          </a:prstGeom>
+          <a:noFill/>
+        </p:spPr>
+        <p:txBody>
+          <a:bodyPr wrap="square" rtlCol="0" anchor="t">
+            <a:spAutoFit/>
+          </a:bodyPr>
+          <a:p>
+            <a:pPr algn="ctr"/>
+            <a:r>
+              <a:rPr lang="zh-CN" altLang="en-US">
+                <a:latin typeface="楷体" panose="02010609060101010101" charset="-122"/>
+                <a:ea typeface="楷体" panose="02010609060101010101" charset="-122"/>
+                <a:cs typeface="楷体" panose="02010609060101010101" charset="-122"/>
+              </a:rPr>
+              <a:t>《九月九日忆山东兄弟》</a:t>
+            </a:r>
+            <a:endParaRPr lang="zh-CN" altLang="en-US">
+              <a:latin typeface="楷体" panose="02010609060101010101" charset="-122"/>
+              <a:ea typeface="楷体" panose="02010609060101010101" charset="-122"/>
+              <a:cs typeface="楷体" panose="02010609060101010101" charset="-122"/>
+            </a:endParaRPr>
+          </a:p>
+          <a:p>
+            <a:pPr algn="ctr"/>
+            <a:r>
+              <a:rPr lang="zh-CN" altLang="en-US">
+                <a:latin typeface="楷体" panose="02010609060101010101" charset="-122"/>
+                <a:ea typeface="楷体" panose="02010609060101010101" charset="-122"/>
+                <a:cs typeface="楷体" panose="02010609060101010101" charset="-122"/>
+              </a:rPr>
+              <a:t>　　唐·王维</a:t>
+            </a:r>
+            <a:endParaRPr lang="zh-CN" altLang="en-US">
+              <a:latin typeface="楷体" panose="02010609060101010101" charset="-122"/>
+              <a:ea typeface="楷体" panose="02010609060101010101" charset="-122"/>
+              <a:cs typeface="楷体" panose="02010609060101010101" charset="-122"/>
+            </a:endParaRPr>
+          </a:p>
+          <a:p>
+            <a:pPr algn="ctr"/>
+            <a:r>
+              <a:rPr lang="zh-CN" altLang="en-US">
+                <a:latin typeface="楷体" panose="02010609060101010101" charset="-122"/>
+                <a:ea typeface="楷体" panose="02010609060101010101" charset="-122"/>
+                <a:cs typeface="楷体" panose="02010609060101010101" charset="-122"/>
+              </a:rPr>
+              <a:t>　　独在异乡为异客，每逢佳节倍思亲。</a:t>
+            </a:r>
+            <a:endParaRPr lang="zh-CN" altLang="en-US">
+              <a:latin typeface="楷体" panose="02010609060101010101" charset="-122"/>
+              <a:ea typeface="楷体" panose="02010609060101010101" charset="-122"/>
+              <a:cs typeface="楷体" panose="02010609060101010101" charset="-122"/>
+            </a:endParaRPr>
+          </a:p>
+          <a:p>
+            <a:pPr algn="ctr"/>
+            <a:r>
+              <a:rPr lang="zh-CN" altLang="en-US">
+                <a:latin typeface="楷体" panose="02010609060101010101" charset="-122"/>
+                <a:ea typeface="楷体" panose="02010609060101010101" charset="-122"/>
+                <a:cs typeface="楷体" panose="02010609060101010101" charset="-122"/>
+              </a:rPr>
+              <a:t>　　遥知兄弟登高处，遍插茱萸少一人。</a:t>
+            </a:r>
+            <a:endParaRPr lang="zh-CN" altLang="en-US">
+              <a:latin typeface="楷体" panose="02010609060101010101" charset="-122"/>
+              <a:ea typeface="楷体" panose="02010609060101010101" charset="-122"/>
+              <a:cs typeface="楷体" panose="02010609060101010101" charset="-122"/>
+            </a:endParaRPr>
+          </a:p>
+        </p:txBody>
+      </p:sp>
+    </p:spTree>
+    <p:custDataLst>
+      <p:tags r:id="rId3"/>
+    </p:custDataLst>
+  </p:cSld>
+  <p:clrMapOvr>
+    <a:masterClrMapping/>
+  </p:clrMapOvr>
+  <mc:AlternateContent xmlns:mc="http://schemas.openxmlformats.org/markup-compatibility/2006" xmlns:p159="http://schemas.microsoft.com/office/powerpoint/2015/09/main">
+    <mc:Choice Requires="p159">
+      <p:transition xmlns:p14="http://schemas.microsoft.com/office/powerpoint/2010/main" spd="slow" p14:dur="2000">
+        <p159:morph option="byObject"/>
+      </p:transition>
+    </mc:Choice>
+    <mc:Fallback>
+      <p:transition spd="slow">
+        <p:fade/>
+      </p:transition>
+    </mc:Fallback>
+  </mc:AlternateContent>
+  <p:timing>
+    <p:tnLst>
+      <p:par>
+        <p:cTn id="1" dur="indefinite" restart="never" nodeType="tmRoot">
+          <p:childTnLst>
+            <p:seq concurrent="1" nextAc="seek">
+              <p:cTn id="2" dur="indefinite" nodeType="mainSeq">
+                <p:childTnLst>
+                  <p:par>
+                    <p:cTn id="3" fill="hold">
+                      <p:stCondLst>
+                        <p:cond delay="indefinite"/>
+                      </p:stCondLst>
+                      <p:childTnLst>
+                        <p:par>
+                          <p:cTn id="4" fill="hold">
+                            <p:stCondLst>
+                              <p:cond delay="0"/>
+                            </p:stCondLst>
+                            <p:childTnLst>
+                              <p:par>
+                                <p:cTn id="5" presetID="4" presetClass="entr" presetSubtype="16" fill="hold" nodeType="clickEffect">
+                                  <p:stCondLst>
+                                    <p:cond delay="0"/>
+                                  </p:stCondLst>
+                                  <p:childTnLst>
+                                    <p:set>
+                                      <p:cBhvr>
+                                        <p:cTn id="6" dur="1000" fill="hold">
+                                          <p:stCondLst>
+                                            <p:cond delay="0"/>
+                                          </p:stCondLst>
+                                        </p:cTn>
+                                        <p:tgtEl>
+                                          <p:spTgt spid="4"/>
+                                        </p:tgtEl>
+                                        <p:attrNameLst>
+                                          <p:attrName>style.visibility</p:attrName>
+                                        </p:attrNameLst>
+                                      </p:cBhvr>
+                                      <p:to>
+                                        <p:strVal val="visible"/>
+                                      </p:to>
+                                    </p:set>
+                                    <p:animEffect transition="in" filter="box(in)">
+                                      <p:cBhvr>
+                                        <p:cTn id="7" dur="1000"/>
+                                        <p:tgtEl>
+                                          <p:spTgt spid="4"/>
+                                        </p:tgtEl>
+                                      </p:cBhvr>
+                                    </p:animEffect>
+                                  </p:childTnLst>
+                                </p:cTn>
+                              </p:par>
+                            </p:childTnLst>
+                          </p:cTn>
+                        </p:par>
+                      </p:childTnLst>
+                    </p:cTn>
+                  </p:par>
+                  <p:par>
+                    <p:cTn id="8" fill="hold">
+                      <p:stCondLst>
+                        <p:cond delay="indefinite"/>
+                      </p:stCondLst>
+                      <p:childTnLst>
+                        <p:par>
+                          <p:cTn id="9" fill="hold">
+                            <p:stCondLst>
+                              <p:cond delay="0"/>
+                            </p:stCondLst>
+                            <p:childTnLst>
+                              <p:par>
+                                <p:cTn id="10" presetID="2" presetClass="entr" presetSubtype="4" fill="hold" grpId="0" nodeType="clickEffect">
+                                  <p:stCondLst>
+                                    <p:cond delay="0"/>
+                                  </p:stCondLst>
+                                  <p:childTnLst>
+                                    <p:set>
+                                      <p:cBhvr>
+                                        <p:cTn id="11" dur="1" fill="hold">
+                                          <p:stCondLst>
+                                            <p:cond delay="0"/>
+                                          </p:stCondLst>
+                                        </p:cTn>
+                                        <p:tgtEl>
+                                          <p:spTgt spid="5"/>
+                                        </p:tgtEl>
+                                        <p:attrNameLst>
+                                          <p:attrName>style.visibility</p:attrName>
+                                        </p:attrNameLst>
+                                      </p:cBhvr>
+                                      <p:to>
+                                        <p:strVal val="visible"/>
+                                      </p:to>
+                                    </p:set>
+                                    <p:anim calcmode="lin" valueType="num">
+                                      <p:cBhvr additive="base">
+                                        <p:cTn id="12" dur="500" fill="hold"/>
+                                        <p:tgtEl>
+                                          <p:spTgt spid="5"/>
+                                        </p:tgtEl>
+                                        <p:attrNameLst>
+                                          <p:attrName>ppt_x</p:attrName>
+                                        </p:attrNameLst>
+                                      </p:cBhvr>
+                                      <p:tavLst>
+                                        <p:tav tm="0">
+                                          <p:val>
+                                            <p:strVal val="#ppt_x"/>
+                                          </p:val>
+                                        </p:tav>
+                                        <p:tav tm="100000">
+                                          <p:val>
+                                            <p:strVal val="#ppt_x"/>
+                                          </p:val>
+                                        </p:tav>
+                                      </p:tavLst>
+                                    </p:anim>
+                                    <p:anim calcmode="lin" valueType="num">
+                                      <p:cBhvr additive="base">
+                                        <p:cTn id="13" dur="500" fill="hold"/>
+                                        <p:tgtEl>
+                                          <p:spTgt spid="5"/>
+                                        </p:tgtEl>
+                                        <p:attrNameLst>
+                                          <p:attrName>ppt_y</p:attrName>
+                                        </p:attrNameLst>
+                                      </p:cBhvr>
+                                      <p:tavLst>
+                                        <p:tav tm="0">
+                                          <p:val>
+                                            <p:strVal val="1+#ppt_h/2"/>
+                                          </p:val>
+                                        </p:tav>
+                                        <p:tav tm="100000">
+                                          <p:val>
+                                            <p:strVal val="#ppt_y"/>
+                                          </p:val>
+                                        </p:tav>
+                                      </p:tavLst>
+                                    </p:anim>
+                                  </p:childTnLst>
+                                </p:cTn>
+                              </p:par>
+                            </p:childTnLst>
+                          </p:cTn>
+                        </p:par>
+                      </p:childTnLst>
+                    </p:cTn>
+                  </p:par>
+                </p:childTnLst>
+              </p:cTn>
+              <p:prevCondLst>
+                <p:cond evt="onPrev" delay="0">
+                  <p:tgtEl>
+                    <p:sldTgt/>
+                  </p:tgtEl>
+                </p:cond>
+              </p:prevCondLst>
+              <p:nextCondLst>
+                <p:cond evt="onNext" delay="0">
+                  <p:tgtEl>
+                    <p:sldTgt/>
+                  </p:tgtEl>
+                </p:cond>
+              </p:nextCondLst>
+            </p:seq>
+          </p:childTnLst>
+        </p:cTn>
+      </p:par>
+    </p:tnLst>
+    <p:bldLst>
+      <p:bldP spid="5" grpId="0"/>
+      <p:bldP spid="5" grpId="1"/>
+    </p:bldLst>
+  </p:timing>
+</p:sld>
+</file>
+
+<file path=ppt/slides/slide28.xml><?xml version="1.0" encoding="utf-8"?>
 <p:sld xmlns:a="http://schemas.openxmlformats.org/drawingml/2006/main" xmlns:r="http://schemas.openxmlformats.org/officeDocument/2006/relationships" xmlns:p="http://schemas.openxmlformats.org/presentationml/2006/main">
   <p:cSld>
     <p:bg>
@@ -5935,7 +9037,7 @@
           <p:nvPr/>
         </p:nvPicPr>
         <p:blipFill>
-          <a:blip r:embed="rId1"/>
+          <a:blip r:embed="rId2"/>
           <a:srcRect r="3002"/>
           <a:stretch>
             <a:fillRect/>
@@ -5994,21 +9096,411 @@
       </p:sp>
     </p:spTree>
     <p:custDataLst>
+      <p:tags r:id="rId3"/>
+    </p:custDataLst>
+  </p:cSld>
+  <p:clrMapOvr>
+    <a:masterClrMapping/>
+  </p:clrMapOvr>
+  <mc:AlternateContent xmlns:mc="http://schemas.openxmlformats.org/markup-compatibility/2006" xmlns:p159="http://schemas.microsoft.com/office/powerpoint/2015/09/main">
+    <mc:Choice Requires="p159">
+      <p:transition xmlns:p14="http://schemas.microsoft.com/office/powerpoint/2010/main" spd="slow" p14:dur="2000">
+        <p159:morph option="byObject"/>
+      </p:transition>
+    </mc:Choice>
+    <mc:Fallback>
+      <p:transition spd="slow">
+        <p:fade/>
+      </p:transition>
+    </mc:Fallback>
+  </mc:AlternateContent>
+  <p:timing>
+    <p:tnLst>
+      <p:par>
+        <p:cTn id="1" dur="indefinite" restart="never" nodeType="tmRoot">
+          <p:childTnLst>
+            <p:seq concurrent="1" nextAc="seek">
+              <p:cTn id="2" dur="indefinite" nodeType="mainSeq">
+                <p:childTnLst>
+                  <p:par>
+                    <p:cTn id="3" fill="hold">
+                      <p:stCondLst>
+                        <p:cond delay="indefinite"/>
+                        <p:cond evt="onBegin" delay="0">
+                          <p:tn val="2"/>
+                        </p:cond>
+                      </p:stCondLst>
+                      <p:childTnLst>
+                        <p:par>
+                          <p:cTn id="4" fill="hold">
+                            <p:stCondLst>
+                              <p:cond delay="0"/>
+                            </p:stCondLst>
+                            <p:childTnLst>
+                              <p:par>
+                                <p:cTn id="5" presetID="22" presetClass="entr" presetSubtype="4" fill="hold" nodeType="afterEffect">
+                                  <p:stCondLst>
+                                    <p:cond delay="0"/>
+                                  </p:stCondLst>
+                                  <p:childTnLst>
+                                    <p:set>
+                                      <p:cBhvr>
+                                        <p:cTn id="6" dur="1" fill="hold">
+                                          <p:stCondLst>
+                                            <p:cond delay="0"/>
+                                          </p:stCondLst>
+                                        </p:cTn>
+                                        <p:tgtEl>
+                                          <p:spTgt spid="102"/>
+                                        </p:tgtEl>
+                                        <p:attrNameLst>
+                                          <p:attrName>style.visibility</p:attrName>
+                                        </p:attrNameLst>
+                                      </p:cBhvr>
+                                      <p:to>
+                                        <p:strVal val="visible"/>
+                                      </p:to>
+                                    </p:set>
+                                    <p:animEffect transition="in" filter="wipe(down)">
+                                      <p:cBhvr>
+                                        <p:cTn id="7" dur="500"/>
+                                        <p:tgtEl>
+                                          <p:spTgt spid="102"/>
+                                        </p:tgtEl>
+                                      </p:cBhvr>
+                                    </p:animEffect>
+                                  </p:childTnLst>
+                                </p:cTn>
+                              </p:par>
+                            </p:childTnLst>
+                          </p:cTn>
+                        </p:par>
+                        <p:par>
+                          <p:cTn id="8" fill="hold">
+                            <p:stCondLst>
+                              <p:cond delay="500"/>
+                            </p:stCondLst>
+                            <p:childTnLst>
+                              <p:par>
+                                <p:cTn id="9" presetID="27" presetClass="entr" presetSubtype="0" fill="hold" grpId="0" nodeType="afterEffect">
+                                  <p:stCondLst>
+                                    <p:cond delay="0"/>
+                                  </p:stCondLst>
+                                  <p:iterate type="lt">
+                                    <p:tmPct val="50000"/>
+                                  </p:iterate>
+                                  <p:childTnLst>
+                                    <p:set>
+                                      <p:cBhvr>
+                                        <p:cTn id="10" dur="1" fill="hold">
+                                          <p:stCondLst>
+                                            <p:cond delay="0"/>
+                                          </p:stCondLst>
+                                        </p:cTn>
+                                        <p:tgtEl>
+                                          <p:spTgt spid="2"/>
+                                        </p:tgtEl>
+                                        <p:attrNameLst>
+                                          <p:attrName>style.visibility</p:attrName>
+                                        </p:attrNameLst>
+                                      </p:cBhvr>
+                                      <p:to>
+                                        <p:strVal val="visible"/>
+                                      </p:to>
+                                    </p:set>
+                                    <p:anim calcmode="discrete" valueType="clr">
+                                      <p:cBhvr override="childStyle">
+                                        <p:cTn id="11" dur="80"/>
+                                        <p:tgtEl>
+                                          <p:spTgt spid="2"/>
+                                        </p:tgtEl>
+                                        <p:attrNameLst>
+                                          <p:attrName>style.color</p:attrName>
+                                        </p:attrNameLst>
+                                      </p:cBhvr>
+                                      <p:tavLst>
+                                        <p:tav tm="0">
+                                          <p:val>
+                                            <p:clrVal>
+                                              <a:schemeClr val="accent2"/>
+                                            </p:clrVal>
+                                          </p:val>
+                                        </p:tav>
+                                        <p:tav tm="50000">
+                                          <p:val>
+                                            <p:clrVal>
+                                              <a:schemeClr val="hlink"/>
+                                            </p:clrVal>
+                                          </p:val>
+                                        </p:tav>
+                                      </p:tavLst>
+                                    </p:anim>
+                                    <p:anim calcmode="discrete" valueType="clr">
+                                      <p:cBhvr>
+                                        <p:cTn id="12" dur="80"/>
+                                        <p:tgtEl>
+                                          <p:spTgt spid="2"/>
+                                        </p:tgtEl>
+                                        <p:attrNameLst>
+                                          <p:attrName>fillcolor</p:attrName>
+                                        </p:attrNameLst>
+                                      </p:cBhvr>
+                                      <p:tavLst>
+                                        <p:tav tm="0">
+                                          <p:val>
+                                            <p:clrVal>
+                                              <a:schemeClr val="accent2"/>
+                                            </p:clrVal>
+                                          </p:val>
+                                        </p:tav>
+                                        <p:tav tm="50000">
+                                          <p:val>
+                                            <p:clrVal>
+                                              <a:schemeClr val="hlink"/>
+                                            </p:clrVal>
+                                          </p:val>
+                                        </p:tav>
+                                      </p:tavLst>
+                                    </p:anim>
+                                    <p:set>
+                                      <p:cBhvr>
+                                        <p:cTn id="13" dur="80"/>
+                                        <p:tgtEl>
+                                          <p:spTgt spid="2"/>
+                                        </p:tgtEl>
+                                        <p:attrNameLst>
+                                          <p:attrName>fill.type</p:attrName>
+                                        </p:attrNameLst>
+                                      </p:cBhvr>
+                                      <p:to>
+                                        <p:strVal val="solid"/>
+                                      </p:to>
+                                    </p:set>
+                                  </p:childTnLst>
+                                </p:cTn>
+                              </p:par>
+                            </p:childTnLst>
+                          </p:cTn>
+                        </p:par>
+                      </p:childTnLst>
+                    </p:cTn>
+                  </p:par>
+                </p:childTnLst>
+              </p:cTn>
+              <p:prevCondLst>
+                <p:cond evt="onPrev" delay="0">
+                  <p:tgtEl>
+                    <p:sldTgt/>
+                  </p:tgtEl>
+                </p:cond>
+              </p:prevCondLst>
+              <p:nextCondLst>
+                <p:cond evt="onNext" delay="0">
+                  <p:tgtEl>
+                    <p:sldTgt/>
+                  </p:tgtEl>
+                </p:cond>
+              </p:nextCondLst>
+            </p:seq>
+          </p:childTnLst>
+        </p:cTn>
+      </p:par>
+    </p:tnLst>
+    <p:bldLst>
+      <p:bldP spid="2" grpId="0"/>
+      <p:bldP spid="2" grpId="1"/>
+    </p:bldLst>
+  </p:timing>
+</p:sld>
+</file>
+
+<file path=ppt/slides/slide3.xml><?xml version="1.0" encoding="utf-8"?>
+<p:sld xmlns:a="http://schemas.openxmlformats.org/drawingml/2006/main" xmlns:r="http://schemas.openxmlformats.org/officeDocument/2006/relationships" xmlns:p="http://schemas.openxmlformats.org/presentationml/2006/main">
+  <p:cSld>
+    <p:spTree>
+      <p:nvGrpSpPr>
+        <p:cNvPr id="1" name=""/>
+        <p:cNvGrpSpPr/>
+        <p:nvPr/>
+      </p:nvGrpSpPr>
+      <p:grpSpPr/>
+      <p:sp>
+        <p:nvSpPr>
+          <p:cNvPr id="4" name="文本框 3"/>
+          <p:cNvSpPr txBox="1"/>
+          <p:nvPr/>
+        </p:nvSpPr>
+        <p:spPr>
+          <a:xfrm>
+            <a:off x="2734310" y="2273935"/>
+            <a:ext cx="4448810" cy="368300"/>
+          </a:xfrm>
+          <a:prstGeom prst="rect">
+            <a:avLst/>
+          </a:prstGeom>
+          <a:noFill/>
+        </p:spPr>
+        <p:txBody>
+          <a:bodyPr wrap="square" rtlCol="0" anchor="t">
+            <a:spAutoFit/>
+          </a:bodyPr>
+          <a:p>
+            <a:r>
+              <a:rPr lang="zh-CN" altLang="en-US"/>
+              <a:t>https://v.qq.com/x/page/i0888z72o5w.html</a:t>
+            </a:r>
+            <a:endParaRPr lang="zh-CN" altLang="en-US"/>
+          </a:p>
+        </p:txBody>
+      </p:sp>
+      <p:pic>
+        <p:nvPicPr>
+          <p:cNvPr id="102" name="图片 101"/>
+          <p:cNvPicPr/>
+          <p:nvPr/>
+        </p:nvPicPr>
+        <p:blipFill>
+          <a:blip r:embed="rId1"/>
+          <a:srcRect r="3002"/>
+          <a:stretch>
+            <a:fillRect/>
+          </a:stretch>
+        </p:blipFill>
+        <p:spPr>
+          <a:xfrm>
+            <a:off x="7503795" y="586740"/>
+            <a:ext cx="4519930" cy="4133215"/>
+          </a:xfrm>
+          <a:prstGeom prst="rect">
+            <a:avLst/>
+          </a:prstGeom>
+          <a:noFill/>
+          <a:ln w="9525">
+            <a:noFill/>
+          </a:ln>
+        </p:spPr>
+      </p:pic>
+    </p:spTree>
+    <p:custDataLst>
       <p:tags r:id="rId2"/>
     </p:custDataLst>
   </p:cSld>
   <p:clrMapOvr>
     <a:masterClrMapping/>
   </p:clrMapOvr>
-  <mc:AlternateContent xmlns:mc="http://schemas.openxmlformats.org/markup-compatibility/2006">
-    <mc:Choice xmlns:p14="http://schemas.microsoft.com/office/powerpoint/2010/main" Requires="p14">
-      <p:transition p14:dur="500">
-        <p:wedge/>
+</p:sld>
+</file>
+
+<file path=ppt/slides/slide4.xml><?xml version="1.0" encoding="utf-8"?>
+<p:sld xmlns:a="http://schemas.openxmlformats.org/drawingml/2006/main" xmlns:r="http://schemas.openxmlformats.org/officeDocument/2006/relationships" xmlns:p="http://schemas.openxmlformats.org/presentationml/2006/main">
+  <p:cSld>
+    <p:bg>
+      <p:bgPr>
+        <a:blipFill>
+          <a:blip r:embed="rId1"/>
+          <a:stretch>
+            <a:fillRect/>
+          </a:stretch>
+        </a:blipFill>
+        <a:effectLst/>
+      </p:bgPr>
+    </p:bg>
+    <p:spTree>
+      <p:nvGrpSpPr>
+        <p:cNvPr id="1" name=""/>
+        <p:cNvGrpSpPr/>
+        <p:nvPr/>
+      </p:nvGrpSpPr>
+      <p:grpSpPr/>
+      <p:pic>
+        <p:nvPicPr>
+          <p:cNvPr id="102" name="图片 101"/>
+          <p:cNvPicPr/>
+          <p:nvPr/>
+        </p:nvPicPr>
+        <p:blipFill>
+          <a:blip r:embed="rId2"/>
+          <a:srcRect r="3002"/>
+          <a:stretch>
+            <a:fillRect/>
+          </a:stretch>
+        </p:blipFill>
+        <p:spPr>
+          <a:xfrm>
+            <a:off x="2924175" y="528955"/>
+            <a:ext cx="6343650" cy="5800090"/>
+          </a:xfrm>
+          <a:prstGeom prst="rect">
+            <a:avLst/>
+          </a:prstGeom>
+          <a:noFill/>
+          <a:ln w="9525">
+            <a:noFill/>
+          </a:ln>
+        </p:spPr>
+      </p:pic>
+      <p:sp>
+        <p:nvSpPr>
+          <p:cNvPr id="2" name="文本框 1"/>
+          <p:cNvSpPr txBox="1"/>
+          <p:nvPr/>
+        </p:nvSpPr>
+        <p:spPr>
+          <a:xfrm>
+            <a:off x="8183880" y="4695190"/>
+            <a:ext cx="3351530" cy="1198880"/>
+          </a:xfrm>
+          <a:prstGeom prst="rect">
+            <a:avLst/>
+          </a:prstGeom>
+          <a:noFill/>
+        </p:spPr>
+        <p:txBody>
+          <a:bodyPr wrap="square" rtlCol="0">
+            <a:spAutoFit/>
+          </a:bodyPr>
+          <a:p>
+            <a:r>
+              <a:rPr lang="en-US" altLang="zh-CN" sz="7200">
+                <a:latin typeface="楷体" panose="02010609060101010101" charset="-122"/>
+                <a:ea typeface="楷体" panose="02010609060101010101" charset="-122"/>
+                <a:cs typeface="楷体" panose="02010609060101010101" charset="-122"/>
+              </a:rPr>
+              <a:t>1.</a:t>
+            </a:r>
+            <a:r>
+              <a:rPr lang="zh-CN" altLang="en-US" sz="7200">
+                <a:latin typeface="楷体" panose="02010609060101010101" charset="-122"/>
+                <a:ea typeface="楷体" panose="02010609060101010101" charset="-122"/>
+                <a:cs typeface="楷体" panose="02010609060101010101" charset="-122"/>
+              </a:rPr>
+              <a:t>春节</a:t>
+            </a:r>
+            <a:endParaRPr lang="zh-CN" altLang="en-US" sz="7200">
+              <a:latin typeface="楷体" panose="02010609060101010101" charset="-122"/>
+              <a:ea typeface="楷体" panose="02010609060101010101" charset="-122"/>
+              <a:cs typeface="楷体" panose="02010609060101010101" charset="-122"/>
+            </a:endParaRPr>
+          </a:p>
+        </p:txBody>
+      </p:sp>
+    </p:spTree>
+    <p:custDataLst>
+      <p:tags r:id="rId3"/>
+    </p:custDataLst>
+  </p:cSld>
+  <p:clrMapOvr>
+    <a:masterClrMapping/>
+  </p:clrMapOvr>
+  <mc:AlternateContent xmlns:mc="http://schemas.openxmlformats.org/markup-compatibility/2006" xmlns:p159="http://schemas.microsoft.com/office/powerpoint/2015/09/main">
+    <mc:Choice Requires="p159">
+      <p:transition xmlns:p14="http://schemas.microsoft.com/office/powerpoint/2010/main" spd="slow" p14:dur="2000">
+        <p159:morph option="byObject"/>
       </p:transition>
     </mc:Choice>
     <mc:Fallback>
-      <p:transition>
-        <p:wedge/>
+      <p:transition spd="slow">
+        <p:fade/>
       </p:transition>
     </mc:Fallback>
   </mc:AlternateContent>
@@ -6165,305 +9657,7 @@
 </p:sld>
 </file>
 
-<file path=ppt/slides/slide2.xml><?xml version="1.0" encoding="utf-8"?>
-<p:sld xmlns:a="http://schemas.openxmlformats.org/drawingml/2006/main" xmlns:r="http://schemas.openxmlformats.org/officeDocument/2006/relationships" xmlns:p="http://schemas.openxmlformats.org/presentationml/2006/main">
-  <p:cSld>
-    <p:bg>
-      <p:bgPr>
-        <a:blipFill>
-          <a:blip r:embed="rId1"/>
-          <a:stretch>
-            <a:fillRect/>
-          </a:stretch>
-        </a:blipFill>
-        <a:effectLst/>
-      </p:bgPr>
-    </p:bg>
-    <p:spTree>
-      <p:nvGrpSpPr>
-        <p:cNvPr id="1" name=""/>
-        <p:cNvGrpSpPr/>
-        <p:nvPr/>
-      </p:nvGrpSpPr>
-      <p:grpSpPr/>
-    </p:spTree>
-    <p:custDataLst>
-      <p:tags r:id="rId2"/>
-    </p:custDataLst>
-  </p:cSld>
-  <p:clrMapOvr>
-    <a:masterClrMapping/>
-  </p:clrMapOvr>
-</p:sld>
-</file>
-
-<file path=ppt/slides/slide3.xml><?xml version="1.0" encoding="utf-8"?>
-<p:sld xmlns:a="http://schemas.openxmlformats.org/drawingml/2006/main" xmlns:r="http://schemas.openxmlformats.org/officeDocument/2006/relationships" xmlns:p="http://schemas.openxmlformats.org/presentationml/2006/main">
-  <p:cSld>
-    <p:bg>
-      <p:bgPr>
-        <a:blipFill>
-          <a:blip r:embed="rId1"/>
-          <a:stretch>
-            <a:fillRect/>
-          </a:stretch>
-        </a:blipFill>
-        <a:effectLst/>
-      </p:bgPr>
-    </p:bg>
-    <p:spTree>
-      <p:nvGrpSpPr>
-        <p:cNvPr id="1" name=""/>
-        <p:cNvGrpSpPr/>
-        <p:nvPr/>
-      </p:nvGrpSpPr>
-      <p:grpSpPr/>
-      <p:pic>
-        <p:nvPicPr>
-          <p:cNvPr id="102" name="图片 101"/>
-          <p:cNvPicPr/>
-          <p:nvPr/>
-        </p:nvPicPr>
-        <p:blipFill>
-          <a:blip r:embed="rId1"/>
-          <a:srcRect r="3002"/>
-          <a:stretch>
-            <a:fillRect/>
-          </a:stretch>
-        </p:blipFill>
-        <p:spPr>
-          <a:xfrm>
-            <a:off x="2924175" y="528955"/>
-            <a:ext cx="6343650" cy="5800090"/>
-          </a:xfrm>
-          <a:prstGeom prst="rect">
-            <a:avLst/>
-          </a:prstGeom>
-          <a:noFill/>
-          <a:ln w="9525">
-            <a:noFill/>
-          </a:ln>
-        </p:spPr>
-      </p:pic>
-      <p:sp>
-        <p:nvSpPr>
-          <p:cNvPr id="2" name="文本框 1"/>
-          <p:cNvSpPr txBox="1"/>
-          <p:nvPr/>
-        </p:nvSpPr>
-        <p:spPr>
-          <a:xfrm>
-            <a:off x="8183880" y="4695190"/>
-            <a:ext cx="3351530" cy="1198880"/>
-          </a:xfrm>
-          <a:prstGeom prst="rect">
-            <a:avLst/>
-          </a:prstGeom>
-          <a:noFill/>
-        </p:spPr>
-        <p:txBody>
-          <a:bodyPr wrap="square" rtlCol="0">
-            <a:spAutoFit/>
-          </a:bodyPr>
-          <a:p>
-            <a:r>
-              <a:rPr lang="en-US" altLang="zh-CN" sz="7200">
-                <a:latin typeface="楷体" panose="02010609060101010101" charset="-122"/>
-                <a:ea typeface="楷体" panose="02010609060101010101" charset="-122"/>
-                <a:cs typeface="楷体" panose="02010609060101010101" charset="-122"/>
-              </a:rPr>
-              <a:t>1.</a:t>
-            </a:r>
-            <a:r>
-              <a:rPr lang="zh-CN" altLang="en-US" sz="7200">
-                <a:latin typeface="楷体" panose="02010609060101010101" charset="-122"/>
-                <a:ea typeface="楷体" panose="02010609060101010101" charset="-122"/>
-                <a:cs typeface="楷体" panose="02010609060101010101" charset="-122"/>
-              </a:rPr>
-              <a:t>春节</a:t>
-            </a:r>
-            <a:endParaRPr lang="zh-CN" altLang="en-US" sz="7200">
-              <a:latin typeface="楷体" panose="02010609060101010101" charset="-122"/>
-              <a:ea typeface="楷体" panose="02010609060101010101" charset="-122"/>
-              <a:cs typeface="楷体" panose="02010609060101010101" charset="-122"/>
-            </a:endParaRPr>
-          </a:p>
-        </p:txBody>
-      </p:sp>
-    </p:spTree>
-    <p:custDataLst>
-      <p:tags r:id="rId2"/>
-    </p:custDataLst>
-  </p:cSld>
-  <p:clrMapOvr>
-    <a:masterClrMapping/>
-  </p:clrMapOvr>
-  <mc:AlternateContent xmlns:mc="http://schemas.openxmlformats.org/markup-compatibility/2006">
-    <mc:Choice xmlns:p14="http://schemas.microsoft.com/office/powerpoint/2010/main" Requires="p14">
-      <p:transition p14:dur="500">
-        <p:wedge/>
-      </p:transition>
-    </mc:Choice>
-    <mc:Fallback>
-      <p:transition>
-        <p:wedge/>
-      </p:transition>
-    </mc:Fallback>
-  </mc:AlternateContent>
-  <p:timing>
-    <p:tnLst>
-      <p:par>
-        <p:cTn id="1" dur="indefinite" restart="never" nodeType="tmRoot">
-          <p:childTnLst>
-            <p:seq concurrent="1" nextAc="seek">
-              <p:cTn id="2" dur="indefinite" nodeType="mainSeq">
-                <p:childTnLst>
-                  <p:par>
-                    <p:cTn id="3" fill="hold">
-                      <p:stCondLst>
-                        <p:cond delay="indefinite"/>
-                      </p:stCondLst>
-                      <p:childTnLst>
-                        <p:par>
-                          <p:cTn id="4" fill="hold">
-                            <p:stCondLst>
-                              <p:cond delay="0"/>
-                            </p:stCondLst>
-                            <p:childTnLst>
-                              <p:par>
-                                <p:cTn id="5" presetID="27" presetClass="entr" presetSubtype="0" fill="hold" grpId="0" nodeType="clickEffect">
-                                  <p:stCondLst>
-                                    <p:cond delay="0"/>
-                                  </p:stCondLst>
-                                  <p:iterate type="lt">
-                                    <p:tmPct val="50000"/>
-                                  </p:iterate>
-                                  <p:childTnLst>
-                                    <p:set>
-                                      <p:cBhvr>
-                                        <p:cTn id="6" dur="1" fill="hold">
-                                          <p:stCondLst>
-                                            <p:cond delay="0"/>
-                                          </p:stCondLst>
-                                        </p:cTn>
-                                        <p:tgtEl>
-                                          <p:spTgt spid="2"/>
-                                        </p:tgtEl>
-                                        <p:attrNameLst>
-                                          <p:attrName>style.visibility</p:attrName>
-                                        </p:attrNameLst>
-                                      </p:cBhvr>
-                                      <p:to>
-                                        <p:strVal val="visible"/>
-                                      </p:to>
-                                    </p:set>
-                                    <p:anim calcmode="discrete" valueType="clr">
-                                      <p:cBhvr override="childStyle">
-                                        <p:cTn id="7" dur="80"/>
-                                        <p:tgtEl>
-                                          <p:spTgt spid="2"/>
-                                        </p:tgtEl>
-                                        <p:attrNameLst>
-                                          <p:attrName>style.color</p:attrName>
-                                        </p:attrNameLst>
-                                      </p:cBhvr>
-                                      <p:tavLst>
-                                        <p:tav tm="0">
-                                          <p:val>
-                                            <p:clrVal>
-                                              <a:schemeClr val="accent2"/>
-                                            </p:clrVal>
-                                          </p:val>
-                                        </p:tav>
-                                        <p:tav tm="50000">
-                                          <p:val>
-                                            <p:clrVal>
-                                              <a:schemeClr val="hlink"/>
-                                            </p:clrVal>
-                                          </p:val>
-                                        </p:tav>
-                                      </p:tavLst>
-                                    </p:anim>
-                                    <p:anim calcmode="discrete" valueType="clr">
-                                      <p:cBhvr>
-                                        <p:cTn id="8" dur="80"/>
-                                        <p:tgtEl>
-                                          <p:spTgt spid="2"/>
-                                        </p:tgtEl>
-                                        <p:attrNameLst>
-                                          <p:attrName>fillcolor</p:attrName>
-                                        </p:attrNameLst>
-                                      </p:cBhvr>
-                                      <p:tavLst>
-                                        <p:tav tm="0">
-                                          <p:val>
-                                            <p:clrVal>
-                                              <a:schemeClr val="accent2"/>
-                                            </p:clrVal>
-                                          </p:val>
-                                        </p:tav>
-                                        <p:tav tm="50000">
-                                          <p:val>
-                                            <p:clrVal>
-                                              <a:schemeClr val="hlink"/>
-                                            </p:clrVal>
-                                          </p:val>
-                                        </p:tav>
-                                      </p:tavLst>
-                                    </p:anim>
-                                    <p:set>
-                                      <p:cBhvr>
-                                        <p:cTn id="9" dur="80"/>
-                                        <p:tgtEl>
-                                          <p:spTgt spid="2"/>
-                                        </p:tgtEl>
-                                        <p:attrNameLst>
-                                          <p:attrName>fill.type</p:attrName>
-                                        </p:attrNameLst>
-                                      </p:cBhvr>
-                                      <p:to>
-                                        <p:strVal val="solid"/>
-                                      </p:to>
-                                    </p:set>
-                                  </p:childTnLst>
-                                </p:cTn>
-                              </p:par>
-                            </p:childTnLst>
-                          </p:cTn>
-                        </p:par>
-                      </p:childTnLst>
-                    </p:cTn>
-                  </p:par>
-                </p:childTnLst>
-              </p:cTn>
-              <p:prevCondLst>
-                <p:cond evt="onPrev" delay="0">
-                  <p:tgtEl>
-                    <p:sldTgt/>
-                  </p:tgtEl>
-                </p:cond>
-              </p:prevCondLst>
-              <p:nextCondLst>
-                <p:cond evt="onNext" delay="0">
-                  <p:tgtEl>
-                    <p:sldTgt/>
-                  </p:tgtEl>
-                </p:cond>
-              </p:nextCondLst>
-            </p:seq>
-          </p:childTnLst>
-        </p:cTn>
-      </p:par>
-    </p:tnLst>
-    <p:bldLst>
-      <p:bldP spid="2" grpId="0"/>
-      <p:bldP spid="2" grpId="1"/>
-    </p:bldLst>
-  </p:timing>
-</p:sld>
-</file>
-
-<file path=ppt/slides/slide4.xml><?xml version="1.0" encoding="utf-8"?>
+<file path=ppt/slides/slide5.xml><?xml version="1.0" encoding="utf-8"?>
 <p:sld xmlns:a="http://schemas.openxmlformats.org/drawingml/2006/main" xmlns:r="http://schemas.openxmlformats.org/officeDocument/2006/relationships" xmlns:p="http://schemas.openxmlformats.org/presentationml/2006/main">
   <p:cSld>
     <p:spTree>
@@ -6716,6 +9910,18 @@
   <p:clrMapOvr>
     <a:masterClrMapping/>
   </p:clrMapOvr>
+  <mc:AlternateContent xmlns:mc="http://schemas.openxmlformats.org/markup-compatibility/2006" xmlns:p159="http://schemas.microsoft.com/office/powerpoint/2015/09/main">
+    <mc:Choice Requires="p159">
+      <p:transition xmlns:p14="http://schemas.microsoft.com/office/powerpoint/2010/main" spd="slow" p14:dur="2000">
+        <p159:morph option="byObject"/>
+      </p:transition>
+    </mc:Choice>
+    <mc:Fallback>
+      <p:transition spd="slow">
+        <p:fade/>
+      </p:transition>
+    </mc:Fallback>
+  </mc:AlternateContent>
   <p:timing>
     <p:tnLst>
       <p:par>
@@ -6924,7 +10130,335 @@
 </p:sld>
 </file>
 
-<file path=ppt/slides/slide5.xml><?xml version="1.0" encoding="utf-8"?>
+<file path=ppt/slides/slide6.xml><?xml version="1.0" encoding="utf-8"?>
+<p:sld xmlns:a="http://schemas.openxmlformats.org/drawingml/2006/main" xmlns:r="http://schemas.openxmlformats.org/officeDocument/2006/relationships" xmlns:p="http://schemas.openxmlformats.org/presentationml/2006/main">
+  <p:cSld>
+    <p:spTree>
+      <p:nvGrpSpPr>
+        <p:cNvPr id="1" name=""/>
+        <p:cNvGrpSpPr/>
+        <p:nvPr/>
+      </p:nvGrpSpPr>
+      <p:grpSpPr/>
+      <p:pic>
+        <p:nvPicPr>
+          <p:cNvPr id="4" name="图片 3"/>
+          <p:cNvPicPr/>
+          <p:nvPr>
+            <p:custDataLst>
+              <p:tags r:id="rId1"/>
+            </p:custDataLst>
+          </p:nvPr>
+        </p:nvPicPr>
+        <p:blipFill>
+          <a:blip r:embed="rId2"/>
+          <a:srcRect r="3002"/>
+          <a:stretch>
+            <a:fillRect/>
+          </a:stretch>
+        </p:blipFill>
+        <p:spPr>
+          <a:xfrm>
+            <a:off x="951230" y="2360930"/>
+            <a:ext cx="4593590" cy="4200525"/>
+          </a:xfrm>
+          <a:prstGeom prst="rect">
+            <a:avLst/>
+          </a:prstGeom>
+          <a:noFill/>
+          <a:ln w="9525">
+            <a:noFill/>
+          </a:ln>
+        </p:spPr>
+      </p:pic>
+      <p:sp>
+        <p:nvSpPr>
+          <p:cNvPr id="5" name="文本框 4"/>
+          <p:cNvSpPr txBox="1"/>
+          <p:nvPr/>
+        </p:nvSpPr>
+        <p:spPr>
+          <a:xfrm>
+            <a:off x="5362575" y="1875790"/>
+            <a:ext cx="6096000" cy="1198880"/>
+          </a:xfrm>
+          <a:prstGeom prst="rect">
+            <a:avLst/>
+          </a:prstGeom>
+          <a:noFill/>
+        </p:spPr>
+        <p:txBody>
+          <a:bodyPr wrap="square" rtlCol="0" anchor="t">
+            <a:spAutoFit/>
+          </a:bodyPr>
+          <a:p>
+            <a:pPr algn="ctr"/>
+            <a:r>
+              <a:rPr lang="zh-CN" altLang="en-US">
+                <a:latin typeface="楷体" panose="02010609060101010101" charset="-122"/>
+                <a:ea typeface="楷体" panose="02010609060101010101" charset="-122"/>
+                <a:cs typeface="楷体" panose="02010609060101010101" charset="-122"/>
+              </a:rPr>
+              <a:t>《元日》</a:t>
+            </a:r>
+            <a:endParaRPr lang="zh-CN" altLang="en-US">
+              <a:latin typeface="楷体" panose="02010609060101010101" charset="-122"/>
+              <a:ea typeface="楷体" panose="02010609060101010101" charset="-122"/>
+              <a:cs typeface="楷体" panose="02010609060101010101" charset="-122"/>
+            </a:endParaRPr>
+          </a:p>
+          <a:p>
+            <a:pPr algn="ctr"/>
+            <a:r>
+              <a:rPr lang="zh-CN" altLang="en-US">
+                <a:latin typeface="楷体" panose="02010609060101010101" charset="-122"/>
+                <a:ea typeface="楷体" panose="02010609060101010101" charset="-122"/>
+                <a:cs typeface="楷体" panose="02010609060101010101" charset="-122"/>
+              </a:rPr>
+              <a:t>宋·王安石</a:t>
+            </a:r>
+            <a:endParaRPr lang="zh-CN" altLang="en-US">
+              <a:latin typeface="楷体" panose="02010609060101010101" charset="-122"/>
+              <a:ea typeface="楷体" panose="02010609060101010101" charset="-122"/>
+              <a:cs typeface="楷体" panose="02010609060101010101" charset="-122"/>
+            </a:endParaRPr>
+          </a:p>
+          <a:p>
+            <a:pPr algn="ctr"/>
+            <a:r>
+              <a:rPr lang="zh-CN" altLang="en-US">
+                <a:latin typeface="楷体" panose="02010609060101010101" charset="-122"/>
+                <a:ea typeface="楷体" panose="02010609060101010101" charset="-122"/>
+                <a:cs typeface="楷体" panose="02010609060101010101" charset="-122"/>
+              </a:rPr>
+              <a:t>爆竹声中一岁除，春风送暖入屠苏。</a:t>
+            </a:r>
+            <a:endParaRPr lang="zh-CN" altLang="en-US">
+              <a:latin typeface="楷体" panose="02010609060101010101" charset="-122"/>
+              <a:ea typeface="楷体" panose="02010609060101010101" charset="-122"/>
+              <a:cs typeface="楷体" panose="02010609060101010101" charset="-122"/>
+            </a:endParaRPr>
+          </a:p>
+          <a:p>
+            <a:pPr algn="ctr"/>
+            <a:r>
+              <a:rPr lang="zh-CN" altLang="en-US">
+                <a:latin typeface="楷体" panose="02010609060101010101" charset="-122"/>
+                <a:ea typeface="楷体" panose="02010609060101010101" charset="-122"/>
+                <a:cs typeface="楷体" panose="02010609060101010101" charset="-122"/>
+              </a:rPr>
+              <a:t>千门万户瞳瞳日，总把新桃换旧符。</a:t>
+            </a:r>
+            <a:endParaRPr lang="zh-CN" altLang="en-US">
+              <a:latin typeface="楷体" panose="02010609060101010101" charset="-122"/>
+              <a:ea typeface="楷体" panose="02010609060101010101" charset="-122"/>
+              <a:cs typeface="楷体" panose="02010609060101010101" charset="-122"/>
+            </a:endParaRPr>
+          </a:p>
+        </p:txBody>
+      </p:sp>
+    </p:spTree>
+    <p:custDataLst>
+      <p:tags r:id="rId3"/>
+    </p:custDataLst>
+  </p:cSld>
+  <p:clrMapOvr>
+    <a:masterClrMapping/>
+  </p:clrMapOvr>
+  <mc:AlternateContent xmlns:mc="http://schemas.openxmlformats.org/markup-compatibility/2006" xmlns:p159="http://schemas.microsoft.com/office/powerpoint/2015/09/main">
+    <mc:Choice Requires="p159">
+      <p:transition xmlns:p14="http://schemas.microsoft.com/office/powerpoint/2010/main" spd="slow" p14:dur="2000">
+        <p159:morph option="byObject"/>
+      </p:transition>
+    </mc:Choice>
+    <mc:Fallback>
+      <p:transition spd="slow">
+        <p:fade/>
+      </p:transition>
+    </mc:Fallback>
+  </mc:AlternateContent>
+  <p:timing>
+    <p:tnLst>
+      <p:par>
+        <p:cTn id="1" dur="indefinite" restart="never" nodeType="tmRoot">
+          <p:childTnLst>
+            <p:seq concurrent="1" nextAc="seek">
+              <p:cTn id="2" dur="indefinite" nodeType="mainSeq">
+                <p:childTnLst>
+                  <p:par>
+                    <p:cTn id="3" fill="hold">
+                      <p:stCondLst>
+                        <p:cond delay="indefinite"/>
+                      </p:stCondLst>
+                      <p:childTnLst>
+                        <p:par>
+                          <p:cTn id="4" fill="hold">
+                            <p:stCondLst>
+                              <p:cond delay="0"/>
+                            </p:stCondLst>
+                            <p:childTnLst>
+                              <p:par>
+                                <p:cTn id="5" presetID="4" presetClass="entr" presetSubtype="16" fill="hold" nodeType="clickEffect">
+                                  <p:stCondLst>
+                                    <p:cond delay="0"/>
+                                  </p:stCondLst>
+                                  <p:childTnLst>
+                                    <p:set>
+                                      <p:cBhvr>
+                                        <p:cTn id="6" dur="1000" fill="hold">
+                                          <p:stCondLst>
+                                            <p:cond delay="0"/>
+                                          </p:stCondLst>
+                                        </p:cTn>
+                                        <p:tgtEl>
+                                          <p:spTgt spid="4"/>
+                                        </p:tgtEl>
+                                        <p:attrNameLst>
+                                          <p:attrName>style.visibility</p:attrName>
+                                        </p:attrNameLst>
+                                      </p:cBhvr>
+                                      <p:to>
+                                        <p:strVal val="visible"/>
+                                      </p:to>
+                                    </p:set>
+                                    <p:animEffect transition="in" filter="box(in)">
+                                      <p:cBhvr>
+                                        <p:cTn id="7" dur="1000"/>
+                                        <p:tgtEl>
+                                          <p:spTgt spid="4"/>
+                                        </p:tgtEl>
+                                      </p:cBhvr>
+                                    </p:animEffect>
+                                  </p:childTnLst>
+                                </p:cTn>
+                              </p:par>
+                            </p:childTnLst>
+                          </p:cTn>
+                        </p:par>
+                      </p:childTnLst>
+                    </p:cTn>
+                  </p:par>
+                  <p:par>
+                    <p:cTn id="8" fill="hold">
+                      <p:stCondLst>
+                        <p:cond delay="indefinite"/>
+                      </p:stCondLst>
+                      <p:childTnLst>
+                        <p:par>
+                          <p:cTn id="9" fill="hold">
+                            <p:stCondLst>
+                              <p:cond delay="0"/>
+                            </p:stCondLst>
+                            <p:childTnLst>
+                              <p:par>
+                                <p:cTn id="10" presetID="2" presetClass="entr" presetSubtype="4" fill="hold" grpId="0" nodeType="clickEffect">
+                                  <p:stCondLst>
+                                    <p:cond delay="0"/>
+                                  </p:stCondLst>
+                                  <p:childTnLst>
+                                    <p:set>
+                                      <p:cBhvr>
+                                        <p:cTn id="11" dur="1" fill="hold">
+                                          <p:stCondLst>
+                                            <p:cond delay="0"/>
+                                          </p:stCondLst>
+                                        </p:cTn>
+                                        <p:tgtEl>
+                                          <p:spTgt spid="5"/>
+                                        </p:tgtEl>
+                                        <p:attrNameLst>
+                                          <p:attrName>style.visibility</p:attrName>
+                                        </p:attrNameLst>
+                                      </p:cBhvr>
+                                      <p:to>
+                                        <p:strVal val="visible"/>
+                                      </p:to>
+                                    </p:set>
+                                    <p:anim calcmode="lin" valueType="num">
+                                      <p:cBhvr additive="base">
+                                        <p:cTn id="12" dur="500" fill="hold"/>
+                                        <p:tgtEl>
+                                          <p:spTgt spid="5"/>
+                                        </p:tgtEl>
+                                        <p:attrNameLst>
+                                          <p:attrName>ppt_x</p:attrName>
+                                        </p:attrNameLst>
+                                      </p:cBhvr>
+                                      <p:tavLst>
+                                        <p:tav tm="0">
+                                          <p:val>
+                                            <p:strVal val="#ppt_x"/>
+                                          </p:val>
+                                        </p:tav>
+                                        <p:tav tm="100000">
+                                          <p:val>
+                                            <p:strVal val="#ppt_x"/>
+                                          </p:val>
+                                        </p:tav>
+                                      </p:tavLst>
+                                    </p:anim>
+                                    <p:anim calcmode="lin" valueType="num">
+                                      <p:cBhvr additive="base">
+                                        <p:cTn id="13" dur="500" fill="hold"/>
+                                        <p:tgtEl>
+                                          <p:spTgt spid="5"/>
+                                        </p:tgtEl>
+                                        <p:attrNameLst>
+                                          <p:attrName>ppt_y</p:attrName>
+                                        </p:attrNameLst>
+                                      </p:cBhvr>
+                                      <p:tavLst>
+                                        <p:tav tm="0">
+                                          <p:val>
+                                            <p:strVal val="1+#ppt_h/2"/>
+                                          </p:val>
+                                        </p:tav>
+                                        <p:tav tm="100000">
+                                          <p:val>
+                                            <p:strVal val="#ppt_y"/>
+                                          </p:val>
+                                        </p:tav>
+                                      </p:tavLst>
+                                    </p:anim>
+                                  </p:childTnLst>
+                                </p:cTn>
+                              </p:par>
+                            </p:childTnLst>
+                          </p:cTn>
+                        </p:par>
+                      </p:childTnLst>
+                    </p:cTn>
+                  </p:par>
+                </p:childTnLst>
+              </p:cTn>
+              <p:prevCondLst>
+                <p:cond evt="onPrev" delay="0">
+                  <p:tgtEl>
+                    <p:sldTgt/>
+                  </p:tgtEl>
+                </p:cond>
+              </p:prevCondLst>
+              <p:nextCondLst>
+                <p:cond evt="onNext" delay="0">
+                  <p:tgtEl>
+                    <p:sldTgt/>
+                  </p:tgtEl>
+                </p:cond>
+              </p:nextCondLst>
+            </p:seq>
+          </p:childTnLst>
+        </p:cTn>
+      </p:par>
+    </p:tnLst>
+    <p:bldLst>
+      <p:bldP spid="5" grpId="0"/>
+      <p:bldP spid="5" grpId="1"/>
+    </p:bldLst>
+  </p:timing>
+</p:sld>
+</file>
+
+<file path=ppt/slides/slide7.xml><?xml version="1.0" encoding="utf-8"?>
 <p:sld xmlns:a="http://schemas.openxmlformats.org/drawingml/2006/main" xmlns:r="http://schemas.openxmlformats.org/officeDocument/2006/relationships" xmlns:p="http://schemas.openxmlformats.org/presentationml/2006/main">
   <p:cSld>
     <p:spTree>
@@ -7014,6 +10548,18 @@
   <p:clrMapOvr>
     <a:masterClrMapping/>
   </p:clrMapOvr>
+  <mc:AlternateContent xmlns:mc="http://schemas.openxmlformats.org/markup-compatibility/2006" xmlns:p159="http://schemas.microsoft.com/office/powerpoint/2015/09/main">
+    <mc:Choice Requires="p159">
+      <p:transition xmlns:p14="http://schemas.microsoft.com/office/powerpoint/2010/main" spd="slow" p14:dur="2000">
+        <p159:morph option="byObject"/>
+      </p:transition>
+    </mc:Choice>
+    <mc:Fallback>
+      <p:transition spd="slow">
+        <p:fade/>
+      </p:transition>
+    </mc:Fallback>
+  </mc:AlternateContent>
   <p:timing>
     <p:tnLst>
       <p:par>
@@ -7167,7 +10713,7 @@
 </p:sld>
 </file>
 
-<file path=ppt/slides/slide6.xml><?xml version="1.0" encoding="utf-8"?>
+<file path=ppt/slides/slide8.xml><?xml version="1.0" encoding="utf-8"?>
 <p:sld xmlns:a="http://schemas.openxmlformats.org/drawingml/2006/main" xmlns:r="http://schemas.openxmlformats.org/officeDocument/2006/relationships" xmlns:p="http://schemas.openxmlformats.org/presentationml/2006/main">
   <p:cSld>
     <p:spTree>
@@ -7185,7 +10731,7 @@
         </p:nvSpPr>
         <p:spPr>
           <a:xfrm>
-            <a:off x="4522470" y="2127250"/>
+            <a:off x="4593590" y="2332990"/>
             <a:ext cx="7669530" cy="2799715"/>
           </a:xfrm>
           <a:prstGeom prst="rect">
@@ -7234,7 +10780,7 @@
         </p:blipFill>
         <p:spPr>
           <a:xfrm>
-            <a:off x="0" y="-142240"/>
+            <a:off x="0" y="-151765"/>
             <a:ext cx="4593590" cy="4200525"/>
           </a:xfrm>
           <a:prstGeom prst="rect">
@@ -7289,6 +10835,18 @@
   <p:clrMapOvr>
     <a:masterClrMapping/>
   </p:clrMapOvr>
+  <mc:AlternateContent xmlns:mc="http://schemas.openxmlformats.org/markup-compatibility/2006" xmlns:p159="http://schemas.microsoft.com/office/powerpoint/2015/09/main">
+    <mc:Choice Requires="p159">
+      <p:transition xmlns:p14="http://schemas.microsoft.com/office/powerpoint/2010/main" spd="slow" p14:dur="2000">
+        <p159:morph option="byObject"/>
+      </p:transition>
+    </mc:Choice>
+    <mc:Fallback>
+      <p:transition spd="slow">
+        <p:fade/>
+      </p:transition>
+    </mc:Fallback>
+  </mc:AlternateContent>
   <p:timing>
     <p:tnLst>
       <p:par>
@@ -7497,20 +11055,9 @@
 </p:sld>
 </file>
 
-<file path=ppt/slides/slide7.xml><?xml version="1.0" encoding="utf-8"?>
+<file path=ppt/slides/slide9.xml><?xml version="1.0" encoding="utf-8"?>
 <p:sld xmlns:a="http://schemas.openxmlformats.org/drawingml/2006/main" xmlns:r="http://schemas.openxmlformats.org/officeDocument/2006/relationships" xmlns:p="http://schemas.openxmlformats.org/presentationml/2006/main">
   <p:cSld>
-    <p:bg>
-      <p:bgPr>
-        <a:blipFill>
-          <a:blip r:embed="rId1"/>
-          <a:stretch>
-            <a:fillRect/>
-          </a:stretch>
-        </a:blipFill>
-        <a:effectLst/>
-      </p:bgPr>
-    </p:bg>
     <p:spTree>
       <p:nvGrpSpPr>
         <p:cNvPr id="1" name=""/>
@@ -7520,12 +11067,16 @@
       <p:grpSpPr/>
       <p:pic>
         <p:nvPicPr>
-          <p:cNvPr id="102" name="图片 101"/>
+          <p:cNvPr id="4" name="图片 3"/>
           <p:cNvPicPr/>
-          <p:nvPr/>
+          <p:nvPr>
+            <p:custDataLst>
+              <p:tags r:id="rId1"/>
+            </p:custDataLst>
+          </p:nvPr>
         </p:nvPicPr>
         <p:blipFill>
-          <a:blip r:embed="rId1"/>
+          <a:blip r:embed="rId2"/>
           <a:srcRect r="3002"/>
           <a:stretch>
             <a:fillRect/>
@@ -7533,8 +11084,8 @@
         </p:blipFill>
         <p:spPr>
           <a:xfrm>
-            <a:off x="2924175" y="528955"/>
-            <a:ext cx="6343650" cy="5800090"/>
+            <a:off x="7405370" y="516255"/>
+            <a:ext cx="4593590" cy="4200525"/>
           </a:xfrm>
           <a:prstGeom prst="rect">
             <a:avLst/>
@@ -7547,14 +11098,14 @@
       </p:pic>
       <p:sp>
         <p:nvSpPr>
-          <p:cNvPr id="2" name="文本框 1"/>
+          <p:cNvPr id="5" name="文本框 4"/>
           <p:cNvSpPr txBox="1"/>
           <p:nvPr/>
         </p:nvSpPr>
         <p:spPr>
           <a:xfrm>
-            <a:off x="8183880" y="4695190"/>
-            <a:ext cx="3908425" cy="1198880"/>
+            <a:off x="1466215" y="3856990"/>
+            <a:ext cx="6096000" cy="1198880"/>
           </a:xfrm>
           <a:prstGeom prst="rect">
             <a:avLst/>
@@ -7562,51 +11113,92 @@
           <a:noFill/>
         </p:spPr>
         <p:txBody>
-          <a:bodyPr wrap="square" rtlCol="0">
+          <a:bodyPr wrap="square" rtlCol="0" anchor="t">
             <a:spAutoFit/>
           </a:bodyPr>
           <a:p>
-            <a:r>
-              <a:rPr lang="en-US" altLang="zh-CN" sz="7200">
+            <a:pPr algn="ctr"/>
+            <a:r>
+              <a:rPr lang="zh-CN" altLang="en-US">
                 <a:latin typeface="楷体" panose="02010609060101010101" charset="-122"/>
                 <a:ea typeface="楷体" panose="02010609060101010101" charset="-122"/>
                 <a:cs typeface="楷体" panose="02010609060101010101" charset="-122"/>
               </a:rPr>
-              <a:t>3.</a:t>
-            </a:r>
-            <a:r>
-              <a:rPr lang="zh-CN" altLang="en-US" sz="7200">
+              <a:t>《上元竹枝词》</a:t>
+            </a:r>
+            <a:endParaRPr lang="zh-CN" altLang="en-US">
+              <a:latin typeface="楷体" panose="02010609060101010101" charset="-122"/>
+              <a:ea typeface="楷体" panose="02010609060101010101" charset="-122"/>
+              <a:cs typeface="楷体" panose="02010609060101010101" charset="-122"/>
+            </a:endParaRPr>
+          </a:p>
+          <a:p>
+            <a:pPr algn="ctr"/>
+            <a:r>
+              <a:rPr lang="zh-CN" altLang="en-US">
                 <a:latin typeface="楷体" panose="02010609060101010101" charset="-122"/>
                 <a:ea typeface="楷体" panose="02010609060101010101" charset="-122"/>
                 <a:cs typeface="楷体" panose="02010609060101010101" charset="-122"/>
               </a:rPr>
-              <a:t>寒食节</a:t>
-            </a:r>
-            <a:endParaRPr lang="zh-CN" altLang="en-US" sz="7200">
+              <a:t>　　清·符曾</a:t>
+            </a:r>
+            <a:endParaRPr lang="zh-CN" altLang="en-US">
               <a:latin typeface="楷体" panose="02010609060101010101" charset="-122"/>
               <a:ea typeface="楷体" panose="02010609060101010101" charset="-122"/>
               <a:cs typeface="楷体" panose="02010609060101010101" charset="-122"/>
             </a:endParaRPr>
           </a:p>
+          <a:p>
+            <a:pPr algn="ctr"/>
+            <a:r>
+              <a:rPr lang="zh-CN" altLang="en-US">
+                <a:latin typeface="楷体" panose="02010609060101010101" charset="-122"/>
+                <a:ea typeface="楷体" panose="02010609060101010101" charset="-122"/>
+                <a:cs typeface="楷体" panose="02010609060101010101" charset="-122"/>
+              </a:rPr>
+              <a:t>　　桂花香馅裹胡桃，江米如珠井水淘。</a:t>
+            </a:r>
+            <a:endParaRPr lang="zh-CN" altLang="en-US">
+              <a:latin typeface="楷体" panose="02010609060101010101" charset="-122"/>
+              <a:ea typeface="楷体" panose="02010609060101010101" charset="-122"/>
+              <a:cs typeface="楷体" panose="02010609060101010101" charset="-122"/>
+            </a:endParaRPr>
+          </a:p>
+          <a:p>
+            <a:pPr algn="ctr"/>
+            <a:r>
+              <a:rPr lang="zh-CN" altLang="en-US">
+                <a:latin typeface="楷体" panose="02010609060101010101" charset="-122"/>
+                <a:ea typeface="楷体" panose="02010609060101010101" charset="-122"/>
+                <a:cs typeface="楷体" panose="02010609060101010101" charset="-122"/>
+              </a:rPr>
+              <a:t>　　见说马家滴粉好，试灯风里卖元宵。</a:t>
+            </a:r>
+            <a:endParaRPr lang="zh-CN" altLang="en-US">
+              <a:latin typeface="楷体" panose="02010609060101010101" charset="-122"/>
+              <a:ea typeface="楷体" panose="02010609060101010101" charset="-122"/>
+              <a:cs typeface="楷体" panose="02010609060101010101" charset="-122"/>
+            </a:endParaRPr>
+          </a:p>
         </p:txBody>
       </p:sp>
     </p:spTree>
     <p:custDataLst>
-      <p:tags r:id="rId2"/>
+      <p:tags r:id="rId3"/>
     </p:custDataLst>
   </p:cSld>
   <p:clrMapOvr>
     <a:masterClrMapping/>
   </p:clrMapOvr>
-  <mc:AlternateContent xmlns:mc="http://schemas.openxmlformats.org/markup-compatibility/2006">
-    <mc:Choice xmlns:p14="http://schemas.microsoft.com/office/powerpoint/2010/main" Requires="p14">
-      <p:transition p14:dur="500">
-        <p:wedge/>
+  <mc:AlternateContent xmlns:mc="http://schemas.openxmlformats.org/markup-compatibility/2006" xmlns:p159="http://schemas.microsoft.com/office/powerpoint/2015/09/main">
+    <mc:Choice Requires="p159">
+      <p:transition xmlns:p14="http://schemas.microsoft.com/office/powerpoint/2010/main" spd="slow" p14:dur="2000">
+        <p159:morph option="byObject"/>
       </p:transition>
     </mc:Choice>
     <mc:Fallback>
-      <p:transition>
-        <p:wedge/>
+      <p:transition spd="slow">
+        <p:fade/>
       </p:transition>
     </mc:Fallback>
   </mc:AlternateContent>
@@ -7631,23 +11223,20 @@
                             </p:stCondLst>
                             <p:childTnLst>
                               <p:par>
-                                <p:cTn id="5" presetID="27" presetClass="entr" presetSubtype="0" fill="hold" grpId="0" nodeType="clickEffect">
+                                <p:cTn id="5" presetID="4" presetClass="entr" presetSubtype="16" fill="hold" nodeType="clickEffect">
                                   <p:stCondLst>
                                     <p:cond delay="0"/>
                                   </p:stCondLst>
-                                  <p:iterate type="lt">
-                                    <p:tmPct val="50000"/>
-                                  </p:iterate>
                                   <p:childTnLst>
                                     <p:set>
                                       <p:cBhvr>
-                                        <p:cTn id="6" dur="1" fill="hold">
+                                        <p:cTn id="6" dur="1000" fill="hold">
                                           <p:stCondLst>
                                             <p:cond delay="0"/>
                                           </p:stCondLst>
                                         </p:cTn>
                                         <p:tgtEl>
-                                          <p:spTgt spid="2"/>
+                                          <p:spTgt spid="4"/>
                                         </p:tgtEl>
                                         <p:attrNameLst>
                                           <p:attrName>style.visibility</p:attrName>
@@ -7657,74 +11246,105 @@
                                         <p:strVal val="visible"/>
                                       </p:to>
                                     </p:set>
-                                    <p:anim calcmode="discrete" valueType="clr">
-                                      <p:cBhvr override="childStyle">
-                                        <p:cTn id="7" dur="80"/>
+                                    <p:animEffect transition="in" filter="box(in)">
+                                      <p:cBhvr>
+                                        <p:cTn id="7" dur="1000"/>
                                         <p:tgtEl>
-                                          <p:spTgt spid="2"/>
+                                          <p:spTgt spid="4"/>
+                                        </p:tgtEl>
+                                      </p:cBhvr>
+                                    </p:animEffect>
+                                  </p:childTnLst>
+                                </p:cTn>
+                              </p:par>
+                            </p:childTnLst>
+                          </p:cTn>
+                        </p:par>
+                      </p:childTnLst>
+                    </p:cTn>
+                  </p:par>
+                  <p:par>
+                    <p:cTn id="8" fill="hold">
+                      <p:stCondLst>
+                        <p:cond delay="indefinite"/>
+                      </p:stCondLst>
+                      <p:childTnLst>
+                        <p:par>
+                          <p:cTn id="9" fill="hold">
+                            <p:stCondLst>
+                              <p:cond delay="0"/>
+                            </p:stCondLst>
+                            <p:childTnLst>
+                              <p:par>
+                                <p:cTn id="10" presetID="2" presetClass="entr" presetSubtype="4" fill="hold" grpId="0" nodeType="clickEffect">
+                                  <p:stCondLst>
+                                    <p:cond delay="0"/>
+                                  </p:stCondLst>
+                                  <p:childTnLst>
+                                    <p:set>
+                                      <p:cBhvr>
+                                        <p:cTn id="11" dur="1" fill="hold">
+                                          <p:stCondLst>
+                                            <p:cond delay="0"/>
+                                          </p:stCondLst>
+                                        </p:cTn>
+                                        <p:tgtEl>
+                                          <p:spTgt spid="5"/>
                                         </p:tgtEl>
                                         <p:attrNameLst>
-                                          <p:attrName>style.color</p:attrName>
+                                          <p:attrName>style.visibility</p:attrName>
+                                        </p:attrNameLst>
+                                      </p:cBhvr>
+                                      <p:to>
+                                        <p:strVal val="visible"/>
+                                      </p:to>
+                                    </p:set>
+                                    <p:anim calcmode="lin" valueType="num">
+                                      <p:cBhvr additive="base">
+                                        <p:cTn id="12" dur="500" fill="hold"/>
+                                        <p:tgtEl>
+                                          <p:spTgt spid="5"/>
+                                        </p:tgtEl>
+                                        <p:attrNameLst>
+                                          <p:attrName>ppt_x</p:attrName>
                                         </p:attrNameLst>
                                       </p:cBhvr>
                                       <p:tavLst>
                                         <p:tav tm="0">
                                           <p:val>
-                                            <p:clrVal>
-                                              <a:schemeClr val="accent2"/>
-                                            </p:clrVal>
+                                            <p:strVal val="#ppt_x"/>
                                           </p:val>
                                         </p:tav>
-                                        <p:tav tm="50000">
+                                        <p:tav tm="100000">
                                           <p:val>
-                                            <p:clrVal>
-                                              <a:schemeClr val="hlink"/>
-                                            </p:clrVal>
+                                            <p:strVal val="#ppt_x"/>
                                           </p:val>
                                         </p:tav>
                                       </p:tavLst>
                                     </p:anim>
-                                    <p:anim calcmode="discrete" valueType="clr">
-                                      <p:cBhvr>
-                                        <p:cTn id="8" dur="80"/>
+                                    <p:anim calcmode="lin" valueType="num">
+                                      <p:cBhvr additive="base">
+                                        <p:cTn id="13" dur="500" fill="hold"/>
                                         <p:tgtEl>
-                                          <p:spTgt spid="2"/>
+                                          <p:spTgt spid="5"/>
                                         </p:tgtEl>
                                         <p:attrNameLst>
-                                          <p:attrName>fillcolor</p:attrName>
+                                          <p:attrName>ppt_y</p:attrName>
                                         </p:attrNameLst>
                                       </p:cBhvr>
                                       <p:tavLst>
                                         <p:tav tm="0">
                                           <p:val>
-                                            <p:clrVal>
-                                              <a:schemeClr val="accent2"/>
-                                            </p:clrVal>
+                                            <p:strVal val="1+#ppt_h/2"/>
                                           </p:val>
                                         </p:tav>
-                                        <p:tav tm="50000">
+                                        <p:tav tm="100000">
                                           <p:val>
-                                            <p:clrVal>
-                                              <a:schemeClr val="hlink"/>
-                                            </p:clrVal>
+                                            <p:strVal val="#ppt_y"/>
                                           </p:val>
                                         </p:tav>
                                       </p:tavLst>
                                     </p:anim>
-                                    <p:set>
-                                      <p:cBhvr>
-                                        <p:cTn id="9" dur="80"/>
-                                        <p:tgtEl>
-                                          <p:spTgt spid="2"/>
-                                        </p:tgtEl>
-                                        <p:attrNameLst>
-                                          <p:attrName>fill.type</p:attrName>
-                                        </p:attrNameLst>
-                                      </p:cBhvr>
-                                      <p:to>
-                                        <p:strVal val="solid"/>
-                                      </p:to>
-                                    </p:set>
                                   </p:childTnLst>
                                 </p:cTn>
                               </p:par>
@@ -7756,700 +11376,8 @@
       </p:par>
     </p:tnLst>
     <p:bldLst>
-      <p:bldP spid="2" grpId="0"/>
-      <p:bldP spid="2" grpId="1"/>
-    </p:bldLst>
-  </p:timing>
-</p:sld>
-</file>
-
-<file path=ppt/slides/slide8.xml><?xml version="1.0" encoding="utf-8"?>
-<p:sld xmlns:a="http://schemas.openxmlformats.org/drawingml/2006/main" xmlns:r="http://schemas.openxmlformats.org/officeDocument/2006/relationships" xmlns:p="http://schemas.openxmlformats.org/presentationml/2006/main">
-  <p:cSld>
-    <p:spTree>
-      <p:nvGrpSpPr>
-        <p:cNvPr id="1" name=""/>
-        <p:cNvGrpSpPr/>
-        <p:nvPr/>
-      </p:nvGrpSpPr>
-      <p:grpSpPr/>
-      <p:pic>
-        <p:nvPicPr>
-          <p:cNvPr id="5" name="图片 4"/>
-          <p:cNvPicPr/>
-          <p:nvPr/>
-        </p:nvPicPr>
-        <p:blipFill>
-          <a:blip r:embed="rId1"/>
-          <a:srcRect r="3002"/>
-          <a:stretch>
-            <a:fillRect/>
-          </a:stretch>
-        </p:blipFill>
-        <p:spPr>
-          <a:xfrm>
-            <a:off x="7598410" y="2657475"/>
-            <a:ext cx="4593590" cy="4200525"/>
-          </a:xfrm>
-          <a:prstGeom prst="rect">
-            <a:avLst/>
-          </a:prstGeom>
-          <a:noFill/>
-          <a:ln w="9525">
-            <a:noFill/>
-          </a:ln>
-        </p:spPr>
-      </p:pic>
-      <p:sp>
-        <p:nvSpPr>
-          <p:cNvPr id="2" name="文本框 1"/>
-          <p:cNvSpPr txBox="1"/>
-          <p:nvPr/>
-        </p:nvSpPr>
-        <p:spPr>
-          <a:xfrm>
-            <a:off x="635" y="0"/>
-            <a:ext cx="9388475" cy="6554470"/>
-          </a:xfrm>
-          <a:prstGeom prst="rect">
-            <a:avLst/>
-          </a:prstGeom>
-          <a:noFill/>
-        </p:spPr>
-        <p:txBody>
-          <a:bodyPr wrap="square" rtlCol="0" anchor="t">
-            <a:spAutoFit/>
-          </a:bodyPr>
-          <a:p>
-            <a:pPr>
-              <a:lnSpc>
-                <a:spcPct val="100000"/>
-              </a:lnSpc>
-            </a:pPr>
-            <a:r>
-              <a:rPr lang="zh-CN" altLang="en-US" sz="2000">
-                <a:latin typeface="楷体" panose="02010609060101010101" charset="-122"/>
-                <a:ea typeface="楷体" panose="02010609060101010101" charset="-122"/>
-                <a:cs typeface="楷体" panose="02010609060101010101" charset="-122"/>
-              </a:rPr>
-              <a:t>相传春秋战国时代，晋献公的妃子骊姬为了让自己的儿子奚齐继位，就设毒计谋害太子申生，申生被逼自杀。申生的弟弟重耳，为了躲避祸害，流亡出走。在流亡期间，重耳受尽了屈辱。原来跟着他一道出奔的臣子，大多陆陆续续地各奔出路去了。只剩下少数几个忠心耿耿的人，一直追随着他。其中一人叫介子推。有一次，重耳饿晕了过去。介子推为了救重耳，从自己腿上割下了一块肉，用火烤熟了就送给重耳吃。十九年后，重耳回国做了君主，就是著名春秋五霸之一晋文公。</a:t>
-            </a:r>
-            <a:endParaRPr lang="zh-CN" altLang="en-US" sz="2000">
-              <a:latin typeface="楷体" panose="02010609060101010101" charset="-122"/>
-              <a:ea typeface="楷体" panose="02010609060101010101" charset="-122"/>
-              <a:cs typeface="楷体" panose="02010609060101010101" charset="-122"/>
-            </a:endParaRPr>
-          </a:p>
-          <a:p>
-            <a:pPr>
-              <a:lnSpc>
-                <a:spcPct val="100000"/>
-              </a:lnSpc>
-            </a:pPr>
-            <a:endParaRPr lang="zh-CN" altLang="en-US" sz="2000">
-              <a:latin typeface="楷体" panose="02010609060101010101" charset="-122"/>
-              <a:ea typeface="楷体" panose="02010609060101010101" charset="-122"/>
-              <a:cs typeface="楷体" panose="02010609060101010101" charset="-122"/>
-            </a:endParaRPr>
-          </a:p>
-          <a:p>
-            <a:pPr>
-              <a:lnSpc>
-                <a:spcPct val="100000"/>
-              </a:lnSpc>
-            </a:pPr>
-            <a:r>
-              <a:rPr lang="zh-CN" altLang="en-US" sz="2000">
-                <a:latin typeface="楷体" panose="02010609060101010101" charset="-122"/>
-                <a:ea typeface="楷体" panose="02010609060101010101" charset="-122"/>
-                <a:cs typeface="楷体" panose="02010609060101010101" charset="-122"/>
-              </a:rPr>
-              <a:t>晋文公执政后，对那些和他同甘共苦的臣子大加封赏，唯独忘了介子推。有人在晋文公面前为介子推叫屈。晋文公猛然忆起旧事，心中有愧，马上差人去请介子推上朝受赏封官。可是，差人去了几趟，介子推不来。晋文公只好亲去请。可是，当晋文公来到介子推家时，只见大门紧闭。介子推不愿见他，已经背着老母躲进了绵山(今山西介休县东南)。晋文公便让他的御林军上绵山搜索，没有找到。于是，有人出了个主意说，不如放火烧山，三面点火，留下一方，大火起时介子推会自己走</a:t>
-            </a:r>
-            <a:endParaRPr lang="zh-CN" altLang="en-US" sz="2000">
-              <a:latin typeface="楷体" panose="02010609060101010101" charset="-122"/>
-              <a:ea typeface="楷体" panose="02010609060101010101" charset="-122"/>
-              <a:cs typeface="楷体" panose="02010609060101010101" charset="-122"/>
-            </a:endParaRPr>
-          </a:p>
-          <a:p>
-            <a:pPr>
-              <a:lnSpc>
-                <a:spcPct val="100000"/>
-              </a:lnSpc>
-            </a:pPr>
-            <a:r>
-              <a:rPr lang="zh-CN" altLang="en-US" sz="2000">
-                <a:latin typeface="楷体" panose="02010609060101010101" charset="-122"/>
-                <a:ea typeface="楷体" panose="02010609060101010101" charset="-122"/>
-                <a:cs typeface="楷体" panose="02010609060101010101" charset="-122"/>
-              </a:rPr>
-              <a:t>出来的。晋文公乃下令举火烧山，孰料大火烧了三天三夜，大火熄灭后，终究不</a:t>
-            </a:r>
-            <a:endParaRPr lang="zh-CN" altLang="en-US" sz="2000">
-              <a:latin typeface="楷体" panose="02010609060101010101" charset="-122"/>
-              <a:ea typeface="楷体" panose="02010609060101010101" charset="-122"/>
-              <a:cs typeface="楷体" panose="02010609060101010101" charset="-122"/>
-            </a:endParaRPr>
-          </a:p>
-          <a:p>
-            <a:pPr>
-              <a:lnSpc>
-                <a:spcPct val="100000"/>
-              </a:lnSpc>
-            </a:pPr>
-            <a:r>
-              <a:rPr lang="zh-CN" altLang="en-US" sz="2000">
-                <a:latin typeface="楷体" panose="02010609060101010101" charset="-122"/>
-                <a:ea typeface="楷体" panose="02010609060101010101" charset="-122"/>
-                <a:cs typeface="楷体" panose="02010609060101010101" charset="-122"/>
-              </a:rPr>
-              <a:t>见介子推出来。上山一看，介子推母子俩抱着一棵烧焦的大柳树已经死了。晋</a:t>
-            </a:r>
-            <a:endParaRPr lang="zh-CN" altLang="en-US" sz="2000">
-              <a:latin typeface="楷体" panose="02010609060101010101" charset="-122"/>
-              <a:ea typeface="楷体" panose="02010609060101010101" charset="-122"/>
-              <a:cs typeface="楷体" panose="02010609060101010101" charset="-122"/>
-            </a:endParaRPr>
-          </a:p>
-          <a:p>
-            <a:pPr>
-              <a:lnSpc>
-                <a:spcPct val="100000"/>
-              </a:lnSpc>
-            </a:pPr>
-            <a:r>
-              <a:rPr lang="zh-CN" altLang="en-US" sz="2000">
-                <a:latin typeface="楷体" panose="02010609060101010101" charset="-122"/>
-                <a:ea typeface="楷体" panose="02010609060101010101" charset="-122"/>
-                <a:cs typeface="楷体" panose="02010609060101010101" charset="-122"/>
-              </a:rPr>
-              <a:t>文公望着介子推的尸体哭拜一阵，然后安葬遗体。</a:t>
-            </a:r>
-            <a:endParaRPr lang="zh-CN" altLang="en-US" sz="2000">
-              <a:latin typeface="楷体" panose="02010609060101010101" charset="-122"/>
-              <a:ea typeface="楷体" panose="02010609060101010101" charset="-122"/>
-              <a:cs typeface="楷体" panose="02010609060101010101" charset="-122"/>
-            </a:endParaRPr>
-          </a:p>
-          <a:p>
-            <a:pPr>
-              <a:lnSpc>
-                <a:spcPct val="100000"/>
-              </a:lnSpc>
-            </a:pPr>
-            <a:endParaRPr lang="zh-CN" altLang="en-US" sz="2000">
-              <a:latin typeface="楷体" panose="02010609060101010101" charset="-122"/>
-              <a:ea typeface="楷体" panose="02010609060101010101" charset="-122"/>
-              <a:cs typeface="楷体" panose="02010609060101010101" charset="-122"/>
-            </a:endParaRPr>
-          </a:p>
-          <a:p>
-            <a:pPr>
-              <a:lnSpc>
-                <a:spcPct val="100000"/>
-              </a:lnSpc>
-            </a:pPr>
-            <a:r>
-              <a:rPr lang="zh-CN" altLang="en-US" sz="2000">
-                <a:latin typeface="楷体" panose="02010609060101010101" charset="-122"/>
-                <a:ea typeface="楷体" panose="02010609060101010101" charset="-122"/>
-                <a:cs typeface="楷体" panose="02010609060101010101" charset="-122"/>
-              </a:rPr>
-              <a:t>为了纪念介子推，晋文公下令把绵山改为“介山”，在山上建立祠堂，并把放火</a:t>
-            </a:r>
-            <a:endParaRPr lang="zh-CN" altLang="en-US" sz="2000">
-              <a:latin typeface="楷体" panose="02010609060101010101" charset="-122"/>
-              <a:ea typeface="楷体" panose="02010609060101010101" charset="-122"/>
-              <a:cs typeface="楷体" panose="02010609060101010101" charset="-122"/>
-            </a:endParaRPr>
-          </a:p>
-          <a:p>
-            <a:pPr>
-              <a:lnSpc>
-                <a:spcPct val="100000"/>
-              </a:lnSpc>
-            </a:pPr>
-            <a:r>
-              <a:rPr lang="zh-CN" altLang="en-US" sz="2000">
-                <a:latin typeface="楷体" panose="02010609060101010101" charset="-122"/>
-                <a:ea typeface="楷体" panose="02010609060101010101" charset="-122"/>
-                <a:cs typeface="楷体" panose="02010609060101010101" charset="-122"/>
-              </a:rPr>
-              <a:t>烧山的这一天定为寒食节，晓谕全国，每年这天禁忌烟火，只吃寒食。 走时，他伐了一段烧焦的柳木，到宫中做了双木屐，每天望着它叹道：“悲哉足下。”“足下”是古人下级对上级或同辈之间相互尊敬的称呼，据说就是来源于此。</a:t>
-            </a:r>
-            <a:endParaRPr lang="zh-CN" altLang="en-US" sz="2000">
-              <a:latin typeface="楷体" panose="02010609060101010101" charset="-122"/>
-              <a:ea typeface="楷体" panose="02010609060101010101" charset="-122"/>
-              <a:cs typeface="楷体" panose="02010609060101010101" charset="-122"/>
-            </a:endParaRPr>
-          </a:p>
-        </p:txBody>
-      </p:sp>
-      <p:sp>
-        <p:nvSpPr>
-          <p:cNvPr id="7" name="文本框 6"/>
-          <p:cNvSpPr txBox="1"/>
-          <p:nvPr/>
-        </p:nvSpPr>
-        <p:spPr>
-          <a:xfrm>
-            <a:off x="9958070" y="958850"/>
-            <a:ext cx="1810385" cy="645160"/>
-          </a:xfrm>
-          <a:prstGeom prst="rect">
-            <a:avLst/>
-          </a:prstGeom>
-          <a:noFill/>
-        </p:spPr>
-        <p:txBody>
-          <a:bodyPr wrap="square" rtlCol="0">
-            <a:spAutoFit/>
-          </a:bodyPr>
-          <a:p>
-            <a:r>
-              <a:rPr lang="zh-CN" altLang="en-US" sz="3600">
-                <a:latin typeface="楷体" panose="02010609060101010101" charset="-122"/>
-                <a:ea typeface="楷体" panose="02010609060101010101" charset="-122"/>
-              </a:rPr>
-              <a:t>寒食</a:t>
-            </a:r>
-            <a:r>
-              <a:rPr lang="zh-CN" altLang="en-US" sz="3600">
-                <a:latin typeface="楷体" panose="02010609060101010101" charset="-122"/>
-                <a:ea typeface="楷体" panose="02010609060101010101" charset="-122"/>
-              </a:rPr>
-              <a:t>节</a:t>
-            </a:r>
-            <a:endParaRPr lang="zh-CN" altLang="en-US" sz="3600">
-              <a:latin typeface="楷体" panose="02010609060101010101" charset="-122"/>
-              <a:ea typeface="楷体" panose="02010609060101010101" charset="-122"/>
-            </a:endParaRPr>
-          </a:p>
-        </p:txBody>
-      </p:sp>
-    </p:spTree>
-    <p:custDataLst>
-      <p:tags r:id="rId2"/>
-    </p:custDataLst>
-  </p:cSld>
-  <p:clrMapOvr>
-    <a:masterClrMapping/>
-  </p:clrMapOvr>
-  <p:timing>
-    <p:tnLst>
-      <p:par>
-        <p:cTn id="1" dur="indefinite" restart="never" nodeType="tmRoot">
-          <p:childTnLst>
-            <p:seq concurrent="1" nextAc="seek">
-              <p:cTn id="2" dur="indefinite" nodeType="mainSeq">
-                <p:childTnLst>
-                  <p:par>
-                    <p:cTn id="3" fill="hold">
-                      <p:stCondLst>
-                        <p:cond delay="indefinite"/>
-                      </p:stCondLst>
-                      <p:childTnLst>
-                        <p:par>
-                          <p:cTn id="4" fill="hold">
-                            <p:stCondLst>
-                              <p:cond delay="0"/>
-                            </p:stCondLst>
-                            <p:childTnLst>
-                              <p:par>
-                                <p:cTn id="5" presetID="27" presetClass="entr" presetSubtype="0" fill="hold" grpId="0" nodeType="clickEffect">
-                                  <p:stCondLst>
-                                    <p:cond delay="0"/>
-                                  </p:stCondLst>
-                                  <p:iterate type="lt">
-                                    <p:tmPct val="50000"/>
-                                  </p:iterate>
-                                  <p:childTnLst>
-                                    <p:set>
-                                      <p:cBhvr>
-                                        <p:cTn id="6" dur="1" fill="hold">
-                                          <p:stCondLst>
-                                            <p:cond delay="0"/>
-                                          </p:stCondLst>
-                                        </p:cTn>
-                                        <p:tgtEl>
-                                          <p:spTgt spid="7"/>
-                                        </p:tgtEl>
-                                        <p:attrNameLst>
-                                          <p:attrName>style.visibility</p:attrName>
-                                        </p:attrNameLst>
-                                      </p:cBhvr>
-                                      <p:to>
-                                        <p:strVal val="visible"/>
-                                      </p:to>
-                                    </p:set>
-                                    <p:anim calcmode="discrete" valueType="clr">
-                                      <p:cBhvr override="childStyle">
-                                        <p:cTn id="7" dur="80"/>
-                                        <p:tgtEl>
-                                          <p:spTgt spid="7"/>
-                                        </p:tgtEl>
-                                        <p:attrNameLst>
-                                          <p:attrName>style.color</p:attrName>
-                                        </p:attrNameLst>
-                                      </p:cBhvr>
-                                      <p:tavLst>
-                                        <p:tav tm="0">
-                                          <p:val>
-                                            <p:clrVal>
-                                              <a:schemeClr val="accent2"/>
-                                            </p:clrVal>
-                                          </p:val>
-                                        </p:tav>
-                                        <p:tav tm="50000">
-                                          <p:val>
-                                            <p:clrVal>
-                                              <a:schemeClr val="hlink"/>
-                                            </p:clrVal>
-                                          </p:val>
-                                        </p:tav>
-                                      </p:tavLst>
-                                    </p:anim>
-                                    <p:anim calcmode="discrete" valueType="clr">
-                                      <p:cBhvr>
-                                        <p:cTn id="8" dur="80"/>
-                                        <p:tgtEl>
-                                          <p:spTgt spid="7"/>
-                                        </p:tgtEl>
-                                        <p:attrNameLst>
-                                          <p:attrName>fillcolor</p:attrName>
-                                        </p:attrNameLst>
-                                      </p:cBhvr>
-                                      <p:tavLst>
-                                        <p:tav tm="0">
-                                          <p:val>
-                                            <p:clrVal>
-                                              <a:schemeClr val="accent2"/>
-                                            </p:clrVal>
-                                          </p:val>
-                                        </p:tav>
-                                        <p:tav tm="50000">
-                                          <p:val>
-                                            <p:clrVal>
-                                              <a:schemeClr val="hlink"/>
-                                            </p:clrVal>
-                                          </p:val>
-                                        </p:tav>
-                                      </p:tavLst>
-                                    </p:anim>
-                                    <p:set>
-                                      <p:cBhvr>
-                                        <p:cTn id="9" dur="80"/>
-                                        <p:tgtEl>
-                                          <p:spTgt spid="7"/>
-                                        </p:tgtEl>
-                                        <p:attrNameLst>
-                                          <p:attrName>fill.type</p:attrName>
-                                        </p:attrNameLst>
-                                      </p:cBhvr>
-                                      <p:to>
-                                        <p:strVal val="solid"/>
-                                      </p:to>
-                                    </p:set>
-                                  </p:childTnLst>
-                                </p:cTn>
-                              </p:par>
-                            </p:childTnLst>
-                          </p:cTn>
-                        </p:par>
-                      </p:childTnLst>
-                    </p:cTn>
-                  </p:par>
-                </p:childTnLst>
-              </p:cTn>
-              <p:prevCondLst>
-                <p:cond evt="onPrev" delay="0">
-                  <p:tgtEl>
-                    <p:sldTgt/>
-                  </p:tgtEl>
-                </p:cond>
-              </p:prevCondLst>
-              <p:nextCondLst>
-                <p:cond evt="onNext" delay="0">
-                  <p:tgtEl>
-                    <p:sldTgt/>
-                  </p:tgtEl>
-                </p:cond>
-              </p:nextCondLst>
-            </p:seq>
-          </p:childTnLst>
-        </p:cTn>
-      </p:par>
-    </p:tnLst>
-    <p:bldLst>
-      <p:bldP spid="7" grpId="0"/>
-      <p:bldP spid="7" grpId="1"/>
-    </p:bldLst>
-  </p:timing>
-</p:sld>
-</file>
-
-<file path=ppt/slides/slide9.xml><?xml version="1.0" encoding="utf-8"?>
-<p:sld xmlns:a="http://schemas.openxmlformats.org/drawingml/2006/main" xmlns:r="http://schemas.openxmlformats.org/officeDocument/2006/relationships" xmlns:p="http://schemas.openxmlformats.org/presentationml/2006/main">
-  <p:cSld>
-    <p:bg>
-      <p:bgPr>
-        <a:blipFill>
-          <a:blip r:embed="rId1"/>
-          <a:stretch>
-            <a:fillRect/>
-          </a:stretch>
-        </a:blipFill>
-        <a:effectLst/>
-      </p:bgPr>
-    </p:bg>
-    <p:spTree>
-      <p:nvGrpSpPr>
-        <p:cNvPr id="1" name=""/>
-        <p:cNvGrpSpPr/>
-        <p:nvPr/>
-      </p:nvGrpSpPr>
-      <p:grpSpPr/>
-      <p:pic>
-        <p:nvPicPr>
-          <p:cNvPr id="102" name="图片 101"/>
-          <p:cNvPicPr/>
-          <p:nvPr/>
-        </p:nvPicPr>
-        <p:blipFill>
-          <a:blip r:embed="rId1"/>
-          <a:srcRect r="3002"/>
-          <a:stretch>
-            <a:fillRect/>
-          </a:stretch>
-        </p:blipFill>
-        <p:spPr>
-          <a:xfrm>
-            <a:off x="2924175" y="528955"/>
-            <a:ext cx="6343650" cy="5800090"/>
-          </a:xfrm>
-          <a:prstGeom prst="rect">
-            <a:avLst/>
-          </a:prstGeom>
-          <a:noFill/>
-          <a:ln w="9525">
-            <a:noFill/>
-          </a:ln>
-        </p:spPr>
-      </p:pic>
-      <p:sp>
-        <p:nvSpPr>
-          <p:cNvPr id="2" name="文本框 1"/>
-          <p:cNvSpPr txBox="1"/>
-          <p:nvPr/>
-        </p:nvSpPr>
-        <p:spPr>
-          <a:xfrm>
-            <a:off x="8183880" y="4695190"/>
-            <a:ext cx="3908425" cy="1198880"/>
-          </a:xfrm>
-          <a:prstGeom prst="rect">
-            <a:avLst/>
-          </a:prstGeom>
-          <a:noFill/>
-        </p:spPr>
-        <p:txBody>
-          <a:bodyPr wrap="square" rtlCol="0">
-            <a:spAutoFit/>
-          </a:bodyPr>
-          <a:p>
-            <a:r>
-              <a:rPr lang="en-US" altLang="zh-CN" sz="7200">
-                <a:latin typeface="楷体" panose="02010609060101010101" charset="-122"/>
-                <a:ea typeface="楷体" panose="02010609060101010101" charset="-122"/>
-                <a:cs typeface="楷体" panose="02010609060101010101" charset="-122"/>
-              </a:rPr>
-              <a:t>4.</a:t>
-            </a:r>
-            <a:r>
-              <a:rPr lang="zh-CN" altLang="en-US" sz="7200">
-                <a:latin typeface="楷体" panose="02010609060101010101" charset="-122"/>
-                <a:ea typeface="楷体" panose="02010609060101010101" charset="-122"/>
-                <a:cs typeface="楷体" panose="02010609060101010101" charset="-122"/>
-              </a:rPr>
-              <a:t>清明节</a:t>
-            </a:r>
-            <a:endParaRPr lang="zh-CN" altLang="en-US" sz="7200">
-              <a:latin typeface="楷体" panose="02010609060101010101" charset="-122"/>
-              <a:ea typeface="楷体" panose="02010609060101010101" charset="-122"/>
-              <a:cs typeface="楷体" panose="02010609060101010101" charset="-122"/>
-            </a:endParaRPr>
-          </a:p>
-        </p:txBody>
-      </p:sp>
-    </p:spTree>
-    <p:custDataLst>
-      <p:tags r:id="rId2"/>
-    </p:custDataLst>
-  </p:cSld>
-  <p:clrMapOvr>
-    <a:masterClrMapping/>
-  </p:clrMapOvr>
-  <mc:AlternateContent xmlns:mc="http://schemas.openxmlformats.org/markup-compatibility/2006">
-    <mc:Choice xmlns:p14="http://schemas.microsoft.com/office/powerpoint/2010/main" Requires="p14">
-      <p:transition p14:dur="500">
-        <p:wedge/>
-      </p:transition>
-    </mc:Choice>
-    <mc:Fallback>
-      <p:transition>
-        <p:wedge/>
-      </p:transition>
-    </mc:Fallback>
-  </mc:AlternateContent>
-  <p:timing>
-    <p:tnLst>
-      <p:par>
-        <p:cTn id="1" dur="indefinite" restart="never" nodeType="tmRoot">
-          <p:childTnLst>
-            <p:seq concurrent="1" nextAc="seek">
-              <p:cTn id="2" dur="indefinite" nodeType="mainSeq">
-                <p:childTnLst>
-                  <p:par>
-                    <p:cTn id="3" fill="hold">
-                      <p:stCondLst>
-                        <p:cond delay="indefinite"/>
-                      </p:stCondLst>
-                      <p:childTnLst>
-                        <p:par>
-                          <p:cTn id="4" fill="hold">
-                            <p:stCondLst>
-                              <p:cond delay="0"/>
-                            </p:stCondLst>
-                            <p:childTnLst>
-                              <p:par>
-                                <p:cTn id="5" presetID="27" presetClass="entr" presetSubtype="0" fill="hold" grpId="0" nodeType="clickEffect">
-                                  <p:stCondLst>
-                                    <p:cond delay="0"/>
-                                  </p:stCondLst>
-                                  <p:iterate type="lt">
-                                    <p:tmPct val="50000"/>
-                                  </p:iterate>
-                                  <p:childTnLst>
-                                    <p:set>
-                                      <p:cBhvr>
-                                        <p:cTn id="6" dur="1" fill="hold">
-                                          <p:stCondLst>
-                                            <p:cond delay="0"/>
-                                          </p:stCondLst>
-                                        </p:cTn>
-                                        <p:tgtEl>
-                                          <p:spTgt spid="2"/>
-                                        </p:tgtEl>
-                                        <p:attrNameLst>
-                                          <p:attrName>style.visibility</p:attrName>
-                                        </p:attrNameLst>
-                                      </p:cBhvr>
-                                      <p:to>
-                                        <p:strVal val="visible"/>
-                                      </p:to>
-                                    </p:set>
-                                    <p:anim calcmode="discrete" valueType="clr">
-                                      <p:cBhvr override="childStyle">
-                                        <p:cTn id="7" dur="80"/>
-                                        <p:tgtEl>
-                                          <p:spTgt spid="2"/>
-                                        </p:tgtEl>
-                                        <p:attrNameLst>
-                                          <p:attrName>style.color</p:attrName>
-                                        </p:attrNameLst>
-                                      </p:cBhvr>
-                                      <p:tavLst>
-                                        <p:tav tm="0">
-                                          <p:val>
-                                            <p:clrVal>
-                                              <a:schemeClr val="accent2"/>
-                                            </p:clrVal>
-                                          </p:val>
-                                        </p:tav>
-                                        <p:tav tm="50000">
-                                          <p:val>
-                                            <p:clrVal>
-                                              <a:schemeClr val="hlink"/>
-                                            </p:clrVal>
-                                          </p:val>
-                                        </p:tav>
-                                      </p:tavLst>
-                                    </p:anim>
-                                    <p:anim calcmode="discrete" valueType="clr">
-                                      <p:cBhvr>
-                                        <p:cTn id="8" dur="80"/>
-                                        <p:tgtEl>
-                                          <p:spTgt spid="2"/>
-                                        </p:tgtEl>
-                                        <p:attrNameLst>
-                                          <p:attrName>fillcolor</p:attrName>
-                                        </p:attrNameLst>
-                                      </p:cBhvr>
-                                      <p:tavLst>
-                                        <p:tav tm="0">
-                                          <p:val>
-                                            <p:clrVal>
-                                              <a:schemeClr val="accent2"/>
-                                            </p:clrVal>
-                                          </p:val>
-                                        </p:tav>
-                                        <p:tav tm="50000">
-                                          <p:val>
-                                            <p:clrVal>
-                                              <a:schemeClr val="hlink"/>
-                                            </p:clrVal>
-                                          </p:val>
-                                        </p:tav>
-                                      </p:tavLst>
-                                    </p:anim>
-                                    <p:set>
-                                      <p:cBhvr>
-                                        <p:cTn id="9" dur="80"/>
-                                        <p:tgtEl>
-                                          <p:spTgt spid="2"/>
-                                        </p:tgtEl>
-                                        <p:attrNameLst>
-                                          <p:attrName>fill.type</p:attrName>
-                                        </p:attrNameLst>
-                                      </p:cBhvr>
-                                      <p:to>
-                                        <p:strVal val="solid"/>
-                                      </p:to>
-                                    </p:set>
-                                  </p:childTnLst>
-                                </p:cTn>
-                              </p:par>
-                            </p:childTnLst>
-                          </p:cTn>
-                        </p:par>
-                      </p:childTnLst>
-                    </p:cTn>
-                  </p:par>
-                </p:childTnLst>
-              </p:cTn>
-              <p:prevCondLst>
-                <p:cond evt="onPrev" delay="0">
-                  <p:tgtEl>
-                    <p:sldTgt/>
-                  </p:tgtEl>
-                </p:cond>
-              </p:prevCondLst>
-              <p:nextCondLst>
-                <p:cond evt="onNext" delay="0">
-                  <p:tgtEl>
-                    <p:sldTgt/>
-                  </p:tgtEl>
-                </p:cond>
-              </p:nextCondLst>
-            </p:seq>
-          </p:childTnLst>
-        </p:cTn>
-      </p:par>
-    </p:tnLst>
-    <p:bldLst>
-      <p:bldP spid="2" grpId="0"/>
-      <p:bldP spid="2" grpId="1"/>
+      <p:bldP spid="5" grpId="0"/>
+      <p:bldP spid="5" grpId="1"/>
     </p:bldLst>
   </p:timing>
 </p:sld>
@@ -8478,6 +11406,12 @@
   <p:tag name="KSO_WM_UNIT_LAYERLEVEL" val="1"/>
   <p:tag name="KSO_WM_TAG_VERSION" val="1.0"/>
   <p:tag name="KSO_WM_BEAUTIFY_FLAG" val="#wm#"/>
+</p:tagLst>
+</file>
+
+<file path=ppt/tags/tag100.xml><?xml version="1.0" encoding="utf-8"?>
+<p:tagLst xmlns:p="http://schemas.openxmlformats.org/presentationml/2006/main">
+  <p:tag name="COMMONDATA" val="eyJoZGlkIjoiMGMwNTBhNDc5YjliYTczMmQ3ZmIxNmQ5ZjY3NDczNDQifQ=="/>
 </p:tagLst>
 </file>
 
@@ -9305,9 +12239,7 @@
 
 <file path=ppt/tags/tag69.xml><?xml version="1.0" encoding="utf-8"?>
 <p:tagLst xmlns:p="http://schemas.openxmlformats.org/presentationml/2006/main">
-  <p:tag name="KSO_WM_BEAUTIFY_FLAG" val="#wm#"/>
-  <p:tag name="KSO_WM_TEMPLATE_CATEGORY" val="custom"/>
-  <p:tag name="KSO_WM_TEMPLATE_INDEX" val="20205081"/>
+  <p:tag name="KSO_WM_UNIT_PLACING_PICTURE_USER_VIEWPORT" val="{&quot;height&quot;:6615,&quot;width&quot;:7234}"/>
 </p:tagLst>
 </file>
 
@@ -9350,9 +12282,7 @@
 
 <file path=ppt/tags/tag73.xml><?xml version="1.0" encoding="utf-8"?>
 <p:tagLst xmlns:p="http://schemas.openxmlformats.org/presentationml/2006/main">
-  <p:tag name="KSO_WM_BEAUTIFY_FLAG" val="#wm#"/>
-  <p:tag name="KSO_WM_TEMPLATE_CATEGORY" val="custom"/>
-  <p:tag name="KSO_WM_TEMPLATE_INDEX" val="20205081"/>
+  <p:tag name="KSO_WM_UNIT_PLACING_PICTURE_USER_VIEWPORT" val="{&quot;height&quot;:6615,&quot;width&quot;:7234}"/>
 </p:tagLst>
 </file>
 
@@ -9382,9 +12312,7 @@
 
 <file path=ppt/tags/tag77.xml><?xml version="1.0" encoding="utf-8"?>
 <p:tagLst xmlns:p="http://schemas.openxmlformats.org/presentationml/2006/main">
-  <p:tag name="KSO_WM_BEAUTIFY_FLAG" val="#wm#"/>
-  <p:tag name="KSO_WM_TEMPLATE_CATEGORY" val="custom"/>
-  <p:tag name="KSO_WM_TEMPLATE_INDEX" val="20205081"/>
+  <p:tag name="KSO_WM_UNIT_PLACING_PICTURE_USER_VIEWPORT" val="{&quot;height&quot;:6615,&quot;width&quot;:7234}"/>
 </p:tagLst>
 </file>
 
@@ -9427,9 +12355,7 @@
 
 <file path=ppt/tags/tag81.xml><?xml version="1.0" encoding="utf-8"?>
 <p:tagLst xmlns:p="http://schemas.openxmlformats.org/presentationml/2006/main">
-  <p:tag name="KSO_WM_BEAUTIFY_FLAG" val="#wm#"/>
-  <p:tag name="KSO_WM_TEMPLATE_CATEGORY" val="custom"/>
-  <p:tag name="KSO_WM_TEMPLATE_INDEX" val="20205081"/>
+  <p:tag name="KSO_WM_UNIT_PLACING_PICTURE_USER_VIEWPORT" val="{&quot;height&quot;:6615,&quot;width&quot;:7234}"/>
 </p:tagLst>
 </file>
 
@@ -9438,6 +12364,58 @@
   <p:tag name="KSO_WM_BEAUTIFY_FLAG" val="#wm#"/>
   <p:tag name="KSO_WM_TEMPLATE_CATEGORY" val="custom"/>
   <p:tag name="KSO_WM_TEMPLATE_INDEX" val="20205081"/>
+</p:tagLst>
+</file>
+
+<file path=ppt/tags/tag83.xml><?xml version="1.0" encoding="utf-8"?>
+<p:tagLst xmlns:p="http://schemas.openxmlformats.org/presentationml/2006/main">
+  <p:tag name="KSO_WM_BEAUTIFY_FLAG" val="#wm#"/>
+  <p:tag name="KSO_WM_TEMPLATE_CATEGORY" val="custom"/>
+  <p:tag name="KSO_WM_TEMPLATE_INDEX" val="20205081"/>
+</p:tagLst>
+</file>
+
+<file path=ppt/tags/tag84.xml><?xml version="1.0" encoding="utf-8"?>
+<p:tagLst xmlns:p="http://schemas.openxmlformats.org/presentationml/2006/main">
+  <p:tag name="KSO_WM_BEAUTIFY_FLAG" val="#wm#"/>
+  <p:tag name="KSO_WM_TEMPLATE_CATEGORY" val="custom"/>
+  <p:tag name="KSO_WM_TEMPLATE_INDEX" val="20205081"/>
+</p:tagLst>
+</file>
+
+<file path=ppt/tags/tag85.xml><?xml version="1.0" encoding="utf-8"?>
+<p:tagLst xmlns:p="http://schemas.openxmlformats.org/presentationml/2006/main">
+  <p:tag name="KSO_WM_UNIT_PLACING_PICTURE_USER_VIEWPORT" val="{&quot;height&quot;:6615,&quot;width&quot;:7234}"/>
+</p:tagLst>
+</file>
+
+<file path=ppt/tags/tag86.xml><?xml version="1.0" encoding="utf-8"?>
+<p:tagLst xmlns:p="http://schemas.openxmlformats.org/presentationml/2006/main">
+  <p:tag name="KSO_WM_BEAUTIFY_FLAG" val="#wm#"/>
+  <p:tag name="KSO_WM_TEMPLATE_CATEGORY" val="custom"/>
+  <p:tag name="KSO_WM_TEMPLATE_INDEX" val="20205081"/>
+</p:tagLst>
+</file>
+
+<file path=ppt/tags/tag87.xml><?xml version="1.0" encoding="utf-8"?>
+<p:tagLst xmlns:p="http://schemas.openxmlformats.org/presentationml/2006/main">
+  <p:tag name="KSO_WM_BEAUTIFY_FLAG" val="#wm#"/>
+  <p:tag name="KSO_WM_TEMPLATE_CATEGORY" val="custom"/>
+  <p:tag name="KSO_WM_TEMPLATE_INDEX" val="20205081"/>
+</p:tagLst>
+</file>
+
+<file path=ppt/tags/tag88.xml><?xml version="1.0" encoding="utf-8"?>
+<p:tagLst xmlns:p="http://schemas.openxmlformats.org/presentationml/2006/main">
+  <p:tag name="KSO_WM_BEAUTIFY_FLAG" val="#wm#"/>
+  <p:tag name="KSO_WM_TEMPLATE_CATEGORY" val="custom"/>
+  <p:tag name="KSO_WM_TEMPLATE_INDEX" val="20205081"/>
+</p:tagLst>
+</file>
+
+<file path=ppt/tags/tag89.xml><?xml version="1.0" encoding="utf-8"?>
+<p:tagLst xmlns:p="http://schemas.openxmlformats.org/presentationml/2006/main">
+  <p:tag name="KSO_WM_UNIT_PLACING_PICTURE_USER_VIEWPORT" val="{&quot;height&quot;:6615,&quot;width&quot;:7234}"/>
 </p:tagLst>
 </file>
 
@@ -9451,6 +12429,82 @@
   <p:tag name="KSO_WM_UNIT_LAYERLEVEL" val="1"/>
   <p:tag name="KSO_WM_TAG_VERSION" val="1.0"/>
   <p:tag name="KSO_WM_BEAUTIFY_FLAG" val="#wm#"/>
+</p:tagLst>
+</file>
+
+<file path=ppt/tags/tag90.xml><?xml version="1.0" encoding="utf-8"?>
+<p:tagLst xmlns:p="http://schemas.openxmlformats.org/presentationml/2006/main">
+  <p:tag name="KSO_WM_BEAUTIFY_FLAG" val="#wm#"/>
+  <p:tag name="KSO_WM_TEMPLATE_CATEGORY" val="custom"/>
+  <p:tag name="KSO_WM_TEMPLATE_INDEX" val="20205081"/>
+</p:tagLst>
+</file>
+
+<file path=ppt/tags/tag91.xml><?xml version="1.0" encoding="utf-8"?>
+<p:tagLst xmlns:p="http://schemas.openxmlformats.org/presentationml/2006/main">
+  <p:tag name="KSO_WM_BEAUTIFY_FLAG" val="#wm#"/>
+  <p:tag name="KSO_WM_TEMPLATE_CATEGORY" val="custom"/>
+  <p:tag name="KSO_WM_TEMPLATE_INDEX" val="20205081"/>
+</p:tagLst>
+</file>
+
+<file path=ppt/tags/tag92.xml><?xml version="1.0" encoding="utf-8"?>
+<p:tagLst xmlns:p="http://schemas.openxmlformats.org/presentationml/2006/main">
+  <p:tag name="KSO_WM_BEAUTIFY_FLAG" val="#wm#"/>
+  <p:tag name="KSO_WM_TEMPLATE_CATEGORY" val="custom"/>
+  <p:tag name="KSO_WM_TEMPLATE_INDEX" val="20205081"/>
+</p:tagLst>
+</file>
+
+<file path=ppt/tags/tag93.xml><?xml version="1.0" encoding="utf-8"?>
+<p:tagLst xmlns:p="http://schemas.openxmlformats.org/presentationml/2006/main">
+  <p:tag name="KSO_WM_UNIT_PLACING_PICTURE_USER_VIEWPORT" val="{&quot;height&quot;:6615,&quot;width&quot;:7234}"/>
+</p:tagLst>
+</file>
+
+<file path=ppt/tags/tag94.xml><?xml version="1.0" encoding="utf-8"?>
+<p:tagLst xmlns:p="http://schemas.openxmlformats.org/presentationml/2006/main">
+  <p:tag name="KSO_WM_BEAUTIFY_FLAG" val="#wm#"/>
+  <p:tag name="KSO_WM_TEMPLATE_CATEGORY" val="custom"/>
+  <p:tag name="KSO_WM_TEMPLATE_INDEX" val="20205081"/>
+</p:tagLst>
+</file>
+
+<file path=ppt/tags/tag95.xml><?xml version="1.0" encoding="utf-8"?>
+<p:tagLst xmlns:p="http://schemas.openxmlformats.org/presentationml/2006/main">
+  <p:tag name="KSO_WM_BEAUTIFY_FLAG" val="#wm#"/>
+  <p:tag name="KSO_WM_TEMPLATE_CATEGORY" val="custom"/>
+  <p:tag name="KSO_WM_TEMPLATE_INDEX" val="20205081"/>
+</p:tagLst>
+</file>
+
+<file path=ppt/tags/tag96.xml><?xml version="1.0" encoding="utf-8"?>
+<p:tagLst xmlns:p="http://schemas.openxmlformats.org/presentationml/2006/main">
+  <p:tag name="KSO_WM_BEAUTIFY_FLAG" val="#wm#"/>
+  <p:tag name="KSO_WM_TEMPLATE_CATEGORY" val="custom"/>
+  <p:tag name="KSO_WM_TEMPLATE_INDEX" val="20205081"/>
+</p:tagLst>
+</file>
+
+<file path=ppt/tags/tag97.xml><?xml version="1.0" encoding="utf-8"?>
+<p:tagLst xmlns:p="http://schemas.openxmlformats.org/presentationml/2006/main">
+  <p:tag name="KSO_WM_UNIT_PLACING_PICTURE_USER_VIEWPORT" val="{&quot;height&quot;:6615,&quot;width&quot;:7234}"/>
+</p:tagLst>
+</file>
+
+<file path=ppt/tags/tag98.xml><?xml version="1.0" encoding="utf-8"?>
+<p:tagLst xmlns:p="http://schemas.openxmlformats.org/presentationml/2006/main">
+  <p:tag name="KSO_WM_BEAUTIFY_FLAG" val="#wm#"/>
+  <p:tag name="KSO_WM_TEMPLATE_CATEGORY" val="custom"/>
+  <p:tag name="KSO_WM_TEMPLATE_INDEX" val="20205081"/>
+</p:tagLst>
+</file>
+
+<file path=ppt/tags/tag99.xml><?xml version="1.0" encoding="utf-8"?>
+<p:tagLst xmlns:p="http://schemas.openxmlformats.org/presentationml/2006/main">
+  <p:tag name="KSO_WM_BEAUTIFY_FLAG" val="#wm#"/>
+  <p:tag name="KSO_WM_TEMPLATE_CATEGORY" val="custom"/>
+  <p:tag name="KSO_WM_TEMPLATE_INDEX" val="20205081"/>
 </p:tagLst>
 </file>
 
